--- a/Business case.pptx
+++ b/Business case.pptx
@@ -5,17 +5,33 @@
     <p:sldMasterId id="2147483648" r:id="rId1"/>
   </p:sldMasterIdLst>
   <p:notesMasterIdLst>
-    <p:notesMasterId r:id="rId10"/>
+    <p:notesMasterId r:id="rId26"/>
   </p:notesMasterIdLst>
   <p:sldIdLst>
     <p:sldId id="256" r:id="rId2"/>
-    <p:sldId id="261" r:id="rId3"/>
-    <p:sldId id="262" r:id="rId4"/>
-    <p:sldId id="263" r:id="rId5"/>
-    <p:sldId id="260" r:id="rId6"/>
-    <p:sldId id="257" r:id="rId7"/>
-    <p:sldId id="258" r:id="rId8"/>
-    <p:sldId id="259" r:id="rId9"/>
+    <p:sldId id="265" r:id="rId3"/>
+    <p:sldId id="266" r:id="rId4"/>
+    <p:sldId id="267" r:id="rId5"/>
+    <p:sldId id="268" r:id="rId6"/>
+    <p:sldId id="269" r:id="rId7"/>
+    <p:sldId id="270" r:id="rId8"/>
+    <p:sldId id="271" r:id="rId9"/>
+    <p:sldId id="272" r:id="rId10"/>
+    <p:sldId id="273" r:id="rId11"/>
+    <p:sldId id="274" r:id="rId12"/>
+    <p:sldId id="275" r:id="rId13"/>
+    <p:sldId id="276" r:id="rId14"/>
+    <p:sldId id="277" r:id="rId15"/>
+    <p:sldId id="278" r:id="rId16"/>
+    <p:sldId id="279" r:id="rId17"/>
+    <p:sldId id="261" r:id="rId18"/>
+    <p:sldId id="262" r:id="rId19"/>
+    <p:sldId id="263" r:id="rId20"/>
+    <p:sldId id="258" r:id="rId21"/>
+    <p:sldId id="260" r:id="rId22"/>
+    <p:sldId id="259" r:id="rId23"/>
+    <p:sldId id="257" r:id="rId24"/>
+    <p:sldId id="264" r:id="rId25"/>
   </p:sldIdLst>
   <p:sldSz cx="12192000" cy="6858000"/>
   <p:notesSz cx="6858000" cy="9144000"/>
@@ -204,7 +220,7 @@
           <a:p>
             <a:fld id="{87694DC1-E436-46D9-8A79-8CCDA564C367}" type="datetimeFigureOut">
               <a:rPr lang="pt-BR" smtClean="0"/>
-              <a:t>17/07/2026</a:t>
+              <a:t>19/07/2026</a:t>
             </a:fld>
             <a:endParaRPr lang="pt-BR"/>
           </a:p>
@@ -567,7 +583,7 @@
           <a:p>
             <a:fld id="{29DF578C-ED42-4F6C-BD62-E94C4D28A6EF}" type="slidenum">
               <a:rPr lang="pt-BR" smtClean="0"/>
-              <a:t>2</a:t>
+              <a:t>17</a:t>
             </a:fld>
             <a:endParaRPr lang="pt-BR"/>
           </a:p>
@@ -733,7 +749,7 @@
           <a:p>
             <a:fld id="{97602778-DE59-4F3E-9C44-7834ECBCAFE8}" type="datetimeFigureOut">
               <a:rPr lang="pt-BR" smtClean="0"/>
-              <a:t>17/07/2026</a:t>
+              <a:t>19/07/2026</a:t>
             </a:fld>
             <a:endParaRPr lang="pt-BR"/>
           </a:p>
@@ -931,7 +947,7 @@
           <a:p>
             <a:fld id="{97602778-DE59-4F3E-9C44-7834ECBCAFE8}" type="datetimeFigureOut">
               <a:rPr lang="pt-BR" smtClean="0"/>
-              <a:t>17/07/2026</a:t>
+              <a:t>19/07/2026</a:t>
             </a:fld>
             <a:endParaRPr lang="pt-BR"/>
           </a:p>
@@ -1139,7 +1155,7 @@
           <a:p>
             <a:fld id="{97602778-DE59-4F3E-9C44-7834ECBCAFE8}" type="datetimeFigureOut">
               <a:rPr lang="pt-BR" smtClean="0"/>
-              <a:t>17/07/2026</a:t>
+              <a:t>19/07/2026</a:t>
             </a:fld>
             <a:endParaRPr lang="pt-BR"/>
           </a:p>
@@ -1337,7 +1353,7 @@
           <a:p>
             <a:fld id="{97602778-DE59-4F3E-9C44-7834ECBCAFE8}" type="datetimeFigureOut">
               <a:rPr lang="pt-BR" smtClean="0"/>
-              <a:t>17/07/2026</a:t>
+              <a:t>19/07/2026</a:t>
             </a:fld>
             <a:endParaRPr lang="pt-BR"/>
           </a:p>
@@ -1612,7 +1628,7 @@
           <a:p>
             <a:fld id="{97602778-DE59-4F3E-9C44-7834ECBCAFE8}" type="datetimeFigureOut">
               <a:rPr lang="pt-BR" smtClean="0"/>
-              <a:t>17/07/2026</a:t>
+              <a:t>19/07/2026</a:t>
             </a:fld>
             <a:endParaRPr lang="pt-BR"/>
           </a:p>
@@ -1877,7 +1893,7 @@
           <a:p>
             <a:fld id="{97602778-DE59-4F3E-9C44-7834ECBCAFE8}" type="datetimeFigureOut">
               <a:rPr lang="pt-BR" smtClean="0"/>
-              <a:t>17/07/2026</a:t>
+              <a:t>19/07/2026</a:t>
             </a:fld>
             <a:endParaRPr lang="pt-BR"/>
           </a:p>
@@ -2289,7 +2305,7 @@
           <a:p>
             <a:fld id="{97602778-DE59-4F3E-9C44-7834ECBCAFE8}" type="datetimeFigureOut">
               <a:rPr lang="pt-BR" smtClean="0"/>
-              <a:t>17/07/2026</a:t>
+              <a:t>19/07/2026</a:t>
             </a:fld>
             <a:endParaRPr lang="pt-BR"/>
           </a:p>
@@ -2430,7 +2446,7 @@
           <a:p>
             <a:fld id="{97602778-DE59-4F3E-9C44-7834ECBCAFE8}" type="datetimeFigureOut">
               <a:rPr lang="pt-BR" smtClean="0"/>
-              <a:t>17/07/2026</a:t>
+              <a:t>19/07/2026</a:t>
             </a:fld>
             <a:endParaRPr lang="pt-BR"/>
           </a:p>
@@ -2543,7 +2559,7 @@
           <a:p>
             <a:fld id="{97602778-DE59-4F3E-9C44-7834ECBCAFE8}" type="datetimeFigureOut">
               <a:rPr lang="pt-BR" smtClean="0"/>
-              <a:t>17/07/2026</a:t>
+              <a:t>19/07/2026</a:t>
             </a:fld>
             <a:endParaRPr lang="pt-BR"/>
           </a:p>
@@ -2854,7 +2870,7 @@
           <a:p>
             <a:fld id="{97602778-DE59-4F3E-9C44-7834ECBCAFE8}" type="datetimeFigureOut">
               <a:rPr lang="pt-BR" smtClean="0"/>
-              <a:t>17/07/2026</a:t>
+              <a:t>19/07/2026</a:t>
             </a:fld>
             <a:endParaRPr lang="pt-BR"/>
           </a:p>
@@ -3142,7 +3158,7 @@
           <a:p>
             <a:fld id="{97602778-DE59-4F3E-9C44-7834ECBCAFE8}" type="datetimeFigureOut">
               <a:rPr lang="pt-BR" smtClean="0"/>
-              <a:t>17/07/2026</a:t>
+              <a:t>19/07/2026</a:t>
             </a:fld>
             <a:endParaRPr lang="pt-BR"/>
           </a:p>
@@ -3383,7 +3399,7 @@
           <a:p>
             <a:fld id="{97602778-DE59-4F3E-9C44-7834ECBCAFE8}" type="datetimeFigureOut">
               <a:rPr lang="pt-BR" smtClean="0"/>
-              <a:t>17/07/2026</a:t>
+              <a:t>19/07/2026</a:t>
             </a:fld>
             <a:endParaRPr lang="pt-BR"/>
           </a:p>
@@ -3846,10 +3862,24 @@
         </p:nvSpPr>
         <p:spPr/>
         <p:txBody>
-          <a:bodyPr/>
+          <a:bodyPr>
+            <a:normAutofit/>
+          </a:bodyPr>
           <a:lstStyle/>
           <a:p>
-            <a:endParaRPr lang="pt-BR"/>
+            <a:r>
+              <a:rPr lang="en-US" sz="3200" dirty="0"/>
+              <a:t> Demand Model Optimization at </a:t>
+            </a:r>
+            <a:r>
+              <a:rPr lang="en-US" sz="3200" dirty="0" err="1"/>
+              <a:t>RetailCo</a:t>
+            </a:r>
+            <a:r>
+              <a:rPr lang="en-US" sz="3200" dirty="0"/>
+              <a:t> </a:t>
+            </a:r>
+            <a:endParaRPr lang="pt-BR" sz="3200" dirty="0"/>
           </a:p>
         </p:txBody>
       </p:sp>
@@ -3866,7 +3896,2341 @@
 </p:sld>
 </file>
 
-<file path=ppt/slides/slide2.xml><?xml version="1.0" encoding="utf-8"?>
+<file path=ppt/slides/slide10.xml><?xml version="1.0" encoding="utf-8"?>
+<p:sld xmlns:a="http://schemas.openxmlformats.org/drawingml/2006/main" xmlns:r="http://schemas.openxmlformats.org/officeDocument/2006/relationships" xmlns:p="http://schemas.openxmlformats.org/presentationml/2006/main">
+  <p:cSld>
+    <p:spTree>
+      <p:nvGrpSpPr>
+        <p:cNvPr id="1" name="">
+          <a:extLst>
+            <a:ext uri="{FF2B5EF4-FFF2-40B4-BE49-F238E27FC236}">
+              <a16:creationId xmlns:a16="http://schemas.microsoft.com/office/drawing/2014/main" id="{43615608-6449-BE5E-F451-C8CE61B65ED7}"/>
+            </a:ext>
+          </a:extLst>
+        </p:cNvPr>
+        <p:cNvGrpSpPr/>
+        <p:nvPr/>
+      </p:nvGrpSpPr>
+      <p:grpSpPr>
+        <a:xfrm>
+          <a:off x="0" y="0"/>
+          <a:ext cx="0" cy="0"/>
+          <a:chOff x="0" y="0"/>
+          <a:chExt cx="0" cy="0"/>
+        </a:xfrm>
+      </p:grpSpPr>
+      <p:sp>
+        <p:nvSpPr>
+          <p:cNvPr id="2" name="Título 1">
+            <a:extLst>
+              <a:ext uri="{FF2B5EF4-FFF2-40B4-BE49-F238E27FC236}">
+                <a16:creationId xmlns:a16="http://schemas.microsoft.com/office/drawing/2014/main" id="{9657D73D-41A9-C5E6-757F-445770862A6F}"/>
+              </a:ext>
+            </a:extLst>
+          </p:cNvPr>
+          <p:cNvSpPr>
+            <a:spLocks noGrp="1"/>
+          </p:cNvSpPr>
+          <p:nvPr>
+            <p:ph type="title"/>
+          </p:nvPr>
+        </p:nvSpPr>
+        <p:spPr/>
+        <p:txBody>
+          <a:bodyPr/>
+          <a:lstStyle/>
+          <a:p>
+            <a:r>
+              <a:rPr lang="pt-BR" dirty="0" err="1"/>
+              <a:t>Question</a:t>
+            </a:r>
+            <a:r>
+              <a:rPr lang="pt-BR" dirty="0"/>
+              <a:t> 2 - </a:t>
+            </a:r>
+            <a:r>
+              <a:rPr lang="en-US" dirty="0"/>
+              <a:t>What can be done to improve the accuracy of the systems? </a:t>
+            </a:r>
+          </a:p>
+        </p:txBody>
+      </p:sp>
+      <p:sp>
+        <p:nvSpPr>
+          <p:cNvPr id="3" name="Espaço Reservado para Conteúdo 2">
+            <a:extLst>
+              <a:ext uri="{FF2B5EF4-FFF2-40B4-BE49-F238E27FC236}">
+                <a16:creationId xmlns:a16="http://schemas.microsoft.com/office/drawing/2014/main" id="{02018F6B-4B58-00D9-E2F5-C326945C2C0C}"/>
+              </a:ext>
+            </a:extLst>
+          </p:cNvPr>
+          <p:cNvSpPr>
+            <a:spLocks noGrp="1"/>
+          </p:cNvSpPr>
+          <p:nvPr>
+            <p:ph idx="1"/>
+          </p:nvPr>
+        </p:nvSpPr>
+        <p:spPr/>
+        <p:txBody>
+          <a:bodyPr/>
+          <a:lstStyle/>
+          <a:p>
+            <a:r>
+              <a:rPr lang="en-US" b="1" dirty="0" err="1"/>
+              <a:t>Resultado</a:t>
+            </a:r>
+            <a:r>
+              <a:rPr lang="en-US" b="1" dirty="0"/>
+              <a:t>: </a:t>
+            </a:r>
+            <a:r>
+              <a:rPr lang="en-US" b="1" dirty="0" err="1"/>
+              <a:t>acurácia</a:t>
+            </a:r>
+            <a:br>
+              <a:rPr lang="en-US" dirty="0"/>
+            </a:br>
+            <a:r>
+              <a:rPr lang="en-US" dirty="0"/>
+              <a:t>Antes/</a:t>
+            </a:r>
+            <a:r>
+              <a:rPr lang="en-US" dirty="0" err="1"/>
+              <a:t>depois</a:t>
+            </a:r>
+            <a:r>
+              <a:rPr lang="en-US" dirty="0"/>
+              <a:t> de </a:t>
+            </a:r>
+            <a:r>
+              <a:rPr lang="en-US" dirty="0" err="1"/>
+              <a:t>acurácia</a:t>
+            </a:r>
+            <a:r>
+              <a:rPr lang="en-US" dirty="0"/>
+              <a:t> (</a:t>
+            </a:r>
+            <a:r>
+              <a:rPr lang="en-US" dirty="0" err="1"/>
+              <a:t>aqui</a:t>
+            </a:r>
+            <a:r>
+              <a:rPr lang="en-US" dirty="0"/>
+              <a:t> é </a:t>
+            </a:r>
+            <a:r>
+              <a:rPr lang="en-US" dirty="0" err="1"/>
+              <a:t>onde</a:t>
+            </a:r>
+            <a:r>
+              <a:rPr lang="en-US" dirty="0"/>
+              <a:t> </a:t>
+            </a:r>
+            <a:r>
+              <a:rPr lang="en-US" dirty="0" err="1"/>
+              <a:t>entram</a:t>
+            </a:r>
+            <a:r>
+              <a:rPr lang="en-US" dirty="0"/>
+              <a:t> </a:t>
+            </a:r>
+            <a:r>
+              <a:rPr lang="en-US" dirty="0" err="1"/>
+              <a:t>os</a:t>
+            </a:r>
+            <a:r>
+              <a:rPr lang="en-US" dirty="0"/>
+              <a:t> </a:t>
+            </a:r>
+            <a:r>
+              <a:rPr lang="en-US" dirty="0" err="1"/>
+              <a:t>números</a:t>
+            </a:r>
+            <a:r>
+              <a:rPr lang="en-US" dirty="0"/>
+              <a:t> </a:t>
+            </a:r>
+            <a:r>
+              <a:rPr lang="en-US" dirty="0" err="1"/>
+              <a:t>que</a:t>
+            </a:r>
+            <a:r>
+              <a:rPr lang="en-US" dirty="0"/>
+              <a:t> </a:t>
+            </a:r>
+            <a:r>
+              <a:rPr lang="en-US" dirty="0" err="1"/>
+              <a:t>você</a:t>
+            </a:r>
+            <a:r>
+              <a:rPr lang="en-US" dirty="0"/>
+              <a:t> </a:t>
+            </a:r>
+            <a:r>
+              <a:rPr lang="en-US" dirty="0" err="1"/>
+              <a:t>vai</a:t>
+            </a:r>
+            <a:r>
+              <a:rPr lang="en-US" dirty="0"/>
+              <a:t> </a:t>
+            </a:r>
+            <a:r>
+              <a:rPr lang="en-US" dirty="0" err="1"/>
+              <a:t>confirmar</a:t>
+            </a:r>
+            <a:r>
+              <a:rPr lang="en-US" dirty="0"/>
+              <a:t>). </a:t>
+            </a:r>
+            <a:r>
+              <a:rPr lang="en-US" dirty="0" err="1"/>
+              <a:t>Explicar</a:t>
+            </a:r>
+            <a:r>
+              <a:rPr lang="en-US" dirty="0"/>
+              <a:t> </a:t>
+            </a:r>
+            <a:r>
+              <a:rPr lang="en-US" dirty="0" err="1"/>
+              <a:t>por</a:t>
+            </a:r>
+            <a:r>
+              <a:rPr lang="en-US" dirty="0"/>
+              <a:t> </a:t>
+            </a:r>
+            <a:r>
+              <a:rPr lang="en-US" dirty="0" err="1"/>
+              <a:t>que</a:t>
+            </a:r>
+            <a:r>
+              <a:rPr lang="en-US" dirty="0"/>
+              <a:t> </a:t>
+            </a:r>
+            <a:r>
+              <a:rPr lang="en-US" dirty="0" err="1"/>
+              <a:t>trocamos</a:t>
+            </a:r>
+            <a:r>
+              <a:rPr lang="en-US" dirty="0"/>
+              <a:t> MAPE </a:t>
+            </a:r>
+            <a:r>
+              <a:rPr lang="en-US" dirty="0" err="1"/>
+              <a:t>por</a:t>
+            </a:r>
+            <a:r>
+              <a:rPr lang="en-US" dirty="0"/>
+              <a:t> WAPE </a:t>
+            </a:r>
+            <a:r>
+              <a:rPr lang="en-US" dirty="0" err="1"/>
+              <a:t>como</a:t>
+            </a:r>
+            <a:r>
+              <a:rPr lang="en-US" dirty="0"/>
+              <a:t> </a:t>
+            </a:r>
+            <a:r>
+              <a:rPr lang="en-US" dirty="0" err="1"/>
+              <a:t>métrica</a:t>
+            </a:r>
+            <a:r>
+              <a:rPr lang="en-US" dirty="0"/>
+              <a:t> de </a:t>
+            </a:r>
+            <a:r>
+              <a:rPr lang="en-US" dirty="0" err="1"/>
+              <a:t>decisão</a:t>
+            </a:r>
+            <a:r>
+              <a:rPr lang="en-US" dirty="0"/>
+              <a:t>.</a:t>
+            </a:r>
+          </a:p>
+        </p:txBody>
+      </p:sp>
+    </p:spTree>
+    <p:extLst>
+      <p:ext uri="{BB962C8B-B14F-4D97-AF65-F5344CB8AC3E}">
+        <p14:creationId xmlns:p14="http://schemas.microsoft.com/office/powerpoint/2010/main" val="1682014130"/>
+      </p:ext>
+    </p:extLst>
+  </p:cSld>
+  <p:clrMapOvr>
+    <a:masterClrMapping/>
+  </p:clrMapOvr>
+</p:sld>
+</file>
+
+<file path=ppt/slides/slide11.xml><?xml version="1.0" encoding="utf-8"?>
+<p:sld xmlns:a="http://schemas.openxmlformats.org/drawingml/2006/main" xmlns:r="http://schemas.openxmlformats.org/officeDocument/2006/relationships" xmlns:p="http://schemas.openxmlformats.org/presentationml/2006/main">
+  <p:cSld>
+    <p:spTree>
+      <p:nvGrpSpPr>
+        <p:cNvPr id="1" name="">
+          <a:extLst>
+            <a:ext uri="{FF2B5EF4-FFF2-40B4-BE49-F238E27FC236}">
+              <a16:creationId xmlns:a16="http://schemas.microsoft.com/office/drawing/2014/main" id="{494B9CCC-429E-5193-A7FB-FFDFB586A05F}"/>
+            </a:ext>
+          </a:extLst>
+        </p:cNvPr>
+        <p:cNvGrpSpPr/>
+        <p:nvPr/>
+      </p:nvGrpSpPr>
+      <p:grpSpPr>
+        <a:xfrm>
+          <a:off x="0" y="0"/>
+          <a:ext cx="0" cy="0"/>
+          <a:chOff x="0" y="0"/>
+          <a:chExt cx="0" cy="0"/>
+        </a:xfrm>
+      </p:grpSpPr>
+      <p:sp>
+        <p:nvSpPr>
+          <p:cNvPr id="2" name="Título 1">
+            <a:extLst>
+              <a:ext uri="{FF2B5EF4-FFF2-40B4-BE49-F238E27FC236}">
+                <a16:creationId xmlns:a16="http://schemas.microsoft.com/office/drawing/2014/main" id="{604047D0-DE45-67AD-2897-9657EAF06E7A}"/>
+              </a:ext>
+            </a:extLst>
+          </p:cNvPr>
+          <p:cNvSpPr>
+            <a:spLocks noGrp="1"/>
+          </p:cNvSpPr>
+          <p:nvPr>
+            <p:ph type="title"/>
+          </p:nvPr>
+        </p:nvSpPr>
+        <p:spPr/>
+        <p:txBody>
+          <a:bodyPr/>
+          <a:lstStyle/>
+          <a:p>
+            <a:r>
+              <a:rPr lang="pt-BR" dirty="0" err="1"/>
+              <a:t>Question</a:t>
+            </a:r>
+            <a:r>
+              <a:rPr lang="pt-BR" dirty="0"/>
+              <a:t> 2 - </a:t>
+            </a:r>
+            <a:r>
+              <a:rPr lang="en-US" dirty="0"/>
+              <a:t>What can be done to improve the accuracy of the systems? </a:t>
+            </a:r>
+          </a:p>
+        </p:txBody>
+      </p:sp>
+      <p:sp>
+        <p:nvSpPr>
+          <p:cNvPr id="3" name="Espaço Reservado para Conteúdo 2">
+            <a:extLst>
+              <a:ext uri="{FF2B5EF4-FFF2-40B4-BE49-F238E27FC236}">
+                <a16:creationId xmlns:a16="http://schemas.microsoft.com/office/drawing/2014/main" id="{A9D0E735-E5D1-8AE1-3591-D23617BA8FCC}"/>
+              </a:ext>
+            </a:extLst>
+          </p:cNvPr>
+          <p:cNvSpPr>
+            <a:spLocks noGrp="1"/>
+          </p:cNvSpPr>
+          <p:nvPr>
+            <p:ph idx="1"/>
+          </p:nvPr>
+        </p:nvSpPr>
+        <p:spPr/>
+        <p:txBody>
+          <a:bodyPr/>
+          <a:lstStyle/>
+          <a:p>
+            <a:r>
+              <a:rPr lang="en-US" b="1" dirty="0" err="1"/>
+              <a:t>Resultado</a:t>
+            </a:r>
+            <a:r>
+              <a:rPr lang="en-US" b="1" dirty="0"/>
+              <a:t>: </a:t>
+            </a:r>
+            <a:r>
+              <a:rPr lang="en-US" b="1" dirty="0" err="1"/>
+              <a:t>decomposição</a:t>
+            </a:r>
+            <a:r>
+              <a:rPr lang="en-US" b="1" dirty="0"/>
+              <a:t> </a:t>
+            </a:r>
+            <a:r>
+              <a:rPr lang="en-US" b="1" dirty="0" err="1"/>
+              <a:t>corrigida</a:t>
+            </a:r>
+            <a:br>
+              <a:rPr lang="en-US" dirty="0"/>
+            </a:br>
+            <a:r>
+              <a:rPr lang="en-US" dirty="0" err="1"/>
+              <a:t>Preço</a:t>
+            </a:r>
+            <a:r>
+              <a:rPr lang="en-US" dirty="0"/>
+              <a:t> agora com </a:t>
+            </a:r>
+            <a:r>
+              <a:rPr lang="en-US" dirty="0" err="1"/>
+              <a:t>sinal</a:t>
+            </a:r>
+            <a:r>
+              <a:rPr lang="en-US" dirty="0"/>
+              <a:t> </a:t>
+            </a:r>
+            <a:r>
+              <a:rPr lang="en-US" dirty="0" err="1"/>
+              <a:t>correto</a:t>
+            </a:r>
+            <a:r>
+              <a:rPr lang="en-US" dirty="0"/>
+              <a:t> (</a:t>
+            </a:r>
+            <a:r>
+              <a:rPr lang="en-US" dirty="0" err="1"/>
+              <a:t>negativo</a:t>
+            </a:r>
+            <a:r>
+              <a:rPr lang="en-US" dirty="0"/>
+              <a:t>); </a:t>
+            </a:r>
+            <a:r>
+              <a:rPr lang="en-US" dirty="0" err="1"/>
+              <a:t>validação</a:t>
+            </a:r>
+            <a:r>
+              <a:rPr lang="en-US" dirty="0"/>
+              <a:t> </a:t>
+            </a:r>
+            <a:r>
+              <a:rPr lang="en-US" dirty="0" err="1"/>
+              <a:t>estatística</a:t>
+            </a:r>
+            <a:r>
+              <a:rPr lang="en-US" dirty="0"/>
+              <a:t> </a:t>
+            </a:r>
+            <a:r>
+              <a:rPr lang="en-US" dirty="0" err="1"/>
+              <a:t>mostrando</a:t>
+            </a:r>
+            <a:r>
+              <a:rPr lang="en-US" dirty="0"/>
+              <a:t> </a:t>
+            </a:r>
+            <a:r>
+              <a:rPr lang="en-US" dirty="0" err="1"/>
+              <a:t>que</a:t>
+            </a:r>
+            <a:r>
+              <a:rPr lang="en-US" dirty="0"/>
+              <a:t> </a:t>
+            </a:r>
+            <a:r>
+              <a:rPr lang="en-US" dirty="0" err="1"/>
+              <a:t>só</a:t>
+            </a:r>
+            <a:r>
+              <a:rPr lang="en-US" dirty="0"/>
+              <a:t> 2 de 15 </a:t>
+            </a:r>
+            <a:r>
+              <a:rPr lang="en-US" dirty="0" err="1"/>
+              <a:t>combinações</a:t>
+            </a:r>
+            <a:r>
+              <a:rPr lang="en-US" dirty="0"/>
+              <a:t> SKU-canal </a:t>
+            </a:r>
+            <a:r>
+              <a:rPr lang="en-US" dirty="0" err="1"/>
+              <a:t>têm</a:t>
+            </a:r>
+            <a:r>
+              <a:rPr lang="en-US" dirty="0"/>
+              <a:t> </a:t>
+            </a:r>
+            <a:r>
+              <a:rPr lang="en-US" dirty="0" err="1"/>
+              <a:t>elasticidade</a:t>
+            </a:r>
+            <a:r>
+              <a:rPr lang="en-US" dirty="0"/>
+              <a:t> </a:t>
+            </a:r>
+            <a:r>
+              <a:rPr lang="en-US" dirty="0" err="1"/>
+              <a:t>significativa</a:t>
+            </a:r>
+            <a:r>
+              <a:rPr lang="en-US" dirty="0"/>
+              <a:t> — </a:t>
+            </a:r>
+            <a:r>
+              <a:rPr lang="en-US" dirty="0" err="1"/>
+              <a:t>ou</a:t>
+            </a:r>
+            <a:r>
+              <a:rPr lang="en-US" dirty="0"/>
+              <a:t> </a:t>
+            </a:r>
+            <a:r>
+              <a:rPr lang="en-US" dirty="0" err="1"/>
+              <a:t>seja</a:t>
+            </a:r>
+            <a:r>
+              <a:rPr lang="en-US" dirty="0"/>
+              <a:t>, o </a:t>
+            </a:r>
+            <a:r>
+              <a:rPr lang="en-US" dirty="0" err="1"/>
+              <a:t>efeito</a:t>
+            </a:r>
+            <a:r>
+              <a:rPr lang="en-US" dirty="0"/>
+              <a:t> </a:t>
+            </a:r>
+            <a:r>
+              <a:rPr lang="en-US" dirty="0" err="1"/>
+              <a:t>nulo</a:t>
+            </a:r>
+            <a:r>
+              <a:rPr lang="en-US" dirty="0"/>
+              <a:t> do case é real, </a:t>
+            </a:r>
+            <a:r>
+              <a:rPr lang="en-US" dirty="0" err="1"/>
+              <a:t>não</a:t>
+            </a:r>
+            <a:r>
+              <a:rPr lang="en-US" dirty="0"/>
+              <a:t> </a:t>
+            </a:r>
+            <a:r>
+              <a:rPr lang="en-US" dirty="0" err="1"/>
+              <a:t>falha</a:t>
+            </a:r>
+            <a:r>
+              <a:rPr lang="en-US" dirty="0"/>
+              <a:t> de </a:t>
+            </a:r>
+            <a:r>
+              <a:rPr lang="en-US" dirty="0" err="1"/>
+              <a:t>execução</a:t>
+            </a:r>
+            <a:r>
+              <a:rPr lang="en-US" dirty="0"/>
+              <a:t>. </a:t>
+            </a:r>
+            <a:r>
+              <a:rPr lang="en-US" dirty="0" err="1"/>
+              <a:t>Promoção</a:t>
+            </a:r>
+            <a:r>
+              <a:rPr lang="en-US" dirty="0"/>
+              <a:t> vs </a:t>
+            </a:r>
+            <a:r>
+              <a:rPr lang="en-US" dirty="0" err="1"/>
+              <a:t>Publicidade</a:t>
+            </a:r>
+            <a:r>
+              <a:rPr lang="en-US" dirty="0"/>
+              <a:t> </a:t>
+            </a:r>
+            <a:r>
+              <a:rPr lang="en-US" dirty="0" err="1"/>
+              <a:t>rebalanceados</a:t>
+            </a:r>
+            <a:r>
+              <a:rPr lang="en-US" dirty="0"/>
+              <a:t>.</a:t>
+            </a:r>
+          </a:p>
+        </p:txBody>
+      </p:sp>
+    </p:spTree>
+    <p:extLst>
+      <p:ext uri="{BB962C8B-B14F-4D97-AF65-F5344CB8AC3E}">
+        <p14:creationId xmlns:p14="http://schemas.microsoft.com/office/powerpoint/2010/main" val="978802238"/>
+      </p:ext>
+    </p:extLst>
+  </p:cSld>
+  <p:clrMapOvr>
+    <a:masterClrMapping/>
+  </p:clrMapOvr>
+</p:sld>
+</file>
+
+<file path=ppt/slides/slide12.xml><?xml version="1.0" encoding="utf-8"?>
+<p:sld xmlns:a="http://schemas.openxmlformats.org/drawingml/2006/main" xmlns:r="http://schemas.openxmlformats.org/officeDocument/2006/relationships" xmlns:p="http://schemas.openxmlformats.org/presentationml/2006/main">
+  <p:cSld>
+    <p:spTree>
+      <p:nvGrpSpPr>
+        <p:cNvPr id="1" name="">
+          <a:extLst>
+            <a:ext uri="{FF2B5EF4-FFF2-40B4-BE49-F238E27FC236}">
+              <a16:creationId xmlns:a16="http://schemas.microsoft.com/office/drawing/2014/main" id="{AEDE9556-B3D4-ABCE-D035-27F401BC7002}"/>
+            </a:ext>
+          </a:extLst>
+        </p:cNvPr>
+        <p:cNvGrpSpPr/>
+        <p:nvPr/>
+      </p:nvGrpSpPr>
+      <p:grpSpPr>
+        <a:xfrm>
+          <a:off x="0" y="0"/>
+          <a:ext cx="0" cy="0"/>
+          <a:chOff x="0" y="0"/>
+          <a:chExt cx="0" cy="0"/>
+        </a:xfrm>
+      </p:grpSpPr>
+      <p:sp>
+        <p:nvSpPr>
+          <p:cNvPr id="2" name="Título 1">
+            <a:extLst>
+              <a:ext uri="{FF2B5EF4-FFF2-40B4-BE49-F238E27FC236}">
+                <a16:creationId xmlns:a16="http://schemas.microsoft.com/office/drawing/2014/main" id="{5EA531E0-D702-C4B4-B957-F05366B804C9}"/>
+              </a:ext>
+            </a:extLst>
+          </p:cNvPr>
+          <p:cNvSpPr>
+            <a:spLocks noGrp="1"/>
+          </p:cNvSpPr>
+          <p:nvPr>
+            <p:ph type="title"/>
+          </p:nvPr>
+        </p:nvSpPr>
+        <p:spPr/>
+        <p:txBody>
+          <a:bodyPr/>
+          <a:lstStyle/>
+          <a:p>
+            <a:r>
+              <a:rPr lang="pt-BR" dirty="0" err="1"/>
+              <a:t>Question</a:t>
+            </a:r>
+            <a:r>
+              <a:rPr lang="pt-BR" dirty="0"/>
+              <a:t> 2 - </a:t>
+            </a:r>
+            <a:r>
+              <a:rPr lang="en-US" dirty="0"/>
+              <a:t>What can be done to improve the accuracy of the systems? </a:t>
+            </a:r>
+          </a:p>
+        </p:txBody>
+      </p:sp>
+      <p:sp>
+        <p:nvSpPr>
+          <p:cNvPr id="3" name="Espaço Reservado para Conteúdo 2">
+            <a:extLst>
+              <a:ext uri="{FF2B5EF4-FFF2-40B4-BE49-F238E27FC236}">
+                <a16:creationId xmlns:a16="http://schemas.microsoft.com/office/drawing/2014/main" id="{A79CE71B-8E9C-95B4-9CE5-4C035024F393}"/>
+              </a:ext>
+            </a:extLst>
+          </p:cNvPr>
+          <p:cNvSpPr>
+            <a:spLocks noGrp="1"/>
+          </p:cNvSpPr>
+          <p:nvPr>
+            <p:ph idx="1"/>
+          </p:nvPr>
+        </p:nvSpPr>
+        <p:spPr/>
+        <p:txBody>
+          <a:bodyPr/>
+          <a:lstStyle/>
+          <a:p>
+            <a:r>
+              <a:rPr lang="en-US" b="1" dirty="0" err="1"/>
+              <a:t>Ganho</a:t>
+            </a:r>
+            <a:r>
+              <a:rPr lang="en-US" b="1" dirty="0"/>
+              <a:t> de </a:t>
+            </a:r>
+            <a:r>
+              <a:rPr lang="en-US" b="1" dirty="0" err="1"/>
+              <a:t>negócio</a:t>
+            </a:r>
+            <a:r>
+              <a:rPr lang="en-US" b="1" dirty="0"/>
+              <a:t>: </a:t>
+            </a:r>
+            <a:r>
+              <a:rPr lang="en-US" b="1" dirty="0" err="1"/>
+              <a:t>ajuste</a:t>
+            </a:r>
+            <a:r>
+              <a:rPr lang="en-US" b="1" dirty="0"/>
+              <a:t> </a:t>
+            </a:r>
+            <a:r>
+              <a:rPr lang="en-US" b="1" dirty="0" err="1"/>
+              <a:t>assimétrico</a:t>
+            </a:r>
+            <a:r>
+              <a:rPr lang="en-US" b="1" dirty="0"/>
+              <a:t> </a:t>
+            </a:r>
+            <a:r>
+              <a:rPr lang="en-US" b="1" dirty="0" err="1"/>
+              <a:t>por</a:t>
+            </a:r>
+            <a:r>
+              <a:rPr lang="en-US" b="1" dirty="0"/>
+              <a:t> </a:t>
+            </a:r>
+            <a:r>
+              <a:rPr lang="en-US" b="1" dirty="0" err="1"/>
+              <a:t>validade</a:t>
+            </a:r>
+            <a:br>
+              <a:rPr lang="en-US" dirty="0"/>
+            </a:br>
+            <a:r>
+              <a:rPr lang="en-US" dirty="0"/>
+              <a:t>Como </a:t>
+            </a:r>
+            <a:r>
+              <a:rPr lang="en-US" dirty="0" err="1"/>
+              <a:t>usamos</a:t>
+            </a:r>
+            <a:r>
+              <a:rPr lang="en-US" dirty="0"/>
+              <a:t> a </a:t>
+            </a:r>
+            <a:r>
+              <a:rPr lang="en-US" dirty="0" err="1"/>
+              <a:t>tabela</a:t>
+            </a:r>
+            <a:r>
+              <a:rPr lang="en-US" dirty="0"/>
+              <a:t> de shelf life (</a:t>
+            </a:r>
+            <a:r>
+              <a:rPr lang="en-US" dirty="0" err="1"/>
+              <a:t>não</a:t>
+            </a:r>
+            <a:r>
+              <a:rPr lang="en-US" dirty="0"/>
+              <a:t> </a:t>
+            </a:r>
+            <a:r>
+              <a:rPr lang="en-US" dirty="0" err="1"/>
+              <a:t>usada</a:t>
+            </a:r>
+            <a:r>
+              <a:rPr lang="en-US" dirty="0"/>
+              <a:t> antes) </a:t>
+            </a:r>
+            <a:r>
+              <a:rPr lang="en-US" dirty="0" err="1"/>
+              <a:t>pra</a:t>
+            </a:r>
+            <a:r>
+              <a:rPr lang="en-US" dirty="0"/>
+              <a:t> </a:t>
+            </a:r>
+            <a:r>
+              <a:rPr lang="en-US" dirty="0" err="1"/>
+              <a:t>enviesar</a:t>
+            </a:r>
+            <a:r>
+              <a:rPr lang="en-US" dirty="0"/>
+              <a:t> a </a:t>
+            </a:r>
+            <a:r>
+              <a:rPr lang="en-US" dirty="0" err="1"/>
+              <a:t>previsão</a:t>
+            </a:r>
+            <a:r>
+              <a:rPr lang="en-US" dirty="0"/>
+              <a:t>: </a:t>
+            </a:r>
+            <a:r>
+              <a:rPr lang="en-US" dirty="0" err="1"/>
+              <a:t>produtos</a:t>
+            </a:r>
+            <a:r>
+              <a:rPr lang="en-US" dirty="0"/>
+              <a:t> de </a:t>
+            </a:r>
+            <a:r>
+              <a:rPr lang="en-US" dirty="0" err="1"/>
+              <a:t>validade</a:t>
+            </a:r>
+            <a:r>
+              <a:rPr lang="en-US" dirty="0"/>
+              <a:t> </a:t>
+            </a:r>
+            <a:r>
+              <a:rPr lang="en-US" dirty="0" err="1"/>
+              <a:t>curta</a:t>
+            </a:r>
+            <a:r>
+              <a:rPr lang="en-US" dirty="0"/>
+              <a:t> → </a:t>
+            </a:r>
+            <a:r>
+              <a:rPr lang="en-US" dirty="0" err="1"/>
+              <a:t>previsão</a:t>
+            </a:r>
+            <a:r>
+              <a:rPr lang="en-US" dirty="0"/>
+              <a:t> </a:t>
+            </a:r>
+            <a:r>
+              <a:rPr lang="en-US" dirty="0" err="1"/>
+              <a:t>mais</a:t>
+            </a:r>
+            <a:r>
+              <a:rPr lang="en-US" dirty="0"/>
+              <a:t> </a:t>
+            </a:r>
+            <a:r>
+              <a:rPr lang="en-US" dirty="0" err="1"/>
+              <a:t>conservadora</a:t>
+            </a:r>
+            <a:r>
+              <a:rPr lang="en-US" dirty="0"/>
+              <a:t> (</a:t>
+            </a:r>
+            <a:r>
+              <a:rPr lang="en-US" dirty="0" err="1"/>
+              <a:t>reduz</a:t>
+            </a:r>
+            <a:r>
+              <a:rPr lang="en-US" dirty="0"/>
+              <a:t> write-off); </a:t>
+            </a:r>
+            <a:r>
+              <a:rPr lang="en-US" dirty="0" err="1"/>
+              <a:t>validade</a:t>
+            </a:r>
+            <a:r>
+              <a:rPr lang="en-US" dirty="0"/>
+              <a:t> longa → </a:t>
+            </a:r>
+            <a:r>
+              <a:rPr lang="en-US" dirty="0" err="1"/>
+              <a:t>previsão</a:t>
+            </a:r>
+            <a:r>
+              <a:rPr lang="en-US" dirty="0"/>
+              <a:t> </a:t>
+            </a:r>
+            <a:r>
+              <a:rPr lang="en-US" dirty="0" err="1"/>
+              <a:t>mais</a:t>
+            </a:r>
+            <a:r>
+              <a:rPr lang="en-US" dirty="0"/>
+              <a:t> </a:t>
+            </a:r>
+            <a:r>
+              <a:rPr lang="en-US" dirty="0" err="1"/>
+              <a:t>generosa</a:t>
+            </a:r>
+            <a:r>
+              <a:rPr lang="en-US" dirty="0"/>
+              <a:t> (</a:t>
+            </a:r>
+            <a:r>
+              <a:rPr lang="en-US" dirty="0" err="1"/>
+              <a:t>reduz</a:t>
+            </a:r>
+            <a:r>
+              <a:rPr lang="en-US" dirty="0"/>
+              <a:t> stock-out). </a:t>
+            </a:r>
+            <a:r>
+              <a:rPr lang="en-US" dirty="0" err="1"/>
+              <a:t>Conecta</a:t>
+            </a:r>
+            <a:r>
+              <a:rPr lang="en-US" dirty="0"/>
+              <a:t> a </a:t>
+            </a:r>
+            <a:r>
+              <a:rPr lang="en-US" dirty="0" err="1"/>
+              <a:t>solução</a:t>
+            </a:r>
+            <a:r>
+              <a:rPr lang="en-US" dirty="0"/>
+              <a:t> </a:t>
+            </a:r>
+            <a:r>
+              <a:rPr lang="en-US" dirty="0" err="1"/>
+              <a:t>técnica</a:t>
+            </a:r>
+            <a:r>
+              <a:rPr lang="en-US" dirty="0"/>
+              <a:t> de volta </a:t>
+            </a:r>
+            <a:r>
+              <a:rPr lang="en-US" dirty="0" err="1"/>
+              <a:t>aos</a:t>
+            </a:r>
+            <a:r>
+              <a:rPr lang="en-US" dirty="0"/>
+              <a:t> $ do </a:t>
+            </a:r>
+            <a:r>
+              <a:rPr lang="en-US" dirty="0" err="1"/>
+              <a:t>Problema</a:t>
+            </a:r>
+            <a:r>
+              <a:rPr lang="en-US" dirty="0"/>
+              <a:t> 1.</a:t>
+            </a:r>
+          </a:p>
+        </p:txBody>
+      </p:sp>
+    </p:spTree>
+    <p:extLst>
+      <p:ext uri="{BB962C8B-B14F-4D97-AF65-F5344CB8AC3E}">
+        <p14:creationId xmlns:p14="http://schemas.microsoft.com/office/powerpoint/2010/main" val="2086988706"/>
+      </p:ext>
+    </p:extLst>
+  </p:cSld>
+  <p:clrMapOvr>
+    <a:masterClrMapping/>
+  </p:clrMapOvr>
+</p:sld>
+</file>
+
+<file path=ppt/slides/slide13.xml><?xml version="1.0" encoding="utf-8"?>
+<p:sld xmlns:a="http://schemas.openxmlformats.org/drawingml/2006/main" xmlns:r="http://schemas.openxmlformats.org/officeDocument/2006/relationships" xmlns:p="http://schemas.openxmlformats.org/presentationml/2006/main">
+  <p:cSld>
+    <p:spTree>
+      <p:nvGrpSpPr>
+        <p:cNvPr id="1" name="">
+          <a:extLst>
+            <a:ext uri="{FF2B5EF4-FFF2-40B4-BE49-F238E27FC236}">
+              <a16:creationId xmlns:a16="http://schemas.microsoft.com/office/drawing/2014/main" id="{5FE822E8-0D98-6BEF-2EF1-3E716D72231C}"/>
+            </a:ext>
+          </a:extLst>
+        </p:cNvPr>
+        <p:cNvGrpSpPr/>
+        <p:nvPr/>
+      </p:nvGrpSpPr>
+      <p:grpSpPr>
+        <a:xfrm>
+          <a:off x="0" y="0"/>
+          <a:ext cx="0" cy="0"/>
+          <a:chOff x="0" y="0"/>
+          <a:chExt cx="0" cy="0"/>
+        </a:xfrm>
+      </p:grpSpPr>
+      <p:sp>
+        <p:nvSpPr>
+          <p:cNvPr id="2" name="Título 1">
+            <a:extLst>
+              <a:ext uri="{FF2B5EF4-FFF2-40B4-BE49-F238E27FC236}">
+                <a16:creationId xmlns:a16="http://schemas.microsoft.com/office/drawing/2014/main" id="{4355B7E9-2C63-BA97-E65E-50A8CE758F50}"/>
+              </a:ext>
+            </a:extLst>
+          </p:cNvPr>
+          <p:cNvSpPr>
+            <a:spLocks noGrp="1"/>
+          </p:cNvSpPr>
+          <p:nvPr>
+            <p:ph type="title"/>
+          </p:nvPr>
+        </p:nvSpPr>
+        <p:spPr/>
+        <p:txBody>
+          <a:bodyPr>
+            <a:normAutofit fontScale="90000"/>
+          </a:bodyPr>
+          <a:lstStyle/>
+          <a:p>
+            <a:r>
+              <a:rPr lang="pt-BR" dirty="0" err="1"/>
+              <a:t>Question</a:t>
+            </a:r>
+            <a:r>
+              <a:rPr lang="pt-BR" dirty="0"/>
+              <a:t> 3 - </a:t>
+            </a:r>
+            <a:r>
+              <a:rPr lang="en-US" sz="3600" dirty="0"/>
+              <a:t>How do you ensure that the proposed solutions will work? And to what extent will they resolve the issues?</a:t>
+            </a:r>
+            <a:endParaRPr lang="en-US" dirty="0"/>
+          </a:p>
+        </p:txBody>
+      </p:sp>
+      <p:sp>
+        <p:nvSpPr>
+          <p:cNvPr id="3" name="Espaço Reservado para Conteúdo 2">
+            <a:extLst>
+              <a:ext uri="{FF2B5EF4-FFF2-40B4-BE49-F238E27FC236}">
+                <a16:creationId xmlns:a16="http://schemas.microsoft.com/office/drawing/2014/main" id="{F155D218-0C91-1FD6-D42E-B852B4453D9B}"/>
+              </a:ext>
+            </a:extLst>
+          </p:cNvPr>
+          <p:cNvSpPr>
+            <a:spLocks noGrp="1"/>
+          </p:cNvSpPr>
+          <p:nvPr>
+            <p:ph idx="1"/>
+          </p:nvPr>
+        </p:nvSpPr>
+        <p:spPr/>
+        <p:txBody>
+          <a:bodyPr>
+            <a:normAutofit lnSpcReduction="10000"/>
+          </a:bodyPr>
+          <a:lstStyle/>
+          <a:p>
+            <a:r>
+              <a:rPr lang="pt-BR" dirty="0"/>
+              <a:t>The models are </a:t>
+            </a:r>
+            <a:r>
+              <a:rPr lang="pt-BR" dirty="0" err="1"/>
+              <a:t>already</a:t>
+            </a:r>
+            <a:r>
+              <a:rPr lang="pt-BR" dirty="0"/>
+              <a:t> </a:t>
+            </a:r>
+            <a:r>
+              <a:rPr lang="pt-BR" dirty="0" err="1"/>
+              <a:t>tested</a:t>
+            </a:r>
+            <a:r>
+              <a:rPr lang="pt-BR" dirty="0"/>
+              <a:t> </a:t>
+            </a:r>
+            <a:r>
+              <a:rPr lang="pt-BR" dirty="0" err="1"/>
+              <a:t>with</a:t>
+            </a:r>
+            <a:r>
+              <a:rPr lang="pt-BR" dirty="0"/>
+              <a:t> </a:t>
+            </a:r>
+            <a:r>
+              <a:rPr lang="pt-BR" dirty="0" err="1"/>
+              <a:t>actuals</a:t>
+            </a:r>
+            <a:r>
+              <a:rPr lang="pt-BR" dirty="0"/>
+              <a:t> </a:t>
+            </a:r>
+            <a:r>
+              <a:rPr lang="pt-BR" dirty="0" err="1"/>
+              <a:t>history</a:t>
+            </a:r>
+            <a:r>
+              <a:rPr lang="pt-BR" dirty="0"/>
+              <a:t> </a:t>
+            </a:r>
+            <a:r>
+              <a:rPr lang="pt-BR" dirty="0" err="1"/>
+              <a:t>we</a:t>
+            </a:r>
+            <a:r>
+              <a:rPr lang="pt-BR" dirty="0"/>
+              <a:t> </a:t>
+            </a:r>
+            <a:r>
+              <a:rPr lang="pt-BR" dirty="0" err="1"/>
+              <a:t>have</a:t>
+            </a:r>
+            <a:r>
+              <a:rPr lang="pt-BR" dirty="0"/>
+              <a:t> </a:t>
+            </a:r>
+            <a:r>
+              <a:rPr lang="pt-BR" dirty="0" err="1"/>
+              <a:t>until</a:t>
+            </a:r>
+            <a:r>
+              <a:rPr lang="pt-BR" dirty="0"/>
+              <a:t> </a:t>
+            </a:r>
+            <a:r>
+              <a:rPr lang="pt-BR" dirty="0" err="1"/>
+              <a:t>now</a:t>
+            </a:r>
+            <a:r>
+              <a:rPr lang="pt-BR" dirty="0"/>
+              <a:t> </a:t>
+            </a:r>
+            <a:r>
+              <a:rPr lang="pt-BR" dirty="0" err="1"/>
+              <a:t>and</a:t>
+            </a:r>
+            <a:r>
+              <a:rPr lang="pt-BR" dirty="0"/>
+              <a:t> </a:t>
+            </a:r>
+            <a:r>
+              <a:rPr lang="pt-BR" dirty="0" err="1"/>
+              <a:t>those</a:t>
+            </a:r>
+            <a:r>
+              <a:rPr lang="pt-BR" dirty="0"/>
+              <a:t> </a:t>
+            </a:r>
+            <a:r>
+              <a:rPr lang="pt-BR" dirty="0" err="1"/>
+              <a:t>numbers</a:t>
+            </a:r>
+            <a:r>
+              <a:rPr lang="pt-BR" dirty="0"/>
+              <a:t> </a:t>
+            </a:r>
+            <a:r>
+              <a:rPr lang="pt-BR" dirty="0" err="1"/>
+              <a:t>showed</a:t>
+            </a:r>
+            <a:r>
+              <a:rPr lang="pt-BR" dirty="0"/>
+              <a:t> are </a:t>
+            </a:r>
+            <a:r>
+              <a:rPr lang="pt-BR" dirty="0" err="1"/>
+              <a:t>results</a:t>
+            </a:r>
+            <a:r>
+              <a:rPr lang="pt-BR" dirty="0"/>
+              <a:t> </a:t>
+            </a:r>
+            <a:r>
+              <a:rPr lang="pt-BR" dirty="0" err="1"/>
+              <a:t>of</a:t>
+            </a:r>
+            <a:r>
+              <a:rPr lang="pt-BR" dirty="0"/>
+              <a:t> </a:t>
+            </a:r>
+            <a:r>
+              <a:rPr lang="pt-BR" dirty="0" err="1"/>
+              <a:t>our</a:t>
+            </a:r>
+            <a:r>
+              <a:rPr lang="pt-BR" dirty="0"/>
+              <a:t> </a:t>
+            </a:r>
+            <a:r>
+              <a:rPr lang="pt-BR" dirty="0" err="1"/>
+              <a:t>the</a:t>
+            </a:r>
+            <a:r>
+              <a:rPr lang="pt-BR" dirty="0"/>
+              <a:t> </a:t>
+            </a:r>
+            <a:r>
+              <a:rPr lang="pt-BR" dirty="0" err="1"/>
+              <a:t>most</a:t>
+            </a:r>
+            <a:r>
+              <a:rPr lang="pt-BR" dirty="0"/>
+              <a:t> </a:t>
+            </a:r>
+            <a:r>
+              <a:rPr lang="pt-BR" dirty="0" err="1"/>
+              <a:t>updated</a:t>
+            </a:r>
+            <a:r>
+              <a:rPr lang="pt-BR" dirty="0"/>
+              <a:t> models from </a:t>
+            </a:r>
+            <a:r>
+              <a:rPr lang="pt-BR" dirty="0" err="1"/>
+              <a:t>the</a:t>
+            </a:r>
+            <a:r>
+              <a:rPr lang="pt-BR" dirty="0"/>
+              <a:t> </a:t>
+            </a:r>
+            <a:r>
+              <a:rPr lang="pt-BR" dirty="0" err="1"/>
+              <a:t>experiments</a:t>
+            </a:r>
+            <a:endParaRPr lang="pt-BR" dirty="0"/>
+          </a:p>
+          <a:p>
+            <a:r>
+              <a:rPr lang="pt-BR" dirty="0"/>
+              <a:t>For </a:t>
+            </a:r>
+            <a:r>
+              <a:rPr lang="pt-BR" dirty="0" err="1"/>
+              <a:t>obtain</a:t>
+            </a:r>
+            <a:r>
+              <a:rPr lang="pt-BR" dirty="0"/>
+              <a:t> na </a:t>
+            </a:r>
+            <a:r>
+              <a:rPr lang="pt-BR" dirty="0" err="1"/>
+              <a:t>accuracy</a:t>
+            </a:r>
+            <a:r>
+              <a:rPr lang="pt-BR" dirty="0"/>
+              <a:t> more close </a:t>
+            </a:r>
+            <a:r>
+              <a:rPr lang="pt-BR" dirty="0" err="1"/>
+              <a:t>to</a:t>
+            </a:r>
+            <a:r>
+              <a:rPr lang="pt-BR" dirty="0"/>
+              <a:t> </a:t>
+            </a:r>
+            <a:r>
+              <a:rPr lang="pt-BR" dirty="0" err="1"/>
+              <a:t>the</a:t>
+            </a:r>
+            <a:r>
+              <a:rPr lang="pt-BR" dirty="0"/>
+              <a:t> reality, </a:t>
+            </a:r>
+            <a:r>
+              <a:rPr lang="pt-BR" dirty="0" err="1"/>
+              <a:t>first</a:t>
+            </a:r>
+            <a:r>
+              <a:rPr lang="pt-BR" dirty="0"/>
+              <a:t> </a:t>
+            </a:r>
+            <a:r>
+              <a:rPr lang="pt-BR" dirty="0" err="1"/>
+              <a:t>we</a:t>
+            </a:r>
+            <a:r>
+              <a:rPr lang="pt-BR" dirty="0"/>
+              <a:t> </a:t>
+            </a:r>
+            <a:r>
+              <a:rPr lang="pt-BR" dirty="0" err="1"/>
+              <a:t>train</a:t>
+            </a:r>
+            <a:r>
+              <a:rPr lang="pt-BR" dirty="0"/>
+              <a:t> </a:t>
+            </a:r>
+            <a:r>
+              <a:rPr lang="pt-BR" dirty="0" err="1"/>
+              <a:t>the</a:t>
+            </a:r>
+            <a:r>
+              <a:rPr lang="pt-BR" dirty="0"/>
+              <a:t> models </a:t>
+            </a:r>
+            <a:r>
+              <a:rPr lang="pt-BR" dirty="0" err="1"/>
+              <a:t>and</a:t>
+            </a:r>
+            <a:r>
+              <a:rPr lang="pt-BR" dirty="0"/>
+              <a:t> </a:t>
+            </a:r>
+            <a:r>
+              <a:rPr lang="pt-BR" dirty="0" err="1"/>
+              <a:t>let</a:t>
+            </a:r>
+            <a:r>
+              <a:rPr lang="pt-BR" dirty="0"/>
+              <a:t> out </a:t>
+            </a:r>
+            <a:r>
+              <a:rPr lang="pt-BR" dirty="0" err="1"/>
+              <a:t>of</a:t>
+            </a:r>
+            <a:r>
+              <a:rPr lang="pt-BR" dirty="0"/>
+              <a:t> </a:t>
+            </a:r>
+            <a:r>
+              <a:rPr lang="pt-BR" dirty="0" err="1"/>
+              <a:t>our</a:t>
+            </a:r>
+            <a:r>
+              <a:rPr lang="pt-BR" dirty="0"/>
+              <a:t> models </a:t>
+            </a:r>
+            <a:r>
+              <a:rPr lang="pt-BR" dirty="0" err="1"/>
+              <a:t>the</a:t>
+            </a:r>
+            <a:r>
+              <a:rPr lang="pt-BR" dirty="0"/>
+              <a:t> </a:t>
+            </a:r>
+            <a:r>
+              <a:rPr lang="pt-BR" dirty="0" err="1"/>
+              <a:t>lasts</a:t>
+            </a:r>
+            <a:r>
+              <a:rPr lang="pt-BR" dirty="0"/>
+              <a:t> </a:t>
+            </a:r>
+            <a:r>
+              <a:rPr lang="pt-BR" dirty="0" err="1"/>
+              <a:t>weeks</a:t>
+            </a:r>
+            <a:r>
+              <a:rPr lang="pt-BR" dirty="0"/>
+              <a:t> (</a:t>
+            </a:r>
+            <a:r>
+              <a:rPr lang="pt-BR" dirty="0" err="1"/>
+              <a:t>the</a:t>
+            </a:r>
+            <a:r>
+              <a:rPr lang="pt-BR" dirty="0"/>
+              <a:t> </a:t>
+            </a:r>
+            <a:r>
+              <a:rPr lang="pt-BR" dirty="0" err="1"/>
+              <a:t>ones</a:t>
+            </a:r>
+            <a:r>
+              <a:rPr lang="pt-BR" dirty="0"/>
+              <a:t> </a:t>
+            </a:r>
+            <a:r>
+              <a:rPr lang="pt-BR" dirty="0" err="1"/>
+              <a:t>we</a:t>
+            </a:r>
+            <a:r>
+              <a:rPr lang="pt-BR" dirty="0"/>
+              <a:t> </a:t>
+            </a:r>
+            <a:r>
+              <a:rPr lang="pt-BR" dirty="0" err="1"/>
+              <a:t>now</a:t>
+            </a:r>
+            <a:r>
+              <a:rPr lang="pt-BR" dirty="0"/>
+              <a:t> </a:t>
+            </a:r>
+            <a:r>
+              <a:rPr lang="pt-BR" dirty="0" err="1"/>
+              <a:t>the</a:t>
+            </a:r>
+            <a:r>
+              <a:rPr lang="pt-BR" dirty="0"/>
+              <a:t> real SI) this </a:t>
+            </a:r>
+            <a:r>
+              <a:rPr lang="pt-BR" dirty="0" err="1"/>
+              <a:t>way</a:t>
+            </a:r>
+            <a:r>
+              <a:rPr lang="pt-BR" dirty="0"/>
+              <a:t> </a:t>
+            </a:r>
+            <a:r>
+              <a:rPr lang="pt-BR" dirty="0" err="1"/>
+              <a:t>we</a:t>
+            </a:r>
+            <a:r>
+              <a:rPr lang="pt-BR" dirty="0"/>
+              <a:t> </a:t>
+            </a:r>
+            <a:r>
+              <a:rPr lang="pt-BR" dirty="0" err="1"/>
+              <a:t>can</a:t>
+            </a:r>
+            <a:r>
+              <a:rPr lang="pt-BR" dirty="0"/>
+              <a:t> </a:t>
+            </a:r>
+            <a:r>
+              <a:rPr lang="pt-BR" dirty="0" err="1"/>
+              <a:t>calculate</a:t>
+            </a:r>
+            <a:r>
+              <a:rPr lang="pt-BR" dirty="0"/>
+              <a:t> </a:t>
+            </a:r>
+            <a:r>
+              <a:rPr lang="pt-BR" dirty="0" err="1"/>
+              <a:t>the</a:t>
+            </a:r>
+            <a:r>
+              <a:rPr lang="pt-BR" dirty="0"/>
+              <a:t> </a:t>
+            </a:r>
+            <a:r>
+              <a:rPr lang="pt-BR" dirty="0" err="1"/>
+              <a:t>accuracy</a:t>
+            </a:r>
+            <a:r>
+              <a:rPr lang="pt-BR" dirty="0"/>
+              <a:t> </a:t>
+            </a:r>
+            <a:r>
+              <a:rPr lang="pt-BR" dirty="0" err="1"/>
+              <a:t>of</a:t>
+            </a:r>
+            <a:r>
+              <a:rPr lang="pt-BR" dirty="0"/>
+              <a:t> </a:t>
+            </a:r>
+            <a:r>
+              <a:rPr lang="pt-BR" dirty="0" err="1"/>
+              <a:t>our</a:t>
+            </a:r>
+            <a:r>
+              <a:rPr lang="pt-BR" dirty="0"/>
+              <a:t> models: </a:t>
+            </a:r>
+            <a:r>
+              <a:rPr lang="pt-BR" dirty="0" err="1"/>
+              <a:t>comparing</a:t>
+            </a:r>
+            <a:r>
+              <a:rPr lang="pt-BR" dirty="0"/>
+              <a:t> </a:t>
+            </a:r>
+            <a:r>
+              <a:rPr lang="pt-BR" dirty="0" err="1"/>
+              <a:t>the</a:t>
+            </a:r>
+            <a:r>
+              <a:rPr lang="pt-BR" dirty="0"/>
+              <a:t> </a:t>
+            </a:r>
+            <a:r>
+              <a:rPr lang="pt-BR" dirty="0" err="1"/>
+              <a:t>predicted</a:t>
+            </a:r>
+            <a:r>
+              <a:rPr lang="pt-BR" dirty="0"/>
+              <a:t> </a:t>
+            </a:r>
+            <a:r>
+              <a:rPr lang="pt-BR" dirty="0" err="1"/>
+              <a:t>to</a:t>
+            </a:r>
+            <a:r>
+              <a:rPr lang="pt-BR" dirty="0"/>
+              <a:t> </a:t>
+            </a:r>
+            <a:r>
+              <a:rPr lang="pt-BR" dirty="0" err="1"/>
+              <a:t>the</a:t>
+            </a:r>
+            <a:r>
+              <a:rPr lang="pt-BR" dirty="0"/>
+              <a:t> real SI </a:t>
+            </a:r>
+            <a:r>
+              <a:rPr lang="pt-BR" dirty="0" err="1"/>
+              <a:t>of</a:t>
+            </a:r>
+            <a:r>
+              <a:rPr lang="pt-BR" dirty="0"/>
+              <a:t> </a:t>
+            </a:r>
+            <a:r>
+              <a:rPr lang="pt-BR" dirty="0" err="1"/>
+              <a:t>the</a:t>
+            </a:r>
+            <a:r>
+              <a:rPr lang="pt-BR" dirty="0"/>
+              <a:t> </a:t>
+            </a:r>
+            <a:r>
+              <a:rPr lang="pt-BR" dirty="0" err="1"/>
+              <a:t>last</a:t>
+            </a:r>
+            <a:r>
+              <a:rPr lang="pt-BR" dirty="0"/>
+              <a:t> </a:t>
+            </a:r>
+            <a:r>
+              <a:rPr lang="pt-BR" dirty="0" err="1"/>
+              <a:t>weeks</a:t>
+            </a:r>
+            <a:endParaRPr lang="pt-BR" dirty="0"/>
+          </a:p>
+          <a:p>
+            <a:endParaRPr lang="pt-BR" dirty="0"/>
+          </a:p>
+          <a:p>
+            <a:r>
+              <a:rPr lang="pt-BR" dirty="0"/>
+              <a:t>For </a:t>
+            </a:r>
+            <a:r>
+              <a:rPr lang="pt-BR" dirty="0" err="1"/>
+              <a:t>the</a:t>
+            </a:r>
+            <a:r>
+              <a:rPr lang="pt-BR" dirty="0"/>
+              <a:t> final </a:t>
+            </a:r>
+            <a:r>
+              <a:rPr lang="pt-BR" dirty="0" err="1"/>
+              <a:t>forecast</a:t>
+            </a:r>
+            <a:r>
+              <a:rPr lang="pt-BR" dirty="0"/>
+              <a:t> </a:t>
+            </a:r>
+            <a:r>
+              <a:rPr lang="pt-BR" dirty="0" err="1"/>
+              <a:t>we</a:t>
+            </a:r>
+            <a:r>
+              <a:rPr lang="pt-BR" dirty="0"/>
+              <a:t> </a:t>
+            </a:r>
+            <a:r>
+              <a:rPr lang="pt-BR" dirty="0" err="1"/>
+              <a:t>re-train</a:t>
+            </a:r>
+            <a:r>
+              <a:rPr lang="pt-BR" dirty="0"/>
+              <a:t> </a:t>
+            </a:r>
+            <a:r>
+              <a:rPr lang="pt-BR" dirty="0" err="1"/>
+              <a:t>the</a:t>
+            </a:r>
+            <a:r>
+              <a:rPr lang="pt-BR" dirty="0"/>
+              <a:t> models </a:t>
+            </a:r>
+            <a:r>
+              <a:rPr lang="pt-BR" dirty="0" err="1"/>
+              <a:t>with</a:t>
+            </a:r>
+            <a:r>
+              <a:rPr lang="pt-BR" dirty="0"/>
+              <a:t> </a:t>
+            </a:r>
+            <a:r>
+              <a:rPr lang="pt-BR" dirty="0" err="1"/>
+              <a:t>the</a:t>
+            </a:r>
+            <a:r>
+              <a:rPr lang="pt-BR" dirty="0"/>
+              <a:t> complete data </a:t>
+            </a:r>
+            <a:r>
+              <a:rPr lang="pt-BR" dirty="0" err="1"/>
+              <a:t>until</a:t>
+            </a:r>
+            <a:r>
+              <a:rPr lang="pt-BR" dirty="0"/>
+              <a:t> </a:t>
+            </a:r>
+            <a:r>
+              <a:rPr lang="pt-BR" dirty="0" err="1"/>
+              <a:t>the</a:t>
+            </a:r>
+            <a:r>
+              <a:rPr lang="pt-BR" dirty="0"/>
+              <a:t> </a:t>
+            </a:r>
+            <a:r>
+              <a:rPr lang="pt-BR" dirty="0" err="1"/>
+              <a:t>most</a:t>
+            </a:r>
+            <a:r>
+              <a:rPr lang="pt-BR" dirty="0"/>
+              <a:t> </a:t>
+            </a:r>
+            <a:r>
+              <a:rPr lang="pt-BR" dirty="0" err="1"/>
+              <a:t>recent</a:t>
+            </a:r>
+            <a:r>
+              <a:rPr lang="pt-BR" dirty="0"/>
+              <a:t> point </a:t>
+            </a:r>
+            <a:r>
+              <a:rPr lang="pt-BR" dirty="0" err="1"/>
+              <a:t>of</a:t>
+            </a:r>
+            <a:r>
+              <a:rPr lang="pt-BR" dirty="0"/>
+              <a:t> data </a:t>
+            </a:r>
+            <a:r>
+              <a:rPr lang="pt-BR" dirty="0" err="1"/>
+              <a:t>we</a:t>
+            </a:r>
+            <a:r>
+              <a:rPr lang="pt-BR" dirty="0"/>
+              <a:t> </a:t>
+            </a:r>
+            <a:r>
+              <a:rPr lang="pt-BR" dirty="0" err="1"/>
+              <a:t>have</a:t>
+            </a:r>
+            <a:r>
+              <a:rPr lang="pt-BR" dirty="0"/>
+              <a:t>, </a:t>
+            </a:r>
+            <a:r>
+              <a:rPr lang="pt-BR" dirty="0" err="1"/>
+              <a:t>so</a:t>
+            </a:r>
+            <a:r>
+              <a:rPr lang="pt-BR" dirty="0"/>
+              <a:t> </a:t>
+            </a:r>
+            <a:r>
+              <a:rPr lang="pt-BR" dirty="0" err="1"/>
+              <a:t>we</a:t>
+            </a:r>
+            <a:r>
+              <a:rPr lang="pt-BR" dirty="0"/>
+              <a:t> are </a:t>
+            </a:r>
+            <a:r>
+              <a:rPr lang="pt-BR" dirty="0" err="1"/>
+              <a:t>sure</a:t>
+            </a:r>
+            <a:r>
+              <a:rPr lang="pt-BR" dirty="0"/>
+              <a:t> </a:t>
+            </a:r>
+            <a:r>
+              <a:rPr lang="pt-BR" dirty="0" err="1"/>
+              <a:t>that</a:t>
+            </a:r>
+            <a:r>
+              <a:rPr lang="pt-BR" dirty="0"/>
+              <a:t> </a:t>
+            </a:r>
+            <a:r>
+              <a:rPr lang="pt-BR" dirty="0" err="1"/>
+              <a:t>the</a:t>
+            </a:r>
+            <a:r>
+              <a:rPr lang="pt-BR" dirty="0"/>
+              <a:t> “sutilezas” </a:t>
+            </a:r>
+            <a:r>
+              <a:rPr lang="pt-BR" dirty="0" err="1"/>
+              <a:t>of</a:t>
+            </a:r>
+            <a:r>
+              <a:rPr lang="pt-BR" dirty="0"/>
+              <a:t> </a:t>
+            </a:r>
+            <a:r>
+              <a:rPr lang="pt-BR" dirty="0" err="1"/>
+              <a:t>the</a:t>
+            </a:r>
+            <a:r>
+              <a:rPr lang="pt-BR" dirty="0"/>
+              <a:t> </a:t>
+            </a:r>
+            <a:r>
+              <a:rPr lang="pt-BR" dirty="0" err="1"/>
+              <a:t>last</a:t>
+            </a:r>
+            <a:r>
+              <a:rPr lang="pt-BR" dirty="0"/>
+              <a:t> </a:t>
+            </a:r>
+            <a:r>
+              <a:rPr lang="pt-BR" dirty="0" err="1"/>
+              <a:t>weeks</a:t>
+            </a:r>
+            <a:r>
+              <a:rPr lang="pt-BR" dirty="0"/>
+              <a:t> are </a:t>
+            </a:r>
+            <a:r>
+              <a:rPr lang="pt-BR" dirty="0" err="1"/>
+              <a:t>being</a:t>
+            </a:r>
+            <a:r>
+              <a:rPr lang="pt-BR" dirty="0"/>
+              <a:t> </a:t>
+            </a:r>
+            <a:r>
+              <a:rPr lang="pt-BR" dirty="0" err="1"/>
+              <a:t>considered</a:t>
+            </a:r>
+            <a:r>
+              <a:rPr lang="pt-BR" dirty="0"/>
+              <a:t> for </a:t>
+            </a:r>
+            <a:r>
+              <a:rPr lang="pt-BR" dirty="0" err="1"/>
+              <a:t>the</a:t>
+            </a:r>
+            <a:r>
+              <a:rPr lang="pt-BR" dirty="0"/>
+              <a:t> SI </a:t>
+            </a:r>
+            <a:r>
+              <a:rPr lang="pt-BR" dirty="0" err="1"/>
+              <a:t>forecast</a:t>
+            </a:r>
+            <a:endParaRPr lang="pt-BR" dirty="0"/>
+          </a:p>
+          <a:p>
+            <a:endParaRPr lang="en-US" dirty="0"/>
+          </a:p>
+        </p:txBody>
+      </p:sp>
+    </p:spTree>
+    <p:extLst>
+      <p:ext uri="{BB962C8B-B14F-4D97-AF65-F5344CB8AC3E}">
+        <p14:creationId xmlns:p14="http://schemas.microsoft.com/office/powerpoint/2010/main" val="3722248004"/>
+      </p:ext>
+    </p:extLst>
+  </p:cSld>
+  <p:clrMapOvr>
+    <a:masterClrMapping/>
+  </p:clrMapOvr>
+</p:sld>
+</file>
+
+<file path=ppt/slides/slide14.xml><?xml version="1.0" encoding="utf-8"?>
+<p:sld xmlns:a="http://schemas.openxmlformats.org/drawingml/2006/main" xmlns:r="http://schemas.openxmlformats.org/officeDocument/2006/relationships" xmlns:p="http://schemas.openxmlformats.org/presentationml/2006/main">
+  <p:cSld>
+    <p:spTree>
+      <p:nvGrpSpPr>
+        <p:cNvPr id="1" name="">
+          <a:extLst>
+            <a:ext uri="{FF2B5EF4-FFF2-40B4-BE49-F238E27FC236}">
+              <a16:creationId xmlns:a16="http://schemas.microsoft.com/office/drawing/2014/main" id="{530CB880-7CB8-86AF-2D8F-D1AACF457568}"/>
+            </a:ext>
+          </a:extLst>
+        </p:cNvPr>
+        <p:cNvGrpSpPr/>
+        <p:nvPr/>
+      </p:nvGrpSpPr>
+      <p:grpSpPr>
+        <a:xfrm>
+          <a:off x="0" y="0"/>
+          <a:ext cx="0" cy="0"/>
+          <a:chOff x="0" y="0"/>
+          <a:chExt cx="0" cy="0"/>
+        </a:xfrm>
+      </p:grpSpPr>
+      <p:sp>
+        <p:nvSpPr>
+          <p:cNvPr id="2" name="Título 1">
+            <a:extLst>
+              <a:ext uri="{FF2B5EF4-FFF2-40B4-BE49-F238E27FC236}">
+                <a16:creationId xmlns:a16="http://schemas.microsoft.com/office/drawing/2014/main" id="{8CA64094-F11C-DB64-47D7-9BF6D269CD98}"/>
+              </a:ext>
+            </a:extLst>
+          </p:cNvPr>
+          <p:cNvSpPr>
+            <a:spLocks noGrp="1"/>
+          </p:cNvSpPr>
+          <p:nvPr>
+            <p:ph type="title"/>
+          </p:nvPr>
+        </p:nvSpPr>
+        <p:spPr/>
+        <p:txBody>
+          <a:bodyPr>
+            <a:normAutofit fontScale="90000"/>
+          </a:bodyPr>
+          <a:lstStyle/>
+          <a:p>
+            <a:r>
+              <a:rPr lang="pt-BR" dirty="0" err="1"/>
+              <a:t>Question</a:t>
+            </a:r>
+            <a:r>
+              <a:rPr lang="pt-BR" dirty="0"/>
+              <a:t> 4 - </a:t>
+            </a:r>
+            <a:r>
+              <a:rPr lang="en-US" dirty="0"/>
+              <a:t>What would be the next steps to continue with your plan, quick wins, and risks to consider? </a:t>
+            </a:r>
+          </a:p>
+        </p:txBody>
+      </p:sp>
+      <p:sp>
+        <p:nvSpPr>
+          <p:cNvPr id="3" name="Espaço Reservado para Conteúdo 2">
+            <a:extLst>
+              <a:ext uri="{FF2B5EF4-FFF2-40B4-BE49-F238E27FC236}">
+                <a16:creationId xmlns:a16="http://schemas.microsoft.com/office/drawing/2014/main" id="{7289C2DA-28DE-E3D6-9630-044DA0AA18A2}"/>
+              </a:ext>
+            </a:extLst>
+          </p:cNvPr>
+          <p:cNvSpPr>
+            <a:spLocks noGrp="1"/>
+          </p:cNvSpPr>
+          <p:nvPr>
+            <p:ph idx="1"/>
+          </p:nvPr>
+        </p:nvSpPr>
+        <p:spPr/>
+        <p:txBody>
+          <a:bodyPr/>
+          <a:lstStyle/>
+          <a:p>
+            <a:r>
+              <a:rPr lang="en-US" b="1" dirty="0"/>
+              <a:t>Roadmap / </a:t>
+            </a:r>
+            <a:r>
+              <a:rPr lang="en-US" b="1" dirty="0" err="1"/>
+              <a:t>próximos</a:t>
+            </a:r>
+            <a:r>
+              <a:rPr lang="en-US" b="1" dirty="0"/>
+              <a:t> </a:t>
+            </a:r>
+            <a:r>
+              <a:rPr lang="en-US" b="1" dirty="0" err="1"/>
+              <a:t>passos</a:t>
+            </a:r>
+            <a:br>
+              <a:rPr lang="en-US" dirty="0"/>
+            </a:br>
+            <a:r>
+              <a:rPr lang="en-US" dirty="0" err="1"/>
+              <a:t>Linha</a:t>
+            </a:r>
+            <a:r>
+              <a:rPr lang="en-US" dirty="0"/>
+              <a:t> do tempo: o </a:t>
+            </a:r>
+            <a:r>
+              <a:rPr lang="en-US" dirty="0" err="1"/>
+              <a:t>que</a:t>
+            </a:r>
+            <a:r>
+              <a:rPr lang="en-US" dirty="0"/>
+              <a:t> </a:t>
+            </a:r>
+            <a:r>
+              <a:rPr lang="en-US" dirty="0" err="1"/>
+              <a:t>entra</a:t>
+            </a:r>
+            <a:r>
+              <a:rPr lang="en-US" dirty="0"/>
+              <a:t> </a:t>
+            </a:r>
+            <a:r>
+              <a:rPr lang="en-US" dirty="0" err="1"/>
+              <a:t>em</a:t>
+            </a:r>
+            <a:r>
+              <a:rPr lang="en-US" dirty="0"/>
+              <a:t> </a:t>
+            </a:r>
+            <a:r>
+              <a:rPr lang="en-US" dirty="0" err="1"/>
+              <a:t>produção</a:t>
+            </a:r>
+            <a:r>
+              <a:rPr lang="en-US" dirty="0"/>
+              <a:t> </a:t>
+            </a:r>
+            <a:r>
+              <a:rPr lang="en-US" dirty="0" err="1"/>
+              <a:t>primeiro</a:t>
+            </a:r>
+            <a:r>
+              <a:rPr lang="en-US" dirty="0"/>
+              <a:t>, o </a:t>
+            </a:r>
+            <a:r>
+              <a:rPr lang="en-US" dirty="0" err="1"/>
+              <a:t>que</a:t>
+            </a:r>
+            <a:r>
+              <a:rPr lang="en-US" dirty="0"/>
+              <a:t> </a:t>
+            </a:r>
+            <a:r>
+              <a:rPr lang="en-US" dirty="0" err="1"/>
+              <a:t>precisa</a:t>
+            </a:r>
+            <a:r>
+              <a:rPr lang="en-US" dirty="0"/>
+              <a:t> de </a:t>
+            </a:r>
+            <a:r>
+              <a:rPr lang="en-US" dirty="0" err="1"/>
+              <a:t>mais</a:t>
+            </a:r>
+            <a:r>
+              <a:rPr lang="en-US" dirty="0"/>
+              <a:t> </a:t>
+            </a:r>
+            <a:r>
+              <a:rPr lang="en-US" dirty="0" err="1"/>
+              <a:t>validação</a:t>
+            </a:r>
+            <a:r>
+              <a:rPr lang="en-US" dirty="0"/>
+              <a:t>.</a:t>
+            </a:r>
+          </a:p>
+        </p:txBody>
+      </p:sp>
+    </p:spTree>
+    <p:extLst>
+      <p:ext uri="{BB962C8B-B14F-4D97-AF65-F5344CB8AC3E}">
+        <p14:creationId xmlns:p14="http://schemas.microsoft.com/office/powerpoint/2010/main" val="3593081155"/>
+      </p:ext>
+    </p:extLst>
+  </p:cSld>
+  <p:clrMapOvr>
+    <a:masterClrMapping/>
+  </p:clrMapOvr>
+</p:sld>
+</file>
+
+<file path=ppt/slides/slide15.xml><?xml version="1.0" encoding="utf-8"?>
+<p:sld xmlns:a="http://schemas.openxmlformats.org/drawingml/2006/main" xmlns:r="http://schemas.openxmlformats.org/officeDocument/2006/relationships" xmlns:p="http://schemas.openxmlformats.org/presentationml/2006/main">
+  <p:cSld>
+    <p:spTree>
+      <p:nvGrpSpPr>
+        <p:cNvPr id="1" name="">
+          <a:extLst>
+            <a:ext uri="{FF2B5EF4-FFF2-40B4-BE49-F238E27FC236}">
+              <a16:creationId xmlns:a16="http://schemas.microsoft.com/office/drawing/2014/main" id="{9D8CD5AA-2156-EFA6-7720-06D9EB1B7D09}"/>
+            </a:ext>
+          </a:extLst>
+        </p:cNvPr>
+        <p:cNvGrpSpPr/>
+        <p:nvPr/>
+      </p:nvGrpSpPr>
+      <p:grpSpPr>
+        <a:xfrm>
+          <a:off x="0" y="0"/>
+          <a:ext cx="0" cy="0"/>
+          <a:chOff x="0" y="0"/>
+          <a:chExt cx="0" cy="0"/>
+        </a:xfrm>
+      </p:grpSpPr>
+      <p:sp>
+        <p:nvSpPr>
+          <p:cNvPr id="2" name="Título 1">
+            <a:extLst>
+              <a:ext uri="{FF2B5EF4-FFF2-40B4-BE49-F238E27FC236}">
+                <a16:creationId xmlns:a16="http://schemas.microsoft.com/office/drawing/2014/main" id="{46904976-98F5-C8CB-5DBE-EB742E25D2A1}"/>
+              </a:ext>
+            </a:extLst>
+          </p:cNvPr>
+          <p:cNvSpPr>
+            <a:spLocks noGrp="1"/>
+          </p:cNvSpPr>
+          <p:nvPr>
+            <p:ph type="title"/>
+          </p:nvPr>
+        </p:nvSpPr>
+        <p:spPr/>
+        <p:txBody>
+          <a:bodyPr>
+            <a:normAutofit fontScale="90000"/>
+          </a:bodyPr>
+          <a:lstStyle/>
+          <a:p>
+            <a:r>
+              <a:rPr lang="pt-BR" dirty="0" err="1"/>
+              <a:t>Question</a:t>
+            </a:r>
+            <a:r>
+              <a:rPr lang="pt-BR" dirty="0"/>
+              <a:t> 4 - </a:t>
+            </a:r>
+            <a:r>
+              <a:rPr lang="en-US" dirty="0"/>
+              <a:t>What would be the next steps to continue with your plan, quick wins, and risks to consider? </a:t>
+            </a:r>
+          </a:p>
+        </p:txBody>
+      </p:sp>
+      <p:sp>
+        <p:nvSpPr>
+          <p:cNvPr id="3" name="Espaço Reservado para Conteúdo 2">
+            <a:extLst>
+              <a:ext uri="{FF2B5EF4-FFF2-40B4-BE49-F238E27FC236}">
+                <a16:creationId xmlns:a16="http://schemas.microsoft.com/office/drawing/2014/main" id="{5A5301BB-E75B-16D6-4F78-1157C16ED18D}"/>
+              </a:ext>
+            </a:extLst>
+          </p:cNvPr>
+          <p:cNvSpPr>
+            <a:spLocks noGrp="1"/>
+          </p:cNvSpPr>
+          <p:nvPr>
+            <p:ph idx="1"/>
+          </p:nvPr>
+        </p:nvSpPr>
+        <p:spPr/>
+        <p:txBody>
+          <a:bodyPr/>
+          <a:lstStyle/>
+          <a:p>
+            <a:r>
+              <a:rPr lang="en-US" b="1" dirty="0"/>
+              <a:t>Quick wins</a:t>
+            </a:r>
+            <a:br>
+              <a:rPr lang="en-US" dirty="0"/>
+            </a:br>
+            <a:r>
+              <a:rPr lang="en-US" dirty="0"/>
+              <a:t>O </a:t>
+            </a:r>
+            <a:r>
+              <a:rPr lang="en-US" dirty="0" err="1"/>
+              <a:t>que</a:t>
+            </a:r>
+            <a:r>
+              <a:rPr lang="en-US" dirty="0"/>
+              <a:t> </a:t>
+            </a:r>
+            <a:r>
+              <a:rPr lang="en-US" dirty="0" err="1"/>
+              <a:t>pode</a:t>
+            </a:r>
+            <a:r>
+              <a:rPr lang="en-US" dirty="0"/>
+              <a:t> ser </a:t>
+            </a:r>
+            <a:r>
+              <a:rPr lang="en-US" dirty="0" err="1"/>
+              <a:t>implementado</a:t>
+            </a:r>
+            <a:r>
+              <a:rPr lang="en-US" dirty="0"/>
+              <a:t> </a:t>
+            </a:r>
+            <a:r>
+              <a:rPr lang="en-US" dirty="0" err="1"/>
+              <a:t>rápido</a:t>
+            </a:r>
+            <a:r>
+              <a:rPr lang="en-US" dirty="0"/>
+              <a:t> e </a:t>
+            </a:r>
+            <a:r>
+              <a:rPr lang="en-US" dirty="0" err="1"/>
+              <a:t>já</a:t>
+            </a:r>
+            <a:r>
+              <a:rPr lang="en-US" dirty="0"/>
+              <a:t> </a:t>
+            </a:r>
+            <a:r>
+              <a:rPr lang="en-US" dirty="0" err="1"/>
+              <a:t>gera</a:t>
+            </a:r>
+            <a:r>
+              <a:rPr lang="en-US" dirty="0"/>
+              <a:t> valor (ex: </a:t>
+            </a:r>
+            <a:r>
+              <a:rPr lang="en-US" dirty="0" err="1"/>
+              <a:t>métrica</a:t>
+            </a:r>
+            <a:r>
+              <a:rPr lang="en-US" dirty="0"/>
+              <a:t> WAPE, </a:t>
+            </a:r>
+            <a:r>
+              <a:rPr lang="en-US" dirty="0" err="1"/>
+              <a:t>restrição</a:t>
+            </a:r>
+            <a:r>
+              <a:rPr lang="en-US" dirty="0"/>
+              <a:t> </a:t>
+            </a:r>
+            <a:r>
+              <a:rPr lang="en-US" dirty="0" err="1"/>
+              <a:t>monotônica</a:t>
+            </a:r>
+            <a:r>
+              <a:rPr lang="en-US" dirty="0"/>
+              <a:t>) vs o </a:t>
+            </a:r>
+            <a:r>
+              <a:rPr lang="en-US" dirty="0" err="1"/>
+              <a:t>que</a:t>
+            </a:r>
+            <a:r>
+              <a:rPr lang="en-US" dirty="0"/>
+              <a:t> é </a:t>
+            </a:r>
+            <a:r>
+              <a:rPr lang="en-US" dirty="0" err="1"/>
+              <a:t>mais</a:t>
+            </a:r>
+            <a:r>
+              <a:rPr lang="en-US" dirty="0"/>
+              <a:t> </a:t>
+            </a:r>
+            <a:r>
+              <a:rPr lang="en-US" dirty="0" err="1"/>
+              <a:t>estrutural</a:t>
+            </a:r>
+            <a:r>
+              <a:rPr lang="en-US" dirty="0"/>
+              <a:t> (bake-off </a:t>
+            </a:r>
+            <a:r>
+              <a:rPr lang="en-US" dirty="0" err="1"/>
+              <a:t>completo</a:t>
+            </a:r>
+            <a:r>
+              <a:rPr lang="en-US" dirty="0"/>
+              <a:t>).</a:t>
+            </a:r>
+          </a:p>
+        </p:txBody>
+      </p:sp>
+    </p:spTree>
+    <p:extLst>
+      <p:ext uri="{BB962C8B-B14F-4D97-AF65-F5344CB8AC3E}">
+        <p14:creationId xmlns:p14="http://schemas.microsoft.com/office/powerpoint/2010/main" val="819731630"/>
+      </p:ext>
+    </p:extLst>
+  </p:cSld>
+  <p:clrMapOvr>
+    <a:masterClrMapping/>
+  </p:clrMapOvr>
+</p:sld>
+</file>
+
+<file path=ppt/slides/slide16.xml><?xml version="1.0" encoding="utf-8"?>
+<p:sld xmlns:a="http://schemas.openxmlformats.org/drawingml/2006/main" xmlns:r="http://schemas.openxmlformats.org/officeDocument/2006/relationships" xmlns:p="http://schemas.openxmlformats.org/presentationml/2006/main">
+  <p:cSld>
+    <p:spTree>
+      <p:nvGrpSpPr>
+        <p:cNvPr id="1" name="">
+          <a:extLst>
+            <a:ext uri="{FF2B5EF4-FFF2-40B4-BE49-F238E27FC236}">
+              <a16:creationId xmlns:a16="http://schemas.microsoft.com/office/drawing/2014/main" id="{6EABE635-2AC3-4BE6-88D6-9B810B3DF708}"/>
+            </a:ext>
+          </a:extLst>
+        </p:cNvPr>
+        <p:cNvGrpSpPr/>
+        <p:nvPr/>
+      </p:nvGrpSpPr>
+      <p:grpSpPr>
+        <a:xfrm>
+          <a:off x="0" y="0"/>
+          <a:ext cx="0" cy="0"/>
+          <a:chOff x="0" y="0"/>
+          <a:chExt cx="0" cy="0"/>
+        </a:xfrm>
+      </p:grpSpPr>
+      <p:sp>
+        <p:nvSpPr>
+          <p:cNvPr id="2" name="Título 1">
+            <a:extLst>
+              <a:ext uri="{FF2B5EF4-FFF2-40B4-BE49-F238E27FC236}">
+                <a16:creationId xmlns:a16="http://schemas.microsoft.com/office/drawing/2014/main" id="{43D18C62-28BE-4EA1-9068-D57CD67D81E1}"/>
+              </a:ext>
+            </a:extLst>
+          </p:cNvPr>
+          <p:cNvSpPr>
+            <a:spLocks noGrp="1"/>
+          </p:cNvSpPr>
+          <p:nvPr>
+            <p:ph type="title"/>
+          </p:nvPr>
+        </p:nvSpPr>
+        <p:spPr/>
+        <p:txBody>
+          <a:bodyPr>
+            <a:normAutofit fontScale="90000"/>
+          </a:bodyPr>
+          <a:lstStyle/>
+          <a:p>
+            <a:r>
+              <a:rPr lang="pt-BR" dirty="0" err="1"/>
+              <a:t>Question</a:t>
+            </a:r>
+            <a:r>
+              <a:rPr lang="pt-BR" dirty="0"/>
+              <a:t> 4 - </a:t>
+            </a:r>
+            <a:r>
+              <a:rPr lang="en-US" dirty="0"/>
+              <a:t>What would be the next steps to continue with your plan, quick wins, and risks to consider? </a:t>
+            </a:r>
+          </a:p>
+        </p:txBody>
+      </p:sp>
+      <p:sp>
+        <p:nvSpPr>
+          <p:cNvPr id="3" name="Espaço Reservado para Conteúdo 2">
+            <a:extLst>
+              <a:ext uri="{FF2B5EF4-FFF2-40B4-BE49-F238E27FC236}">
+                <a16:creationId xmlns:a16="http://schemas.microsoft.com/office/drawing/2014/main" id="{BDF87AC6-FF93-253E-7609-9CEA1310EE34}"/>
+              </a:ext>
+            </a:extLst>
+          </p:cNvPr>
+          <p:cNvSpPr>
+            <a:spLocks noGrp="1"/>
+          </p:cNvSpPr>
+          <p:nvPr>
+            <p:ph idx="1"/>
+          </p:nvPr>
+        </p:nvSpPr>
+        <p:spPr/>
+        <p:txBody>
+          <a:bodyPr/>
+          <a:lstStyle/>
+          <a:p>
+            <a:r>
+              <a:rPr lang="en-US" b="1" dirty="0" err="1"/>
+              <a:t>Riscos</a:t>
+            </a:r>
+            <a:r>
+              <a:rPr lang="en-US" b="1" dirty="0"/>
+              <a:t> e </a:t>
+            </a:r>
+            <a:r>
+              <a:rPr lang="en-US" b="1" dirty="0" err="1"/>
+              <a:t>mitigação</a:t>
+            </a:r>
+            <a:br>
+              <a:rPr lang="en-US" dirty="0"/>
+            </a:br>
+            <a:r>
+              <a:rPr lang="en-US" dirty="0"/>
+              <a:t>Ex: </a:t>
+            </a:r>
+            <a:r>
+              <a:rPr lang="en-US" dirty="0" err="1"/>
+              <a:t>risco</a:t>
+            </a:r>
+            <a:r>
+              <a:rPr lang="en-US" dirty="0"/>
+              <a:t> de overfitting </a:t>
+            </a:r>
+            <a:r>
+              <a:rPr lang="en-US" dirty="0" err="1"/>
+              <a:t>por</a:t>
+            </a:r>
+            <a:r>
+              <a:rPr lang="en-US" dirty="0"/>
+              <a:t> SKU-canal (</a:t>
+            </a:r>
+            <a:r>
+              <a:rPr lang="en-US" dirty="0" err="1"/>
+              <a:t>menos</a:t>
+            </a:r>
+            <a:r>
+              <a:rPr lang="en-US" dirty="0"/>
+              <a:t> dados </a:t>
+            </a:r>
+            <a:r>
+              <a:rPr lang="en-US" dirty="0" err="1"/>
+              <a:t>por</a:t>
+            </a:r>
+            <a:r>
+              <a:rPr lang="en-US" dirty="0"/>
+              <a:t> </a:t>
+            </a:r>
+            <a:r>
+              <a:rPr lang="en-US" dirty="0" err="1"/>
+              <a:t>modelo</a:t>
+            </a:r>
+            <a:r>
+              <a:rPr lang="en-US" dirty="0"/>
+              <a:t>), </a:t>
+            </a:r>
+            <a:r>
+              <a:rPr lang="en-US" dirty="0" err="1"/>
+              <a:t>necessidade</a:t>
+            </a:r>
+            <a:r>
+              <a:rPr lang="en-US" dirty="0"/>
+              <a:t> de </a:t>
+            </a:r>
+            <a:r>
+              <a:rPr lang="en-US" dirty="0" err="1"/>
+              <a:t>retreino</a:t>
+            </a:r>
+            <a:r>
+              <a:rPr lang="en-US" dirty="0"/>
+              <a:t> </a:t>
+            </a:r>
+            <a:r>
+              <a:rPr lang="en-US" dirty="0" err="1"/>
+              <a:t>periódico</a:t>
+            </a:r>
+            <a:r>
+              <a:rPr lang="en-US" dirty="0"/>
+              <a:t>, </a:t>
+            </a:r>
+            <a:r>
+              <a:rPr lang="en-US" dirty="0" err="1"/>
+              <a:t>dependência</a:t>
+            </a:r>
+            <a:r>
+              <a:rPr lang="en-US" dirty="0"/>
+              <a:t> de </a:t>
+            </a:r>
+            <a:r>
+              <a:rPr lang="en-US" dirty="0" err="1"/>
+              <a:t>qualidade</a:t>
+            </a:r>
+            <a:r>
+              <a:rPr lang="en-US" dirty="0"/>
+              <a:t> dos dados de </a:t>
+            </a:r>
+            <a:r>
+              <a:rPr lang="en-US" dirty="0" err="1"/>
+              <a:t>variáveis</a:t>
+            </a:r>
+            <a:r>
+              <a:rPr lang="en-US" dirty="0"/>
+              <a:t> </a:t>
+            </a:r>
+            <a:r>
+              <a:rPr lang="en-US" dirty="0" err="1"/>
+              <a:t>externas</a:t>
+            </a:r>
+            <a:r>
+              <a:rPr lang="en-US" dirty="0"/>
+              <a:t> </a:t>
+            </a:r>
+            <a:r>
+              <a:rPr lang="en-US" dirty="0" err="1"/>
+              <a:t>futuras</a:t>
+            </a:r>
+            <a:r>
+              <a:rPr lang="en-US" dirty="0"/>
+              <a:t>.</a:t>
+            </a:r>
+          </a:p>
+        </p:txBody>
+      </p:sp>
+    </p:spTree>
+    <p:extLst>
+      <p:ext uri="{BB962C8B-B14F-4D97-AF65-F5344CB8AC3E}">
+        <p14:creationId xmlns:p14="http://schemas.microsoft.com/office/powerpoint/2010/main" val="1203571029"/>
+      </p:ext>
+    </p:extLst>
+  </p:cSld>
+  <p:clrMapOvr>
+    <a:masterClrMapping/>
+  </p:clrMapOvr>
+</p:sld>
+</file>
+
+<file path=ppt/slides/slide17.xml><?xml version="1.0" encoding="utf-8"?>
 <p:sld xmlns:a="http://schemas.openxmlformats.org/drawingml/2006/main" xmlns:r="http://schemas.openxmlformats.org/officeDocument/2006/relationships" xmlns:p="http://schemas.openxmlformats.org/presentationml/2006/main">
   <p:cSld>
     <p:spTree>
@@ -3980,7 +6344,7 @@
 </p:sld>
 </file>
 
-<file path=ppt/slides/slide3.xml><?xml version="1.0" encoding="utf-8"?>
+<file path=ppt/slides/slide18.xml><?xml version="1.0" encoding="utf-8"?>
 <p:sld xmlns:a="http://schemas.openxmlformats.org/drawingml/2006/main" xmlns:r="http://schemas.openxmlformats.org/officeDocument/2006/relationships" xmlns:p="http://schemas.openxmlformats.org/presentationml/2006/main">
   <p:cSld>
     <p:spTree>
@@ -4065,7 +6429,7 @@
         </p:blipFill>
         <p:spPr>
           <a:xfrm>
-            <a:off x="937923" y="2026381"/>
+            <a:off x="424511" y="1894406"/>
             <a:ext cx="11342977" cy="4701582"/>
           </a:xfrm>
           <a:prstGeom prst="rect">
@@ -4086,7 +6450,7 @@
 </p:sld>
 </file>
 
-<file path=ppt/slides/slide4.xml><?xml version="1.0" encoding="utf-8"?>
+<file path=ppt/slides/slide19.xml><?xml version="1.0" encoding="utf-8"?>
 <p:sld xmlns:a="http://schemas.openxmlformats.org/drawingml/2006/main" xmlns:r="http://schemas.openxmlformats.org/officeDocument/2006/relationships" xmlns:p="http://schemas.openxmlformats.org/presentationml/2006/main">
   <p:cSld>
     <p:spTree>
@@ -4192,7 +6556,280 @@
 </p:sld>
 </file>
 
-<file path=ppt/slides/slide5.xml><?xml version="1.0" encoding="utf-8"?>
+<file path=ppt/slides/slide2.xml><?xml version="1.0" encoding="utf-8"?>
+<p:sld xmlns:a="http://schemas.openxmlformats.org/drawingml/2006/main" xmlns:r="http://schemas.openxmlformats.org/officeDocument/2006/relationships" xmlns:p="http://schemas.openxmlformats.org/presentationml/2006/main">
+  <p:cSld>
+    <p:spTree>
+      <p:nvGrpSpPr>
+        <p:cNvPr id="1" name=""/>
+        <p:cNvGrpSpPr/>
+        <p:nvPr/>
+      </p:nvGrpSpPr>
+      <p:grpSpPr>
+        <a:xfrm>
+          <a:off x="0" y="0"/>
+          <a:ext cx="0" cy="0"/>
+          <a:chOff x="0" y="0"/>
+          <a:chExt cx="0" cy="0"/>
+        </a:xfrm>
+      </p:grpSpPr>
+      <p:sp>
+        <p:nvSpPr>
+          <p:cNvPr id="2" name="Título 1">
+            <a:extLst>
+              <a:ext uri="{FF2B5EF4-FFF2-40B4-BE49-F238E27FC236}">
+                <a16:creationId xmlns:a16="http://schemas.microsoft.com/office/drawing/2014/main" id="{64178132-CF0F-5C36-2463-095131F13CC3}"/>
+              </a:ext>
+            </a:extLst>
+          </p:cNvPr>
+          <p:cNvSpPr>
+            <a:spLocks noGrp="1"/>
+          </p:cNvSpPr>
+          <p:nvPr>
+            <p:ph type="title"/>
+          </p:nvPr>
+        </p:nvSpPr>
+        <p:spPr/>
+        <p:txBody>
+          <a:bodyPr/>
+          <a:lstStyle/>
+          <a:p>
+            <a:r>
+              <a:rPr lang="pt-BR" dirty="0"/>
+              <a:t>Priscila Rockenbach Portela</a:t>
+            </a:r>
+            <a:br>
+              <a:rPr lang="pt-BR" dirty="0"/>
+            </a:br>
+            <a:r>
+              <a:rPr lang="pt-BR" sz="3600" dirty="0"/>
+              <a:t>Data </a:t>
+            </a:r>
+            <a:r>
+              <a:rPr lang="pt-BR" sz="3600" dirty="0" err="1"/>
+              <a:t>Scientist</a:t>
+            </a:r>
+            <a:endParaRPr lang="en-US" dirty="0"/>
+          </a:p>
+        </p:txBody>
+      </p:sp>
+      <p:sp>
+        <p:nvSpPr>
+          <p:cNvPr id="3" name="Espaço Reservado para Conteúdo 2">
+            <a:extLst>
+              <a:ext uri="{FF2B5EF4-FFF2-40B4-BE49-F238E27FC236}">
+                <a16:creationId xmlns:a16="http://schemas.microsoft.com/office/drawing/2014/main" id="{C79DC7FF-9130-637D-F6E2-D80876AE83A5}"/>
+              </a:ext>
+            </a:extLst>
+          </p:cNvPr>
+          <p:cNvSpPr>
+            <a:spLocks noGrp="1"/>
+          </p:cNvSpPr>
+          <p:nvPr>
+            <p:ph idx="1"/>
+          </p:nvPr>
+        </p:nvSpPr>
+        <p:spPr/>
+        <p:txBody>
+          <a:bodyPr/>
+          <a:lstStyle/>
+          <a:p>
+            <a:r>
+              <a:rPr lang="en-US" dirty="0" err="1"/>
+              <a:t>Trajetória</a:t>
+            </a:r>
+            <a:r>
+              <a:rPr lang="en-US" dirty="0"/>
+              <a:t>, </a:t>
+            </a:r>
+            <a:r>
+              <a:rPr lang="en-US" dirty="0" err="1"/>
+              <a:t>experiência</a:t>
+            </a:r>
+            <a:r>
+              <a:rPr lang="en-US" dirty="0"/>
+              <a:t> com forecasting/ML, o </a:t>
+            </a:r>
+            <a:r>
+              <a:rPr lang="en-US" dirty="0" err="1"/>
+              <a:t>que</a:t>
+            </a:r>
+            <a:r>
+              <a:rPr lang="en-US" dirty="0"/>
+              <a:t> </a:t>
+            </a:r>
+            <a:r>
+              <a:rPr lang="en-US" dirty="0" err="1"/>
+              <a:t>te</a:t>
+            </a:r>
+            <a:r>
+              <a:rPr lang="en-US" dirty="0"/>
+              <a:t> </a:t>
+            </a:r>
+            <a:r>
+              <a:rPr lang="en-US" dirty="0" err="1"/>
+              <a:t>motiva</a:t>
+            </a:r>
+            <a:r>
+              <a:rPr lang="en-US" dirty="0"/>
+              <a:t> no </a:t>
+            </a:r>
+            <a:r>
+              <a:rPr lang="en-US" dirty="0" err="1"/>
+              <a:t>problema</a:t>
+            </a:r>
+            <a:r>
+              <a:rPr lang="en-US" dirty="0"/>
+              <a:t>.</a:t>
+            </a:r>
+          </a:p>
+          <a:p>
+            <a:endParaRPr lang="en-US" dirty="0"/>
+          </a:p>
+          <a:p>
+            <a:r>
+              <a:rPr lang="en-US" dirty="0"/>
+              <a:t>Passionate about data and discovery new </a:t>
+            </a:r>
+            <a:r>
+              <a:rPr lang="en-US" dirty="0" err="1"/>
+              <a:t>tecnologies</a:t>
+            </a:r>
+            <a:endParaRPr lang="en-US" dirty="0"/>
+          </a:p>
+        </p:txBody>
+      </p:sp>
+    </p:spTree>
+    <p:extLst>
+      <p:ext uri="{BB962C8B-B14F-4D97-AF65-F5344CB8AC3E}">
+        <p14:creationId xmlns:p14="http://schemas.microsoft.com/office/powerpoint/2010/main" val="2516774628"/>
+      </p:ext>
+    </p:extLst>
+  </p:cSld>
+  <p:clrMapOvr>
+    <a:masterClrMapping/>
+  </p:clrMapOvr>
+</p:sld>
+</file>
+
+<file path=ppt/slides/slide20.xml><?xml version="1.0" encoding="utf-8"?>
+<p:sld xmlns:a="http://schemas.openxmlformats.org/drawingml/2006/main" xmlns:r="http://schemas.openxmlformats.org/officeDocument/2006/relationships" xmlns:p="http://schemas.openxmlformats.org/presentationml/2006/main">
+  <p:cSld>
+    <p:spTree>
+      <p:nvGrpSpPr>
+        <p:cNvPr id="1" name="">
+          <a:extLst>
+            <a:ext uri="{FF2B5EF4-FFF2-40B4-BE49-F238E27FC236}">
+              <a16:creationId xmlns:a16="http://schemas.microsoft.com/office/drawing/2014/main" id="{C8B94BB5-F3ED-6C1E-0089-84A4ABC528AC}"/>
+            </a:ext>
+          </a:extLst>
+        </p:cNvPr>
+        <p:cNvGrpSpPr/>
+        <p:nvPr/>
+      </p:nvGrpSpPr>
+      <p:grpSpPr>
+        <a:xfrm>
+          <a:off x="0" y="0"/>
+          <a:ext cx="0" cy="0"/>
+          <a:chOff x="0" y="0"/>
+          <a:chExt cx="0" cy="0"/>
+        </a:xfrm>
+      </p:grpSpPr>
+      <p:sp>
+        <p:nvSpPr>
+          <p:cNvPr id="2" name="Título 1">
+            <a:extLst>
+              <a:ext uri="{FF2B5EF4-FFF2-40B4-BE49-F238E27FC236}">
+                <a16:creationId xmlns:a16="http://schemas.microsoft.com/office/drawing/2014/main" id="{A1142185-714B-30B4-DDD6-E0B217A207C3}"/>
+              </a:ext>
+            </a:extLst>
+          </p:cNvPr>
+          <p:cNvSpPr>
+            <a:spLocks noGrp="1"/>
+          </p:cNvSpPr>
+          <p:nvPr>
+            <p:ph type="title"/>
+          </p:nvPr>
+        </p:nvSpPr>
+        <p:spPr/>
+        <p:txBody>
+          <a:bodyPr/>
+          <a:lstStyle/>
+          <a:p>
+            <a:r>
+              <a:rPr lang="pt-BR" dirty="0" err="1"/>
+              <a:t>Changing</a:t>
+            </a:r>
+            <a:r>
+              <a:rPr lang="pt-BR" dirty="0"/>
+              <a:t> </a:t>
+            </a:r>
+            <a:r>
+              <a:rPr lang="pt-BR" dirty="0" err="1"/>
+              <a:t>the</a:t>
+            </a:r>
+            <a:r>
+              <a:rPr lang="pt-BR" dirty="0"/>
+              <a:t> </a:t>
+            </a:r>
+            <a:r>
+              <a:rPr lang="pt-BR" dirty="0" err="1"/>
+              <a:t>Accuracy</a:t>
+            </a:r>
+            <a:r>
+              <a:rPr lang="pt-BR" dirty="0"/>
+              <a:t> </a:t>
+            </a:r>
+            <a:r>
+              <a:rPr lang="pt-BR" dirty="0" err="1"/>
+              <a:t>method</a:t>
+            </a:r>
+            <a:endParaRPr lang="pt-BR" dirty="0"/>
+          </a:p>
+        </p:txBody>
+      </p:sp>
+      <p:sp>
+        <p:nvSpPr>
+          <p:cNvPr id="3" name="Espaço Reservado para Conteúdo 2">
+            <a:extLst>
+              <a:ext uri="{FF2B5EF4-FFF2-40B4-BE49-F238E27FC236}">
+                <a16:creationId xmlns:a16="http://schemas.microsoft.com/office/drawing/2014/main" id="{47976EF0-9B83-60D1-470B-148C97945239}"/>
+              </a:ext>
+            </a:extLst>
+          </p:cNvPr>
+          <p:cNvSpPr>
+            <a:spLocks noGrp="1"/>
+          </p:cNvSpPr>
+          <p:nvPr>
+            <p:ph idx="1"/>
+          </p:nvPr>
+        </p:nvSpPr>
+        <p:spPr/>
+        <p:txBody>
+          <a:bodyPr/>
+          <a:lstStyle/>
+          <a:p>
+            <a:r>
+              <a:rPr lang="pt-BR" dirty="0"/>
+              <a:t>"Nossa métrica original tratava um pequeno erro numa semana de venda baixa com o mesmo peso de um erro grande numa semana de pico. Corrigindo isso para pesar pelo volume real vendido, os dois produtos que pareciam ter problema saem da faixa negativa para uma faixa de desempenho normal."</a:t>
+            </a:r>
+          </a:p>
+        </p:txBody>
+      </p:sp>
+    </p:spTree>
+    <p:extLst>
+      <p:ext uri="{BB962C8B-B14F-4D97-AF65-F5344CB8AC3E}">
+        <p14:creationId xmlns:p14="http://schemas.microsoft.com/office/powerpoint/2010/main" val="1773792928"/>
+      </p:ext>
+    </p:extLst>
+  </p:cSld>
+  <p:clrMapOvr>
+    <a:masterClrMapping/>
+  </p:clrMapOvr>
+</p:sld>
+</file>
+
+<file path=ppt/slides/slide21.xml><?xml version="1.0" encoding="utf-8"?>
 <p:sld xmlns:a="http://schemas.openxmlformats.org/drawingml/2006/main" xmlns:r="http://schemas.openxmlformats.org/officeDocument/2006/relationships" xmlns:p="http://schemas.openxmlformats.org/presentationml/2006/main">
   <p:cSld>
     <p:spTree>
@@ -4285,7 +6922,130 @@
 </p:sld>
 </file>
 
-<file path=ppt/slides/slide6.xml><?xml version="1.0" encoding="utf-8"?>
+<file path=ppt/slides/slide22.xml><?xml version="1.0" encoding="utf-8"?>
+<p:sld xmlns:a="http://schemas.openxmlformats.org/drawingml/2006/main" xmlns:r="http://schemas.openxmlformats.org/officeDocument/2006/relationships" xmlns:p="http://schemas.openxmlformats.org/presentationml/2006/main">
+  <p:cSld>
+    <p:bg>
+      <p:bgPr>
+        <a:solidFill>
+          <a:srgbClr val="002060"/>
+        </a:solidFill>
+        <a:effectLst/>
+      </p:bgPr>
+    </p:bg>
+    <p:spTree>
+      <p:nvGrpSpPr>
+        <p:cNvPr id="1" name=""/>
+        <p:cNvGrpSpPr/>
+        <p:nvPr/>
+      </p:nvGrpSpPr>
+      <p:grpSpPr>
+        <a:xfrm>
+          <a:off x="0" y="0"/>
+          <a:ext cx="0" cy="0"/>
+          <a:chOff x="0" y="0"/>
+          <a:chExt cx="0" cy="0"/>
+        </a:xfrm>
+      </p:grpSpPr>
+      <p:sp>
+        <p:nvSpPr>
+          <p:cNvPr id="2" name="Título 1">
+            <a:extLst>
+              <a:ext uri="{FF2B5EF4-FFF2-40B4-BE49-F238E27FC236}">
+                <a16:creationId xmlns:a16="http://schemas.microsoft.com/office/drawing/2014/main" id="{C20EDED7-164D-37D7-AF4E-592D5EF40958}"/>
+              </a:ext>
+            </a:extLst>
+          </p:cNvPr>
+          <p:cNvSpPr>
+            <a:spLocks noGrp="1"/>
+          </p:cNvSpPr>
+          <p:nvPr>
+            <p:ph type="title"/>
+          </p:nvPr>
+        </p:nvSpPr>
+        <p:spPr/>
+        <p:txBody>
+          <a:bodyPr>
+            <a:normAutofit/>
+          </a:bodyPr>
+          <a:lstStyle/>
+          <a:p>
+            <a:r>
+              <a:rPr lang="pt-BR" b="1" dirty="0">
+                <a:solidFill>
+                  <a:schemeClr val="bg1"/>
+                </a:solidFill>
+              </a:rPr>
+              <a:t>Correção de métrica: MAPE </a:t>
+            </a:r>
+            <a:r>
+              <a:rPr lang="pt-BR" b="1" dirty="0" err="1">
+                <a:solidFill>
+                  <a:schemeClr val="bg1"/>
+                </a:solidFill>
+              </a:rPr>
+              <a:t>vs</a:t>
+            </a:r>
+            <a:r>
+              <a:rPr lang="pt-BR" b="1" dirty="0">
+                <a:solidFill>
+                  <a:schemeClr val="bg1"/>
+                </a:solidFill>
+              </a:rPr>
+              <a:t> WAPE</a:t>
+            </a:r>
+            <a:endParaRPr lang="pt-BR" dirty="0">
+              <a:solidFill>
+                <a:schemeClr val="bg1"/>
+              </a:solidFill>
+            </a:endParaRPr>
+          </a:p>
+        </p:txBody>
+      </p:sp>
+      <p:pic>
+        <p:nvPicPr>
+          <p:cNvPr id="11" name="Imagem 10">
+            <a:extLst>
+              <a:ext uri="{FF2B5EF4-FFF2-40B4-BE49-F238E27FC236}">
+                <a16:creationId xmlns:a16="http://schemas.microsoft.com/office/drawing/2014/main" id="{93B8F91A-1EDB-880A-4A2B-C08CA0D412B9}"/>
+              </a:ext>
+            </a:extLst>
+          </p:cNvPr>
+          <p:cNvPicPr>
+            <a:picLocks noChangeAspect="1"/>
+          </p:cNvPicPr>
+          <p:nvPr/>
+        </p:nvPicPr>
+        <p:blipFill>
+          <a:blip r:embed="rId2"/>
+          <a:stretch>
+            <a:fillRect/>
+          </a:stretch>
+        </p:blipFill>
+        <p:spPr>
+          <a:xfrm>
+            <a:off x="2833232" y="1690688"/>
+            <a:ext cx="6525536" cy="4601217"/>
+          </a:xfrm>
+          <a:prstGeom prst="rect">
+            <a:avLst/>
+          </a:prstGeom>
+        </p:spPr>
+      </p:pic>
+    </p:spTree>
+    <p:extLst>
+      <p:ext uri="{BB962C8B-B14F-4D97-AF65-F5344CB8AC3E}">
+        <p14:creationId xmlns:p14="http://schemas.microsoft.com/office/powerpoint/2010/main" val="647130809"/>
+      </p:ext>
+    </p:extLst>
+  </p:cSld>
+  <p:clrMapOvr>
+    <a:masterClrMapping/>
+  </p:clrMapOvr>
+</p:sld>
+</file>
+
+<file path=ppt/slides/slide23.xml><?xml version="1.0" encoding="utf-8"?>
 <p:sld xmlns:a="http://schemas.openxmlformats.org/drawingml/2006/main" xmlns:r="http://schemas.openxmlformats.org/officeDocument/2006/relationships" xmlns:p="http://schemas.openxmlformats.org/presentationml/2006/main">
   <p:cSld>
     <p:spTree>
@@ -4423,7 +7183,7 @@
 </p:sld>
 </file>
 
-<file path=ppt/slides/slide7.xml><?xml version="1.0" encoding="utf-8"?>
+<file path=ppt/slides/slide24.xml><?xml version="1.0" encoding="utf-8"?>
 <p:sld xmlns:a="http://schemas.openxmlformats.org/drawingml/2006/main" xmlns:r="http://schemas.openxmlformats.org/officeDocument/2006/relationships" xmlns:p="http://schemas.openxmlformats.org/presentationml/2006/main">
   <p:cSld>
     <p:spTree>
@@ -4431,7 +7191,7 @@
         <p:cNvPr id="1" name="">
           <a:extLst>
             <a:ext uri="{FF2B5EF4-FFF2-40B4-BE49-F238E27FC236}">
-              <a16:creationId xmlns:a16="http://schemas.microsoft.com/office/drawing/2014/main" id="{C8B94BB5-F3ED-6C1E-0089-84A4ABC528AC}"/>
+              <a16:creationId xmlns:a16="http://schemas.microsoft.com/office/drawing/2014/main" id="{0C62A7EC-31CF-E96B-A7C6-E14F1F0D040F}"/>
             </a:ext>
           </a:extLst>
         </p:cNvPr>
@@ -4451,7 +7211,7 @@
           <p:cNvPr id="2" name="Título 1">
             <a:extLst>
               <a:ext uri="{FF2B5EF4-FFF2-40B4-BE49-F238E27FC236}">
-                <a16:creationId xmlns:a16="http://schemas.microsoft.com/office/drawing/2014/main" id="{A1142185-714B-30B4-DDD6-E0B217A207C3}"/>
+                <a16:creationId xmlns:a16="http://schemas.microsoft.com/office/drawing/2014/main" id="{C221B1B0-9760-8E2F-EAFD-550AB5B3B1DE}"/>
               </a:ext>
             </a:extLst>
           </p:cNvPr>
@@ -4468,32 +7228,28 @@
           <a:lstStyle/>
           <a:p>
             <a:r>
-              <a:rPr lang="pt-BR" dirty="0" err="1"/>
-              <a:t>Changing</a:t>
-            </a:r>
-            <a:r>
-              <a:rPr lang="pt-BR" dirty="0"/>
-              <a:t> </a:t>
-            </a:r>
-            <a:r>
-              <a:rPr lang="pt-BR" dirty="0" err="1"/>
-              <a:t>the</a:t>
-            </a:r>
-            <a:r>
-              <a:rPr lang="pt-BR" dirty="0"/>
-              <a:t> </a:t>
-            </a:r>
-            <a:r>
-              <a:rPr lang="pt-BR" dirty="0" err="1"/>
-              <a:t>Accuracy</a:t>
-            </a:r>
-            <a:r>
-              <a:rPr lang="pt-BR" dirty="0"/>
-              <a:t> </a:t>
-            </a:r>
-            <a:r>
-              <a:rPr lang="pt-BR" dirty="0" err="1"/>
-              <a:t>method</a:t>
+              <a:rPr lang="pt-BR" dirty="0"/>
+              <a:t>4 </a:t>
+            </a:r>
+            <a:r>
+              <a:rPr lang="pt-BR" dirty="0" err="1"/>
+              <a:t>Problematic</a:t>
+            </a:r>
+            <a:r>
+              <a:rPr lang="pt-BR" dirty="0"/>
+              <a:t> cases </a:t>
+            </a:r>
+            <a:r>
+              <a:rPr lang="pt-BR" dirty="0" err="1"/>
+              <a:t>with</a:t>
+            </a:r>
+            <a:r>
+              <a:rPr lang="pt-BR" dirty="0"/>
+              <a:t> </a:t>
+            </a:r>
+            <a:r>
+              <a:rPr lang="pt-BR" dirty="0" err="1"/>
+              <a:t>Beverages</a:t>
             </a:r>
             <a:endParaRPr lang="pt-BR" dirty="0"/>
           </a:p>
@@ -4504,7 +7260,7 @@
           <p:cNvPr id="3" name="Espaço Reservado para Conteúdo 2">
             <a:extLst>
               <a:ext uri="{FF2B5EF4-FFF2-40B4-BE49-F238E27FC236}">
-                <a16:creationId xmlns:a16="http://schemas.microsoft.com/office/drawing/2014/main" id="{47976EF0-9B83-60D1-470B-148C97945239}"/>
+                <a16:creationId xmlns:a16="http://schemas.microsoft.com/office/drawing/2014/main" id="{DA28BE09-AC24-52B2-05C9-263DA98C98C4}"/>
               </a:ext>
             </a:extLst>
           </p:cNvPr>
@@ -4517,20 +7273,587 @@
         </p:nvSpPr>
         <p:spPr/>
         <p:txBody>
-          <a:bodyPr/>
+          <a:bodyPr>
+            <a:normAutofit fontScale="92500" lnSpcReduction="10000"/>
+          </a:bodyPr>
           <a:lstStyle/>
           <a:p>
             <a:r>
-              <a:rPr lang="pt-BR" dirty="0"/>
-              <a:t>"Nossa métrica original tratava um pequeno erro numa semana de venda baixa com o mesmo peso de um erro grande numa semana de pico. Corrigindo isso para pesar pelo volume real vendido, os dois produtos que pareciam ter problema saem da faixa negativa para uma faixa de desempenho normal."</a:t>
-            </a:r>
+              <a:rPr lang="en-US" dirty="0" err="1"/>
+              <a:t>Além</a:t>
+            </a:r>
+            <a:r>
+              <a:rPr lang="en-US" dirty="0"/>
+              <a:t> de </a:t>
+            </a:r>
+            <a:r>
+              <a:rPr lang="en-US" dirty="0" err="1"/>
+              <a:t>temperatura</a:t>
+            </a:r>
+            <a:r>
+              <a:rPr lang="en-US" dirty="0"/>
+              <a:t> (</a:t>
+            </a:r>
+            <a:r>
+              <a:rPr lang="en-US" dirty="0" err="1"/>
+              <a:t>hipótese</a:t>
+            </a:r>
+            <a:r>
+              <a:rPr lang="en-US" dirty="0"/>
+              <a:t> forte </a:t>
+            </a:r>
+            <a:r>
+              <a:rPr lang="en-US" dirty="0" err="1"/>
+              <a:t>pra</a:t>
+            </a:r>
+            <a:r>
+              <a:rPr lang="en-US" dirty="0"/>
+              <a:t> </a:t>
+            </a:r>
+            <a:r>
+              <a:rPr lang="en-US" dirty="0" err="1"/>
+              <a:t>bebidas</a:t>
+            </a:r>
+            <a:r>
+              <a:rPr lang="en-US" dirty="0"/>
+              <a:t> geladas, </a:t>
+            </a:r>
+            <a:r>
+              <a:rPr lang="en-US" dirty="0" err="1"/>
+              <a:t>não</a:t>
+            </a:r>
+            <a:r>
+              <a:rPr lang="en-US" dirty="0"/>
+              <a:t> </a:t>
+            </a:r>
+            <a:r>
+              <a:rPr lang="en-US" dirty="0" err="1"/>
+              <a:t>testável</a:t>
+            </a:r>
+            <a:r>
+              <a:rPr lang="en-US" dirty="0"/>
+              <a:t> com o dataset </a:t>
+            </a:r>
+            <a:r>
+              <a:rPr lang="en-US" dirty="0" err="1"/>
+              <a:t>atual</a:t>
+            </a:r>
+            <a:r>
+              <a:rPr lang="en-US" dirty="0"/>
+              <a:t>), </a:t>
+            </a:r>
+            <a:r>
+              <a:rPr lang="en-US" dirty="0" err="1"/>
+              <a:t>recomendamos</a:t>
+            </a:r>
+            <a:r>
+              <a:rPr lang="en-US" dirty="0"/>
+              <a:t> </a:t>
+            </a:r>
+            <a:r>
+              <a:rPr lang="en-US" dirty="0" err="1"/>
+              <a:t>uma</a:t>
+            </a:r>
+            <a:r>
+              <a:rPr lang="en-US" dirty="0"/>
+              <a:t> </a:t>
+            </a:r>
+            <a:r>
+              <a:rPr lang="en-US" dirty="0" err="1"/>
+              <a:t>investigação</a:t>
+            </a:r>
+            <a:r>
+              <a:rPr lang="en-US" dirty="0"/>
+              <a:t> </a:t>
+            </a:r>
+            <a:r>
+              <a:rPr lang="en-US" dirty="0" err="1"/>
+              <a:t>mais</a:t>
+            </a:r>
+            <a:r>
+              <a:rPr lang="en-US" dirty="0"/>
+              <a:t> </a:t>
+            </a:r>
+            <a:r>
+              <a:rPr lang="en-US" dirty="0" err="1"/>
+              <a:t>ampla</a:t>
+            </a:r>
+            <a:r>
+              <a:rPr lang="en-US" dirty="0"/>
+              <a:t> de </a:t>
+            </a:r>
+            <a:r>
+              <a:rPr lang="en-US" dirty="0" err="1"/>
+              <a:t>fatores</a:t>
+            </a:r>
+            <a:r>
+              <a:rPr lang="en-US" dirty="0"/>
+              <a:t> </a:t>
+            </a:r>
+            <a:r>
+              <a:rPr lang="en-US" dirty="0" err="1"/>
+              <a:t>externos</a:t>
+            </a:r>
+            <a:r>
+              <a:rPr lang="en-US" dirty="0"/>
+              <a:t> </a:t>
+            </a:r>
+            <a:r>
+              <a:rPr lang="en-US" dirty="0" err="1"/>
+              <a:t>que</a:t>
+            </a:r>
+            <a:r>
+              <a:rPr lang="en-US" dirty="0"/>
+              <a:t> </a:t>
+            </a:r>
+            <a:r>
+              <a:rPr lang="en-US" dirty="0" err="1"/>
+              <a:t>possam</a:t>
+            </a:r>
+            <a:r>
+              <a:rPr lang="en-US" dirty="0"/>
+              <a:t> </a:t>
+            </a:r>
+            <a:r>
+              <a:rPr lang="en-US" dirty="0" err="1"/>
+              <a:t>explicar</a:t>
+            </a:r>
+            <a:r>
+              <a:rPr lang="en-US" dirty="0"/>
+              <a:t> </a:t>
+            </a:r>
+            <a:r>
+              <a:rPr lang="en-US" dirty="0" err="1"/>
+              <a:t>os</a:t>
+            </a:r>
+            <a:r>
+              <a:rPr lang="en-US" dirty="0"/>
+              <a:t> </a:t>
+            </a:r>
+            <a:r>
+              <a:rPr lang="en-US" dirty="0" err="1"/>
+              <a:t>picos</a:t>
+            </a:r>
+            <a:r>
+              <a:rPr lang="en-US" dirty="0"/>
+              <a:t> e vales de </a:t>
+            </a:r>
+            <a:r>
+              <a:rPr lang="en-US" dirty="0" err="1"/>
+              <a:t>demanda</a:t>
+            </a:r>
+            <a:r>
+              <a:rPr lang="en-US" dirty="0"/>
+              <a:t> </a:t>
+            </a:r>
+            <a:r>
+              <a:rPr lang="en-US" dirty="0" err="1"/>
+              <a:t>desses</a:t>
+            </a:r>
+            <a:r>
+              <a:rPr lang="en-US" dirty="0"/>
+              <a:t> </a:t>
+            </a:r>
+            <a:r>
+              <a:rPr lang="en-US" dirty="0" err="1"/>
+              <a:t>produtos</a:t>
+            </a:r>
+            <a:r>
+              <a:rPr lang="en-US" dirty="0"/>
+              <a:t> — </a:t>
+            </a:r>
+            <a:r>
+              <a:rPr lang="en-US" dirty="0" err="1"/>
+              <a:t>incluindo</a:t>
+            </a:r>
+            <a:r>
+              <a:rPr lang="en-US" dirty="0"/>
+              <a:t>, mas </a:t>
+            </a:r>
+            <a:r>
+              <a:rPr lang="en-US" dirty="0" err="1"/>
+              <a:t>não</a:t>
+            </a:r>
+            <a:r>
+              <a:rPr lang="en-US" dirty="0"/>
+              <a:t> se </a:t>
+            </a:r>
+            <a:r>
+              <a:rPr lang="en-US" dirty="0" err="1"/>
+              <a:t>limitando</a:t>
+            </a:r>
+            <a:r>
+              <a:rPr lang="en-US" dirty="0"/>
+              <a:t> a: </a:t>
+            </a:r>
+            <a:r>
+              <a:rPr lang="en-US" dirty="0" err="1"/>
+              <a:t>dinâmica</a:t>
+            </a:r>
+            <a:r>
+              <a:rPr lang="en-US" dirty="0"/>
+              <a:t> de marketplace (</a:t>
+            </a:r>
+            <a:r>
+              <a:rPr lang="en-US" dirty="0" err="1"/>
+              <a:t>precificação</a:t>
+            </a:r>
+            <a:r>
+              <a:rPr lang="en-US" dirty="0"/>
+              <a:t> </a:t>
+            </a:r>
+            <a:r>
+              <a:rPr lang="en-US" dirty="0" err="1"/>
+              <a:t>algorítmica</a:t>
+            </a:r>
+            <a:r>
+              <a:rPr lang="en-US" dirty="0"/>
+              <a:t> de </a:t>
+            </a:r>
+            <a:r>
+              <a:rPr lang="en-US" dirty="0" err="1"/>
+              <a:t>terceiros</a:t>
+            </a:r>
+            <a:r>
+              <a:rPr lang="en-US" dirty="0"/>
+              <a:t>, </a:t>
+            </a:r>
+            <a:r>
+              <a:rPr lang="en-US" dirty="0" err="1"/>
+              <a:t>mencionada</a:t>
+            </a:r>
+            <a:r>
+              <a:rPr lang="en-US" dirty="0"/>
+              <a:t> </a:t>
+            </a:r>
+            <a:r>
+              <a:rPr lang="en-US" dirty="0" err="1"/>
+              <a:t>na</a:t>
+            </a:r>
+            <a:r>
+              <a:rPr lang="en-US" dirty="0"/>
+              <a:t> </a:t>
+            </a:r>
+            <a:r>
+              <a:rPr lang="en-US" dirty="0" err="1"/>
+              <a:t>própria</a:t>
+            </a:r>
+            <a:r>
+              <a:rPr lang="en-US" dirty="0"/>
+              <a:t> </a:t>
+            </a:r>
+            <a:r>
+              <a:rPr lang="en-US" dirty="0" err="1"/>
+              <a:t>descrição</a:t>
+            </a:r>
+            <a:r>
+              <a:rPr lang="en-US" dirty="0"/>
+              <a:t> do canal E-commerce no case), </a:t>
+            </a:r>
+            <a:r>
+              <a:rPr lang="en-US" dirty="0" err="1"/>
+              <a:t>eventos</a:t>
+            </a:r>
+            <a:r>
+              <a:rPr lang="en-US" dirty="0"/>
+              <a:t> de </a:t>
+            </a:r>
+            <a:r>
+              <a:rPr lang="en-US" dirty="0" err="1"/>
+              <a:t>calendário</a:t>
+            </a:r>
+            <a:r>
+              <a:rPr lang="en-US" dirty="0"/>
+              <a:t> regional, e </a:t>
+            </a:r>
+            <a:r>
+              <a:rPr lang="en-US" dirty="0" err="1"/>
+              <a:t>possíveis</a:t>
+            </a:r>
+            <a:r>
+              <a:rPr lang="en-US" dirty="0"/>
+              <a:t> </a:t>
+            </a:r>
+            <a:r>
+              <a:rPr lang="en-US" dirty="0" err="1"/>
+              <a:t>efeitos</a:t>
+            </a:r>
+            <a:r>
+              <a:rPr lang="en-US" dirty="0"/>
+              <a:t> cruzados com </a:t>
+            </a:r>
+            <a:r>
+              <a:rPr lang="en-US" dirty="0" err="1"/>
+              <a:t>produtos</a:t>
+            </a:r>
+            <a:r>
+              <a:rPr lang="en-US" dirty="0"/>
+              <a:t> </a:t>
+            </a:r>
+            <a:r>
+              <a:rPr lang="en-US" dirty="0" err="1"/>
+              <a:t>concorrentes</a:t>
+            </a:r>
+            <a:r>
+              <a:rPr lang="en-US" dirty="0"/>
+              <a:t> fora do </a:t>
+            </a:r>
+            <a:r>
+              <a:rPr lang="en-US" dirty="0" err="1"/>
+              <a:t>portfólio</a:t>
+            </a:r>
+            <a:r>
+              <a:rPr lang="en-US" dirty="0"/>
+              <a:t> da </a:t>
+            </a:r>
+            <a:r>
+              <a:rPr lang="en-US" dirty="0" err="1"/>
+              <a:t>RetailCo</a:t>
+            </a:r>
+            <a:r>
+              <a:rPr lang="en-US" dirty="0"/>
+              <a:t>. A </a:t>
+            </a:r>
+            <a:r>
+              <a:rPr lang="en-US" dirty="0" err="1"/>
+              <a:t>prática</a:t>
+            </a:r>
+            <a:r>
+              <a:rPr lang="en-US" dirty="0"/>
+              <a:t> </a:t>
+            </a:r>
+            <a:r>
+              <a:rPr lang="en-US" dirty="0" err="1"/>
+              <a:t>recomendada</a:t>
+            </a:r>
+            <a:r>
+              <a:rPr lang="en-US" dirty="0"/>
+              <a:t> é formular </a:t>
+            </a:r>
+            <a:r>
+              <a:rPr lang="en-US" dirty="0" err="1"/>
+              <a:t>hipóteses</a:t>
+            </a:r>
+            <a:r>
+              <a:rPr lang="en-US" dirty="0"/>
+              <a:t> de </a:t>
+            </a:r>
+            <a:r>
+              <a:rPr lang="en-US" dirty="0" err="1"/>
+              <a:t>negócio</a:t>
+            </a:r>
+            <a:r>
+              <a:rPr lang="en-US" dirty="0"/>
+              <a:t> </a:t>
+            </a:r>
+            <a:r>
+              <a:rPr lang="en-US" dirty="0" err="1"/>
+              <a:t>primeiro</a:t>
+            </a:r>
+            <a:r>
+              <a:rPr lang="en-US" dirty="0"/>
+              <a:t>, </a:t>
+            </a:r>
+            <a:r>
+              <a:rPr lang="en-US" dirty="0" err="1"/>
+              <a:t>testar</a:t>
+            </a:r>
+            <a:r>
+              <a:rPr lang="en-US" dirty="0"/>
+              <a:t> </a:t>
+            </a:r>
+            <a:r>
+              <a:rPr lang="en-US" dirty="0" err="1"/>
+              <a:t>cada</a:t>
+            </a:r>
+            <a:r>
+              <a:rPr lang="en-US" dirty="0"/>
+              <a:t> </a:t>
+            </a:r>
+            <a:r>
+              <a:rPr lang="en-US" dirty="0" err="1"/>
+              <a:t>uma</a:t>
+            </a:r>
+            <a:r>
+              <a:rPr lang="en-US" dirty="0"/>
+              <a:t> com o dado </a:t>
+            </a:r>
+            <a:r>
+              <a:rPr lang="en-US" dirty="0" err="1"/>
+              <a:t>disponível</a:t>
+            </a:r>
+            <a:r>
+              <a:rPr lang="en-US" dirty="0"/>
+              <a:t>, e </a:t>
+            </a:r>
+            <a:r>
+              <a:rPr lang="en-US" dirty="0" err="1"/>
+              <a:t>só</a:t>
+            </a:r>
+            <a:r>
+              <a:rPr lang="en-US" dirty="0"/>
+              <a:t> </a:t>
+            </a:r>
+            <a:r>
+              <a:rPr lang="en-US" dirty="0" err="1"/>
+              <a:t>então</a:t>
+            </a:r>
+            <a:r>
+              <a:rPr lang="en-US" dirty="0"/>
+              <a:t> </a:t>
+            </a:r>
+            <a:r>
+              <a:rPr lang="en-US" dirty="0" err="1"/>
+              <a:t>buscar</a:t>
+            </a:r>
+            <a:r>
+              <a:rPr lang="en-US" dirty="0"/>
+              <a:t>/</a:t>
+            </a:r>
+            <a:r>
+              <a:rPr lang="en-US" dirty="0" err="1"/>
+              <a:t>priorizar</a:t>
+            </a:r>
+            <a:r>
+              <a:rPr lang="en-US" dirty="0"/>
+              <a:t> a coleta da </a:t>
+            </a:r>
+            <a:r>
+              <a:rPr lang="en-US" dirty="0" err="1"/>
+              <a:t>variável</a:t>
+            </a:r>
+            <a:r>
+              <a:rPr lang="en-US" dirty="0"/>
+              <a:t> </a:t>
+            </a:r>
+            <a:r>
+              <a:rPr lang="en-US" dirty="0" err="1"/>
+              <a:t>específica</a:t>
+            </a:r>
+            <a:r>
+              <a:rPr lang="en-US" dirty="0"/>
+              <a:t> </a:t>
+            </a:r>
+            <a:r>
+              <a:rPr lang="en-US" dirty="0" err="1"/>
+              <a:t>que</a:t>
+            </a:r>
+            <a:r>
+              <a:rPr lang="en-US" dirty="0"/>
+              <a:t> </a:t>
+            </a:r>
+            <a:r>
+              <a:rPr lang="en-US" dirty="0" err="1"/>
+              <a:t>sobreviveu</a:t>
+            </a:r>
+            <a:r>
+              <a:rPr lang="en-US" dirty="0"/>
+              <a:t> </a:t>
+            </a:r>
+            <a:r>
+              <a:rPr lang="en-US" dirty="0" err="1"/>
+              <a:t>ao</a:t>
+            </a:r>
+            <a:r>
+              <a:rPr lang="en-US" dirty="0"/>
+              <a:t> teste — </a:t>
+            </a:r>
+            <a:r>
+              <a:rPr lang="en-US" dirty="0" err="1"/>
+              <a:t>evitando</a:t>
+            </a:r>
+            <a:r>
+              <a:rPr lang="en-US" dirty="0"/>
+              <a:t> </a:t>
+            </a:r>
+            <a:r>
+              <a:rPr lang="en-US" dirty="0" err="1"/>
+              <a:t>adicionar</a:t>
+            </a:r>
+            <a:r>
+              <a:rPr lang="en-US" dirty="0"/>
+              <a:t> dado novo </a:t>
+            </a:r>
+            <a:r>
+              <a:rPr lang="en-US" dirty="0" err="1"/>
+              <a:t>sem</a:t>
+            </a:r>
+            <a:r>
+              <a:rPr lang="en-US" dirty="0"/>
+              <a:t> </a:t>
+            </a:r>
+            <a:r>
+              <a:rPr lang="en-US" dirty="0" err="1"/>
+              <a:t>direção</a:t>
+            </a:r>
+            <a:r>
+              <a:rPr lang="en-US" dirty="0"/>
+              <a:t> </a:t>
+            </a:r>
+            <a:r>
+              <a:rPr lang="en-US" dirty="0" err="1"/>
+              <a:t>clara</a:t>
+            </a:r>
+            <a:r>
+              <a:rPr lang="en-US" dirty="0"/>
+              <a:t>, o </a:t>
+            </a:r>
+            <a:r>
+              <a:rPr lang="en-US" dirty="0" err="1"/>
+              <a:t>que</a:t>
+            </a:r>
+            <a:r>
+              <a:rPr lang="en-US" dirty="0"/>
+              <a:t> </a:t>
+            </a:r>
+            <a:r>
+              <a:rPr lang="en-US" dirty="0" err="1"/>
+              <a:t>aumenta</a:t>
+            </a:r>
+            <a:r>
+              <a:rPr lang="en-US" dirty="0"/>
+              <a:t> </a:t>
+            </a:r>
+            <a:r>
+              <a:rPr lang="en-US" dirty="0" err="1"/>
+              <a:t>risco</a:t>
+            </a:r>
+            <a:r>
+              <a:rPr lang="en-US" dirty="0"/>
+              <a:t> de overfitting dado o volume histórico </a:t>
+            </a:r>
+            <a:r>
+              <a:rPr lang="en-US" dirty="0" err="1"/>
+              <a:t>limitado</a:t>
+            </a:r>
+            <a:r>
+              <a:rPr lang="en-US" dirty="0"/>
+              <a:t> (~130-150 </a:t>
+            </a:r>
+            <a:r>
+              <a:rPr lang="en-US" dirty="0" err="1"/>
+              <a:t>semanas</a:t>
+            </a:r>
+            <a:r>
+              <a:rPr lang="en-US" dirty="0"/>
+              <a:t> </a:t>
+            </a:r>
+            <a:r>
+              <a:rPr lang="en-US" dirty="0" err="1"/>
+              <a:t>por</a:t>
+            </a:r>
+            <a:r>
+              <a:rPr lang="en-US" dirty="0"/>
+              <a:t> SKU-canal)."</a:t>
+            </a:r>
+            <a:endParaRPr lang="pt-BR" dirty="0"/>
           </a:p>
         </p:txBody>
       </p:sp>
     </p:spTree>
     <p:extLst>
       <p:ext uri="{BB962C8B-B14F-4D97-AF65-F5344CB8AC3E}">
-        <p14:creationId xmlns:p14="http://schemas.microsoft.com/office/powerpoint/2010/main" val="1773792928"/>
+        <p14:creationId xmlns:p14="http://schemas.microsoft.com/office/powerpoint/2010/main" val="1467408242"/>
       </p:ext>
     </p:extLst>
   </p:cSld>
@@ -4540,17 +7863,9 @@
 </p:sld>
 </file>
 
-<file path=ppt/slides/slide8.xml><?xml version="1.0" encoding="utf-8"?>
+<file path=ppt/slides/slide3.xml><?xml version="1.0" encoding="utf-8"?>
 <p:sld xmlns:a="http://schemas.openxmlformats.org/drawingml/2006/main" xmlns:r="http://schemas.openxmlformats.org/officeDocument/2006/relationships" xmlns:p="http://schemas.openxmlformats.org/presentationml/2006/main">
   <p:cSld>
-    <p:bg>
-      <p:bgPr>
-        <a:solidFill>
-          <a:srgbClr val="002060"/>
-        </a:solidFill>
-        <a:effectLst/>
-      </p:bgPr>
-    </p:bg>
     <p:spTree>
       <p:nvGrpSpPr>
         <p:cNvPr id="1" name=""/>
@@ -4570,7 +7885,7 @@
           <p:cNvPr id="2" name="Título 1">
             <a:extLst>
               <a:ext uri="{FF2B5EF4-FFF2-40B4-BE49-F238E27FC236}">
-                <a16:creationId xmlns:a16="http://schemas.microsoft.com/office/drawing/2014/main" id="{C20EDED7-164D-37D7-AF4E-592D5EF40958}"/>
+                <a16:creationId xmlns:a16="http://schemas.microsoft.com/office/drawing/2014/main" id="{4AFFF4FC-62E4-6F84-E954-3839D60A508F}"/>
               </a:ext>
             </a:extLst>
           </p:cNvPr>
@@ -4583,77 +7898,2853 @@
         </p:nvSpPr>
         <p:spPr/>
         <p:txBody>
-          <a:bodyPr>
-            <a:normAutofit/>
-          </a:bodyPr>
+          <a:bodyPr/>
           <a:lstStyle/>
           <a:p>
             <a:r>
-              <a:rPr lang="pt-BR" b="1" dirty="0">
-                <a:solidFill>
-                  <a:schemeClr val="bg1"/>
-                </a:solidFill>
-              </a:rPr>
-              <a:t>Correção de métrica: MAPE </a:t>
-            </a:r>
-            <a:r>
-              <a:rPr lang="pt-BR" b="1" dirty="0" err="1">
-                <a:solidFill>
-                  <a:schemeClr val="bg1"/>
-                </a:solidFill>
-              </a:rPr>
-              <a:t>vs</a:t>
-            </a:r>
-            <a:r>
-              <a:rPr lang="pt-BR" b="1" dirty="0">
-                <a:solidFill>
-                  <a:schemeClr val="bg1"/>
-                </a:solidFill>
-              </a:rPr>
-              <a:t> WAPE</a:t>
-            </a:r>
-            <a:endParaRPr lang="pt-BR" dirty="0">
-              <a:solidFill>
-                <a:schemeClr val="bg1"/>
-              </a:solidFill>
-            </a:endParaRPr>
-          </a:p>
-        </p:txBody>
-      </p:sp>
-      <p:pic>
-        <p:nvPicPr>
-          <p:cNvPr id="11" name="Imagem 10">
+              <a:rPr lang="pt-BR" dirty="0" err="1"/>
+              <a:t>Executive</a:t>
+            </a:r>
+            <a:r>
+              <a:rPr lang="pt-BR" dirty="0"/>
+              <a:t> </a:t>
+            </a:r>
+            <a:r>
+              <a:rPr lang="pt-BR" dirty="0" err="1"/>
+              <a:t>Summary</a:t>
+            </a:r>
+            <a:endParaRPr lang="en-US" dirty="0"/>
+          </a:p>
+        </p:txBody>
+      </p:sp>
+      <p:sp>
+        <p:nvSpPr>
+          <p:cNvPr id="3" name="Espaço Reservado para Conteúdo 2">
             <a:extLst>
               <a:ext uri="{FF2B5EF4-FFF2-40B4-BE49-F238E27FC236}">
-                <a16:creationId xmlns:a16="http://schemas.microsoft.com/office/drawing/2014/main" id="{93B8F91A-1EDB-880A-4A2B-C08CA0D412B9}"/>
+                <a16:creationId xmlns:a16="http://schemas.microsoft.com/office/drawing/2014/main" id="{656EE64A-A0C5-AD47-E4F6-68427BDED666}"/>
               </a:ext>
             </a:extLst>
           </p:cNvPr>
-          <p:cNvPicPr>
-            <a:picLocks noChangeAspect="1"/>
-          </p:cNvPicPr>
-          <p:nvPr/>
-        </p:nvPicPr>
-        <p:blipFill>
-          <a:blip r:embed="rId2"/>
-          <a:stretch>
-            <a:fillRect/>
-          </a:stretch>
-        </p:blipFill>
-        <p:spPr>
-          <a:xfrm>
-            <a:off x="2833232" y="1690688"/>
-            <a:ext cx="6525536" cy="4601217"/>
-          </a:xfrm>
-          <a:prstGeom prst="rect">
-            <a:avLst/>
-          </a:prstGeom>
-        </p:spPr>
-      </p:pic>
+          <p:cNvSpPr>
+            <a:spLocks noGrp="1"/>
+          </p:cNvSpPr>
+          <p:nvPr>
+            <p:ph idx="1"/>
+          </p:nvPr>
+        </p:nvSpPr>
+        <p:spPr/>
+        <p:txBody>
+          <a:bodyPr/>
+          <a:lstStyle/>
+          <a:p>
+            <a:r>
+              <a:rPr lang="en-US" dirty="0" err="1"/>
+              <a:t>Contexto</a:t>
+            </a:r>
+            <a:r>
+              <a:rPr lang="en-US" dirty="0"/>
+              <a:t> </a:t>
+            </a:r>
+            <a:r>
+              <a:rPr lang="en-US" dirty="0" err="1"/>
+              <a:t>mínimo</a:t>
+            </a:r>
+            <a:r>
+              <a:rPr lang="en-US" dirty="0"/>
+              <a:t> </a:t>
+            </a:r>
+            <a:r>
+              <a:rPr lang="en-US" dirty="0" err="1"/>
+              <a:t>pra</a:t>
+            </a:r>
+            <a:r>
+              <a:rPr lang="en-US" dirty="0"/>
+              <a:t> </a:t>
+            </a:r>
+            <a:r>
+              <a:rPr lang="en-US" dirty="0" err="1"/>
+              <a:t>situar</a:t>
+            </a:r>
+            <a:r>
+              <a:rPr lang="en-US" dirty="0"/>
+              <a:t> a </a:t>
+            </a:r>
+            <a:r>
+              <a:rPr lang="en-US" dirty="0" err="1"/>
+              <a:t>audiência</a:t>
+            </a:r>
+            <a:r>
+              <a:rPr lang="en-US" dirty="0"/>
+              <a:t>: quem é a </a:t>
+            </a:r>
+            <a:r>
+              <a:rPr lang="en-US" dirty="0" err="1"/>
+              <a:t>RetailCo</a:t>
+            </a:r>
+            <a:r>
+              <a:rPr lang="en-US" dirty="0"/>
+              <a:t>, </a:t>
+            </a:r>
+            <a:r>
+              <a:rPr lang="en-US" dirty="0" err="1"/>
+              <a:t>os</a:t>
+            </a:r>
+            <a:r>
+              <a:rPr lang="en-US" dirty="0"/>
+              <a:t> 3 </a:t>
+            </a:r>
+            <a:r>
+              <a:rPr lang="en-US" dirty="0" err="1"/>
+              <a:t>canais</a:t>
+            </a:r>
+            <a:r>
+              <a:rPr lang="en-US" dirty="0"/>
+              <a:t>, </a:t>
+            </a:r>
+            <a:r>
+              <a:rPr lang="en-US" dirty="0" err="1"/>
+              <a:t>os</a:t>
+            </a:r>
+            <a:r>
+              <a:rPr lang="en-US" dirty="0"/>
+              <a:t> 5 </a:t>
+            </a:r>
+            <a:r>
+              <a:rPr lang="en-US" dirty="0" err="1"/>
+              <a:t>produtos</a:t>
+            </a:r>
+            <a:r>
+              <a:rPr lang="en-US" dirty="0"/>
+              <a:t> com shelf life </a:t>
+            </a:r>
+            <a:r>
+              <a:rPr lang="en-US" dirty="0" err="1"/>
+              <a:t>curto</a:t>
+            </a:r>
+            <a:r>
+              <a:rPr lang="en-US" dirty="0"/>
+              <a:t>. </a:t>
+            </a:r>
+            <a:r>
+              <a:rPr lang="en-US" dirty="0" err="1"/>
+              <a:t>Não</a:t>
+            </a:r>
+            <a:r>
+              <a:rPr lang="en-US" dirty="0"/>
+              <a:t> é o </a:t>
+            </a:r>
+            <a:r>
+              <a:rPr lang="en-US" dirty="0" err="1"/>
+              <a:t>foco</a:t>
+            </a:r>
+            <a:r>
+              <a:rPr lang="en-US" dirty="0"/>
+              <a:t>, é </a:t>
+            </a:r>
+            <a:r>
+              <a:rPr lang="en-US" dirty="0" err="1"/>
+              <a:t>só</a:t>
+            </a:r>
+            <a:r>
+              <a:rPr lang="en-US" dirty="0"/>
+              <a:t> </a:t>
+            </a:r>
+            <a:r>
+              <a:rPr lang="en-US" dirty="0" err="1"/>
+              <a:t>ancoragem</a:t>
+            </a:r>
+            <a:r>
+              <a:rPr lang="en-US" dirty="0"/>
+              <a:t> — 1 </a:t>
+            </a:r>
+            <a:r>
+              <a:rPr lang="en-US" dirty="0" err="1"/>
+              <a:t>frase</a:t>
+            </a:r>
+            <a:r>
+              <a:rPr lang="en-US" dirty="0"/>
+              <a:t> </a:t>
+            </a:r>
+            <a:r>
+              <a:rPr lang="en-US" dirty="0" err="1"/>
+              <a:t>por</a:t>
+            </a:r>
+            <a:r>
+              <a:rPr lang="en-US" dirty="0"/>
+              <a:t> canal, </a:t>
+            </a:r>
+            <a:r>
+              <a:rPr lang="en-US" dirty="0" err="1"/>
+              <a:t>não</a:t>
+            </a:r>
+            <a:r>
+              <a:rPr lang="en-US" dirty="0"/>
+              <a:t> </a:t>
+            </a:r>
+            <a:r>
+              <a:rPr lang="en-US" dirty="0" err="1"/>
+              <a:t>precisa</a:t>
+            </a:r>
+            <a:r>
+              <a:rPr lang="en-US" dirty="0"/>
+              <a:t> </a:t>
+            </a:r>
+            <a:r>
+              <a:rPr lang="en-US" dirty="0" err="1"/>
+              <a:t>repetir</a:t>
+            </a:r>
+            <a:r>
+              <a:rPr lang="en-US" dirty="0"/>
+              <a:t> a </a:t>
+            </a:r>
+            <a:r>
+              <a:rPr lang="en-US" dirty="0" err="1"/>
+              <a:t>tabela</a:t>
+            </a:r>
+            <a:r>
+              <a:rPr lang="en-US" dirty="0"/>
+              <a:t> </a:t>
+            </a:r>
+            <a:r>
+              <a:rPr lang="en-US" dirty="0" err="1"/>
+              <a:t>toda</a:t>
+            </a:r>
+            <a:r>
+              <a:rPr lang="en-US" dirty="0"/>
+              <a:t> do case.</a:t>
+            </a:r>
+          </a:p>
+        </p:txBody>
+      </p:sp>
     </p:spTree>
     <p:extLst>
       <p:ext uri="{BB962C8B-B14F-4D97-AF65-F5344CB8AC3E}">
-        <p14:creationId xmlns:p14="http://schemas.microsoft.com/office/powerpoint/2010/main" val="647130809"/>
+        <p14:creationId xmlns:p14="http://schemas.microsoft.com/office/powerpoint/2010/main" val="911630675"/>
+      </p:ext>
+    </p:extLst>
+  </p:cSld>
+  <p:clrMapOvr>
+    <a:masterClrMapping/>
+  </p:clrMapOvr>
+</p:sld>
+</file>
+
+<file path=ppt/slides/slide4.xml><?xml version="1.0" encoding="utf-8"?>
+<p:sld xmlns:a="http://schemas.openxmlformats.org/drawingml/2006/main" xmlns:r="http://schemas.openxmlformats.org/officeDocument/2006/relationships" xmlns:p="http://schemas.openxmlformats.org/presentationml/2006/main">
+  <p:cSld>
+    <p:spTree>
+      <p:nvGrpSpPr>
+        <p:cNvPr id="1" name="">
+          <a:extLst>
+            <a:ext uri="{FF2B5EF4-FFF2-40B4-BE49-F238E27FC236}">
+              <a16:creationId xmlns:a16="http://schemas.microsoft.com/office/drawing/2014/main" id="{BBC91306-852A-1C2E-AF77-E5400B2C8C87}"/>
+            </a:ext>
+          </a:extLst>
+        </p:cNvPr>
+        <p:cNvGrpSpPr/>
+        <p:nvPr/>
+      </p:nvGrpSpPr>
+      <p:grpSpPr>
+        <a:xfrm>
+          <a:off x="0" y="0"/>
+          <a:ext cx="0" cy="0"/>
+          <a:chOff x="0" y="0"/>
+          <a:chExt cx="0" cy="0"/>
+        </a:xfrm>
+      </p:grpSpPr>
+      <p:sp>
+        <p:nvSpPr>
+          <p:cNvPr id="2" name="Título 1">
+            <a:extLst>
+              <a:ext uri="{FF2B5EF4-FFF2-40B4-BE49-F238E27FC236}">
+                <a16:creationId xmlns:a16="http://schemas.microsoft.com/office/drawing/2014/main" id="{65EB6C38-014C-CB91-BDFC-7AD30EB00E74}"/>
+              </a:ext>
+            </a:extLst>
+          </p:cNvPr>
+          <p:cNvSpPr>
+            <a:spLocks noGrp="1"/>
+          </p:cNvSpPr>
+          <p:nvPr>
+            <p:ph type="title"/>
+          </p:nvPr>
+        </p:nvSpPr>
+        <p:spPr/>
+        <p:txBody>
+          <a:bodyPr/>
+          <a:lstStyle/>
+          <a:p>
+            <a:r>
+              <a:rPr lang="pt-BR" dirty="0" err="1"/>
+              <a:t>Executive</a:t>
+            </a:r>
+            <a:r>
+              <a:rPr lang="pt-BR" dirty="0"/>
+              <a:t> </a:t>
+            </a:r>
+            <a:r>
+              <a:rPr lang="pt-BR" dirty="0" err="1"/>
+              <a:t>Summary</a:t>
+            </a:r>
+            <a:endParaRPr lang="en-US" dirty="0"/>
+          </a:p>
+        </p:txBody>
+      </p:sp>
+      <p:sp>
+        <p:nvSpPr>
+          <p:cNvPr id="3" name="Espaço Reservado para Conteúdo 2">
+            <a:extLst>
+              <a:ext uri="{FF2B5EF4-FFF2-40B4-BE49-F238E27FC236}">
+                <a16:creationId xmlns:a16="http://schemas.microsoft.com/office/drawing/2014/main" id="{D9D7ECEE-BF2A-6E05-2458-AB75643A762A}"/>
+              </a:ext>
+            </a:extLst>
+          </p:cNvPr>
+          <p:cNvSpPr>
+            <a:spLocks noGrp="1"/>
+          </p:cNvSpPr>
+          <p:nvPr>
+            <p:ph idx="1"/>
+          </p:nvPr>
+        </p:nvSpPr>
+        <p:spPr/>
+        <p:txBody>
+          <a:bodyPr>
+            <a:normAutofit fontScale="92500" lnSpcReduction="10000"/>
+          </a:bodyPr>
+          <a:lstStyle/>
+          <a:p>
+            <a:r>
+              <a:rPr lang="en-US" dirty="0"/>
+              <a:t>Aqui é </a:t>
+            </a:r>
+            <a:r>
+              <a:rPr lang="en-US" dirty="0" err="1"/>
+              <a:t>onde</a:t>
+            </a:r>
+            <a:r>
+              <a:rPr lang="en-US" dirty="0"/>
+              <a:t> </a:t>
+            </a:r>
+            <a:r>
+              <a:rPr lang="en-US" dirty="0" err="1"/>
+              <a:t>entra</a:t>
+            </a:r>
+            <a:r>
+              <a:rPr lang="en-US" dirty="0"/>
+              <a:t> o </a:t>
+            </a:r>
+            <a:r>
+              <a:rPr lang="en-US" i="1" dirty="0"/>
+              <a:t>framing</a:t>
+            </a:r>
+            <a:r>
+              <a:rPr lang="en-US" dirty="0"/>
+              <a:t> </a:t>
+            </a:r>
+            <a:r>
+              <a:rPr lang="en-US" dirty="0" err="1"/>
+              <a:t>pessoal</a:t>
+            </a:r>
+            <a:r>
+              <a:rPr lang="en-US" dirty="0"/>
+              <a:t>, </a:t>
+            </a:r>
+            <a:r>
+              <a:rPr lang="en-US" dirty="0" err="1"/>
+              <a:t>não</a:t>
+            </a:r>
+            <a:r>
+              <a:rPr lang="en-US" dirty="0"/>
+              <a:t> </a:t>
+            </a:r>
+            <a:r>
+              <a:rPr lang="en-US" dirty="0" err="1"/>
+              <a:t>só</a:t>
+            </a:r>
+            <a:r>
+              <a:rPr lang="en-US" dirty="0"/>
+              <a:t> </a:t>
+            </a:r>
+            <a:r>
+              <a:rPr lang="en-US" dirty="0" err="1"/>
+              <a:t>os</a:t>
+            </a:r>
+            <a:r>
+              <a:rPr lang="en-US" dirty="0"/>
+              <a:t> </a:t>
+            </a:r>
+            <a:r>
+              <a:rPr lang="en-US" dirty="0" err="1"/>
+              <a:t>fatos</a:t>
+            </a:r>
+            <a:r>
+              <a:rPr lang="en-US" dirty="0"/>
+              <a:t>. </a:t>
+            </a:r>
+            <a:r>
+              <a:rPr lang="en-US" dirty="0" err="1"/>
+              <a:t>Sugestão</a:t>
+            </a:r>
+            <a:r>
+              <a:rPr lang="en-US" dirty="0"/>
+              <a:t> de </a:t>
+            </a:r>
+            <a:r>
+              <a:rPr lang="en-US" dirty="0" err="1"/>
+              <a:t>estrutura</a:t>
+            </a:r>
+            <a:r>
+              <a:rPr lang="en-US" dirty="0"/>
+              <a:t>: </a:t>
+            </a:r>
+            <a:r>
+              <a:rPr lang="en-US" dirty="0" err="1"/>
+              <a:t>em</a:t>
+            </a:r>
+            <a:r>
+              <a:rPr lang="en-US" dirty="0"/>
+              <a:t> </a:t>
+            </a:r>
+            <a:r>
+              <a:rPr lang="en-US" dirty="0" err="1"/>
+              <a:t>vez</a:t>
+            </a:r>
+            <a:r>
+              <a:rPr lang="en-US" dirty="0"/>
+              <a:t> de </a:t>
+            </a:r>
+            <a:r>
+              <a:rPr lang="en-US" dirty="0" err="1"/>
+              <a:t>listar</a:t>
+            </a:r>
+            <a:r>
+              <a:rPr lang="en-US" dirty="0"/>
+              <a:t> </a:t>
+            </a:r>
+            <a:r>
+              <a:rPr lang="en-US" dirty="0" err="1"/>
+              <a:t>os</a:t>
+            </a:r>
+            <a:r>
+              <a:rPr lang="en-US" dirty="0"/>
+              <a:t> </a:t>
+            </a:r>
+            <a:r>
+              <a:rPr lang="en-US" dirty="0" err="1"/>
+              <a:t>dois</a:t>
+            </a:r>
+            <a:r>
+              <a:rPr lang="en-US" dirty="0"/>
+              <a:t> </a:t>
+            </a:r>
+            <a:r>
+              <a:rPr lang="en-US" dirty="0" err="1"/>
+              <a:t>problemas</a:t>
+            </a:r>
+            <a:r>
+              <a:rPr lang="en-US" dirty="0"/>
+              <a:t> </a:t>
+            </a:r>
+            <a:r>
+              <a:rPr lang="en-US" dirty="0" err="1"/>
+              <a:t>separadamente</a:t>
+            </a:r>
+            <a:r>
+              <a:rPr lang="en-US" dirty="0"/>
+              <a:t> </a:t>
+            </a:r>
+            <a:r>
+              <a:rPr lang="en-US" dirty="0" err="1"/>
+              <a:t>como</a:t>
+            </a:r>
+            <a:r>
+              <a:rPr lang="en-US" dirty="0"/>
+              <a:t> o PDF </a:t>
+            </a:r>
+            <a:r>
+              <a:rPr lang="en-US" dirty="0" err="1"/>
+              <a:t>faz</a:t>
+            </a:r>
+            <a:r>
+              <a:rPr lang="en-US" dirty="0"/>
+              <a:t>, </a:t>
+            </a:r>
+            <a:r>
+              <a:rPr lang="en-US" dirty="0" err="1"/>
+              <a:t>você</a:t>
+            </a:r>
+            <a:r>
+              <a:rPr lang="en-US" dirty="0"/>
+              <a:t> </a:t>
+            </a:r>
+            <a:r>
+              <a:rPr lang="en-US" dirty="0" err="1"/>
+              <a:t>pode</a:t>
+            </a:r>
+            <a:r>
+              <a:rPr lang="en-US" dirty="0"/>
+              <a:t> </a:t>
+            </a:r>
+            <a:r>
+              <a:rPr lang="en-US" dirty="0" err="1"/>
+              <a:t>uni-los</a:t>
+            </a:r>
+            <a:r>
+              <a:rPr lang="en-US" dirty="0"/>
+              <a:t> sob </a:t>
+            </a:r>
+            <a:r>
+              <a:rPr lang="en-US" dirty="0" err="1"/>
+              <a:t>uma</a:t>
+            </a:r>
+            <a:r>
+              <a:rPr lang="en-US" dirty="0"/>
+              <a:t> </a:t>
+            </a:r>
+            <a:r>
+              <a:rPr lang="en-US" dirty="0" err="1"/>
+              <a:t>tese</a:t>
+            </a:r>
+            <a:r>
+              <a:rPr lang="en-US" dirty="0"/>
+              <a:t> </a:t>
+            </a:r>
+            <a:r>
+              <a:rPr lang="en-US" dirty="0" err="1"/>
+              <a:t>própria</a:t>
+            </a:r>
+            <a:r>
+              <a:rPr lang="en-US" dirty="0"/>
+              <a:t> — </a:t>
+            </a:r>
+            <a:r>
+              <a:rPr lang="en-US" dirty="0" err="1"/>
+              <a:t>por</a:t>
+            </a:r>
+            <a:r>
+              <a:rPr lang="en-US" dirty="0"/>
+              <a:t> </a:t>
+            </a:r>
+            <a:r>
+              <a:rPr lang="en-US" dirty="0" err="1"/>
+              <a:t>exemplo</a:t>
+            </a:r>
+            <a:r>
+              <a:rPr lang="en-US" dirty="0"/>
+              <a:t>, algo </a:t>
+            </a:r>
+            <a:r>
+              <a:rPr lang="en-US" dirty="0" err="1"/>
+              <a:t>como</a:t>
+            </a:r>
+            <a:r>
+              <a:rPr lang="en-US" dirty="0"/>
+              <a:t> "</a:t>
+            </a:r>
+            <a:r>
+              <a:rPr lang="en-US" dirty="0" err="1"/>
+              <a:t>os</a:t>
+            </a:r>
+            <a:r>
+              <a:rPr lang="en-US" dirty="0"/>
+              <a:t> </a:t>
+            </a:r>
+            <a:r>
+              <a:rPr lang="en-US" dirty="0" err="1"/>
+              <a:t>dois</a:t>
+            </a:r>
+            <a:r>
+              <a:rPr lang="en-US" dirty="0"/>
+              <a:t> </a:t>
+            </a:r>
+            <a:r>
+              <a:rPr lang="en-US" dirty="0" err="1"/>
+              <a:t>problemas</a:t>
+            </a:r>
+            <a:r>
+              <a:rPr lang="en-US" dirty="0"/>
+              <a:t> </a:t>
+            </a:r>
+            <a:r>
+              <a:rPr lang="en-US" dirty="0" err="1"/>
+              <a:t>nascem</a:t>
+            </a:r>
+            <a:r>
+              <a:rPr lang="en-US" dirty="0"/>
+              <a:t> da </a:t>
+            </a:r>
+            <a:r>
+              <a:rPr lang="en-US" dirty="0" err="1"/>
+              <a:t>mesma</a:t>
+            </a:r>
+            <a:r>
+              <a:rPr lang="en-US" dirty="0"/>
+              <a:t> causa: o </a:t>
+            </a:r>
+            <a:r>
+              <a:rPr lang="en-US" dirty="0" err="1"/>
+              <a:t>modelo</a:t>
+            </a:r>
+            <a:r>
+              <a:rPr lang="en-US" dirty="0"/>
+              <a:t> </a:t>
+            </a:r>
+            <a:r>
+              <a:rPr lang="en-US" dirty="0" err="1"/>
+              <a:t>trata</a:t>
+            </a:r>
+            <a:r>
+              <a:rPr lang="en-US" dirty="0"/>
+              <a:t> </a:t>
+            </a:r>
+            <a:r>
+              <a:rPr lang="en-US" dirty="0" err="1"/>
+              <a:t>categorias</a:t>
+            </a:r>
+            <a:r>
+              <a:rPr lang="en-US" dirty="0"/>
+              <a:t> e </a:t>
+            </a:r>
+            <a:r>
+              <a:rPr lang="en-US" dirty="0" err="1"/>
+              <a:t>canais</a:t>
+            </a:r>
+            <a:r>
+              <a:rPr lang="en-US" dirty="0"/>
+              <a:t> </a:t>
+            </a:r>
+            <a:r>
+              <a:rPr lang="en-US" dirty="0" err="1"/>
+              <a:t>como</a:t>
+            </a:r>
+            <a:r>
+              <a:rPr lang="en-US" dirty="0"/>
+              <a:t> </a:t>
+            </a:r>
+            <a:r>
+              <a:rPr lang="en-US" dirty="0" err="1"/>
+              <a:t>blocos</a:t>
+            </a:r>
+            <a:r>
+              <a:rPr lang="en-US" dirty="0"/>
+              <a:t> </a:t>
+            </a:r>
+            <a:r>
+              <a:rPr lang="en-US" dirty="0" err="1"/>
+              <a:t>homogêneos</a:t>
+            </a:r>
+            <a:r>
+              <a:rPr lang="en-US" dirty="0"/>
+              <a:t> </a:t>
+            </a:r>
+            <a:r>
+              <a:rPr lang="en-US" dirty="0" err="1"/>
+              <a:t>quando</a:t>
+            </a:r>
+            <a:r>
+              <a:rPr lang="en-US" dirty="0"/>
+              <a:t> </a:t>
+            </a:r>
+            <a:r>
+              <a:rPr lang="en-US" dirty="0" err="1"/>
+              <a:t>não</a:t>
+            </a:r>
+            <a:r>
+              <a:rPr lang="en-US" dirty="0"/>
+              <a:t> </a:t>
+            </a:r>
+            <a:r>
+              <a:rPr lang="en-US" dirty="0" err="1"/>
+              <a:t>são</a:t>
+            </a:r>
+            <a:r>
+              <a:rPr lang="en-US" dirty="0"/>
+              <a:t>." </a:t>
+            </a:r>
+            <a:r>
+              <a:rPr lang="en-US" dirty="0" err="1"/>
+              <a:t>Isso</a:t>
+            </a:r>
+            <a:r>
+              <a:rPr lang="en-US" dirty="0"/>
+              <a:t> </a:t>
+            </a:r>
+            <a:r>
+              <a:rPr lang="en-US" dirty="0" err="1"/>
+              <a:t>já</a:t>
+            </a:r>
+            <a:r>
+              <a:rPr lang="en-US" dirty="0"/>
+              <a:t> </a:t>
+            </a:r>
+            <a:r>
+              <a:rPr lang="en-US" dirty="0" err="1"/>
+              <a:t>sinaliza</a:t>
+            </a:r>
+            <a:r>
+              <a:rPr lang="en-US" dirty="0"/>
+              <a:t> </a:t>
+            </a:r>
+            <a:r>
+              <a:rPr lang="en-US" dirty="0" err="1"/>
+              <a:t>pra</a:t>
+            </a:r>
+            <a:r>
+              <a:rPr lang="en-US" dirty="0"/>
+              <a:t> </a:t>
+            </a:r>
+            <a:r>
+              <a:rPr lang="en-US" dirty="0" err="1"/>
+              <a:t>audiência</a:t>
+            </a:r>
+            <a:r>
+              <a:rPr lang="en-US" dirty="0"/>
+              <a:t>, antes de </a:t>
+            </a:r>
+            <a:r>
+              <a:rPr lang="en-US" dirty="0" err="1"/>
+              <a:t>qualquer</a:t>
+            </a:r>
+            <a:r>
+              <a:rPr lang="en-US" dirty="0"/>
+              <a:t> </a:t>
+            </a:r>
+            <a:r>
+              <a:rPr lang="en-US" dirty="0" err="1"/>
+              <a:t>detalhe</a:t>
+            </a:r>
+            <a:r>
+              <a:rPr lang="en-US" dirty="0"/>
+              <a:t> </a:t>
+            </a:r>
+            <a:r>
+              <a:rPr lang="en-US" dirty="0" err="1"/>
+              <a:t>técnico</a:t>
+            </a:r>
+            <a:r>
+              <a:rPr lang="en-US" dirty="0"/>
+              <a:t>, </a:t>
+            </a:r>
+            <a:r>
+              <a:rPr lang="en-US" dirty="0" err="1"/>
+              <a:t>que</a:t>
+            </a:r>
+            <a:r>
+              <a:rPr lang="en-US" dirty="0"/>
+              <a:t> </a:t>
+            </a:r>
+            <a:r>
+              <a:rPr lang="en-US" dirty="0" err="1"/>
+              <a:t>existe</a:t>
+            </a:r>
+            <a:r>
+              <a:rPr lang="en-US" dirty="0"/>
+              <a:t> </a:t>
+            </a:r>
+            <a:r>
+              <a:rPr lang="en-US" dirty="0" err="1"/>
+              <a:t>uma</a:t>
+            </a:r>
+            <a:r>
+              <a:rPr lang="en-US" dirty="0"/>
+              <a:t> </a:t>
+            </a:r>
+            <a:r>
+              <a:rPr lang="en-US" dirty="0" err="1"/>
+              <a:t>conexão</a:t>
+            </a:r>
+            <a:r>
+              <a:rPr lang="en-US" dirty="0"/>
+              <a:t> entre write-off/stock-out e a </a:t>
+            </a:r>
+            <a:r>
+              <a:rPr lang="en-US" dirty="0" err="1"/>
+              <a:t>decomposição</a:t>
+            </a:r>
+            <a:r>
+              <a:rPr lang="en-US" dirty="0"/>
+              <a:t> quebrada — o </a:t>
+            </a:r>
+            <a:r>
+              <a:rPr lang="en-US" dirty="0" err="1"/>
+              <a:t>que</a:t>
+            </a:r>
+            <a:r>
+              <a:rPr lang="en-US" dirty="0"/>
+              <a:t> </a:t>
+            </a:r>
+            <a:r>
+              <a:rPr lang="en-US" dirty="0" err="1"/>
+              <a:t>paga</a:t>
+            </a:r>
+            <a:r>
+              <a:rPr lang="en-US" dirty="0"/>
+              <a:t> </a:t>
+            </a:r>
+            <a:r>
+              <a:rPr lang="en-US" dirty="0" err="1"/>
+              <a:t>dividendos</a:t>
+            </a:r>
+            <a:r>
+              <a:rPr lang="en-US" dirty="0"/>
+              <a:t> </a:t>
+            </a:r>
+            <a:r>
+              <a:rPr lang="en-US" dirty="0" err="1"/>
+              <a:t>quando</a:t>
+            </a:r>
+            <a:r>
+              <a:rPr lang="en-US" dirty="0"/>
+              <a:t> </a:t>
+            </a:r>
+            <a:r>
+              <a:rPr lang="en-US" dirty="0" err="1"/>
+              <a:t>você</a:t>
+            </a:r>
+            <a:r>
+              <a:rPr lang="en-US" dirty="0"/>
+              <a:t> </a:t>
+            </a:r>
+            <a:r>
+              <a:rPr lang="en-US" dirty="0" err="1"/>
+              <a:t>chegar</a:t>
+            </a:r>
+            <a:r>
+              <a:rPr lang="en-US" dirty="0"/>
+              <a:t> </a:t>
+            </a:r>
+            <a:r>
+              <a:rPr lang="en-US" dirty="0" err="1"/>
+              <a:t>na</a:t>
+            </a:r>
+            <a:r>
+              <a:rPr lang="en-US" dirty="0"/>
+              <a:t> </a:t>
+            </a:r>
+            <a:r>
+              <a:rPr lang="en-US" dirty="0" err="1"/>
+              <a:t>Pergunta</a:t>
+            </a:r>
+            <a:r>
+              <a:rPr lang="en-US" dirty="0"/>
+              <a:t> 1 e 2.</a:t>
+            </a:r>
+          </a:p>
+          <a:p>
+            <a:r>
+              <a:rPr lang="en-US" dirty="0" err="1"/>
+              <a:t>Problema</a:t>
+            </a:r>
+            <a:r>
+              <a:rPr lang="en-US" dirty="0"/>
+              <a:t> 1 </a:t>
+            </a:r>
+            <a:r>
+              <a:rPr lang="en-US" dirty="0" err="1"/>
+              <a:t>em</a:t>
+            </a:r>
+            <a:r>
+              <a:rPr lang="en-US" dirty="0"/>
+              <a:t> </a:t>
+            </a:r>
+            <a:r>
+              <a:rPr lang="en-US" dirty="0" err="1"/>
+              <a:t>números</a:t>
+            </a:r>
+            <a:r>
+              <a:rPr lang="en-US" dirty="0"/>
+              <a:t>: write-off 8,2% (meta &lt;2%), </a:t>
+            </a:r>
+          </a:p>
+          <a:p>
+            <a:r>
+              <a:rPr lang="en-US" dirty="0"/>
+              <a:t>$1.2M </a:t>
+            </a:r>
+            <a:r>
+              <a:rPr lang="en-US" dirty="0" err="1"/>
+              <a:t>perdidos</a:t>
+            </a:r>
+            <a:r>
+              <a:rPr lang="en-US" dirty="0"/>
+              <a:t>, stock-outs </a:t>
+            </a:r>
+            <a:r>
+              <a:rPr lang="en-US" dirty="0" err="1"/>
+              <a:t>em</a:t>
+            </a:r>
+            <a:r>
+              <a:rPr lang="en-US" dirty="0"/>
+              <a:t> E-commerce </a:t>
+            </a:r>
+            <a:r>
+              <a:rPr lang="en-US" dirty="0" err="1"/>
+              <a:t>Problema</a:t>
+            </a:r>
+            <a:r>
+              <a:rPr lang="en-US" dirty="0"/>
+              <a:t> 2 </a:t>
+            </a:r>
+            <a:r>
+              <a:rPr lang="en-US" dirty="0" err="1"/>
+              <a:t>em</a:t>
+            </a:r>
+            <a:r>
+              <a:rPr lang="en-US" dirty="0"/>
+              <a:t> </a:t>
+            </a:r>
+            <a:r>
+              <a:rPr lang="en-US" dirty="0" err="1"/>
+              <a:t>números</a:t>
+            </a:r>
+            <a:r>
+              <a:rPr lang="en-US" dirty="0"/>
+              <a:t>: </a:t>
+            </a:r>
+            <a:r>
+              <a:rPr lang="en-US" dirty="0" err="1"/>
+              <a:t>preço</a:t>
+            </a:r>
+            <a:r>
+              <a:rPr lang="en-US" dirty="0"/>
+              <a:t> com </a:t>
+            </a:r>
+            <a:r>
+              <a:rPr lang="en-US" dirty="0" err="1"/>
+              <a:t>sinal</a:t>
+            </a:r>
+            <a:r>
+              <a:rPr lang="en-US" dirty="0"/>
+              <a:t> </a:t>
+            </a:r>
+            <a:r>
+              <a:rPr lang="en-US" dirty="0" err="1"/>
+              <a:t>errado</a:t>
+            </a:r>
+            <a:r>
+              <a:rPr lang="en-US" dirty="0"/>
+              <a:t>, </a:t>
+            </a:r>
+            <a:r>
+              <a:rPr lang="en-US" dirty="0" err="1"/>
+              <a:t>promoção</a:t>
+            </a:r>
+            <a:r>
+              <a:rPr lang="en-US" dirty="0"/>
+              <a:t> </a:t>
+            </a:r>
+            <a:r>
+              <a:rPr lang="en-US" dirty="0" err="1"/>
+              <a:t>capturando</a:t>
+            </a:r>
+            <a:r>
+              <a:rPr lang="en-US" dirty="0"/>
+              <a:t> 40% </a:t>
+            </a:r>
+            <a:r>
+              <a:rPr lang="en-US" dirty="0" err="1"/>
+              <a:t>quando</a:t>
+            </a:r>
+            <a:r>
+              <a:rPr lang="en-US" dirty="0"/>
+              <a:t> </a:t>
+            </a:r>
+            <a:r>
+              <a:rPr lang="en-US" dirty="0" err="1"/>
+              <a:t>deveria</a:t>
+            </a:r>
+            <a:r>
+              <a:rPr lang="en-US" dirty="0"/>
+              <a:t> ser </a:t>
+            </a:r>
+            <a:r>
+              <a:rPr lang="en-US" dirty="0" err="1"/>
+              <a:t>Publicidade</a:t>
+            </a:r>
+            <a:r>
+              <a:rPr lang="en-US" dirty="0"/>
+              <a:t> A </a:t>
+            </a:r>
+            <a:r>
+              <a:rPr lang="en-US" dirty="0" err="1"/>
+              <a:t>frase</a:t>
+            </a:r>
+            <a:r>
+              <a:rPr lang="en-US" dirty="0"/>
+              <a:t> de </a:t>
+            </a:r>
+            <a:r>
+              <a:rPr lang="en-US" dirty="0" err="1"/>
+              <a:t>conexão</a:t>
+            </a:r>
+            <a:r>
+              <a:rPr lang="en-US" dirty="0"/>
+              <a:t>/</a:t>
+            </a:r>
+            <a:r>
+              <a:rPr lang="en-US" dirty="0" err="1"/>
+              <a:t>tese</a:t>
+            </a:r>
+            <a:r>
+              <a:rPr lang="en-US" dirty="0"/>
+              <a:t> </a:t>
+            </a:r>
+            <a:r>
+              <a:rPr lang="en-US" dirty="0" err="1"/>
+              <a:t>acima</a:t>
+            </a:r>
+            <a:endParaRPr lang="en-US" dirty="0"/>
+          </a:p>
+        </p:txBody>
+      </p:sp>
+    </p:spTree>
+    <p:extLst>
+      <p:ext uri="{BB962C8B-B14F-4D97-AF65-F5344CB8AC3E}">
+        <p14:creationId xmlns:p14="http://schemas.microsoft.com/office/powerpoint/2010/main" val="4235137022"/>
+      </p:ext>
+    </p:extLst>
+  </p:cSld>
+  <p:clrMapOvr>
+    <a:masterClrMapping/>
+  </p:clrMapOvr>
+</p:sld>
+</file>
+
+<file path=ppt/slides/slide5.xml><?xml version="1.0" encoding="utf-8"?>
+<p:sld xmlns:a="http://schemas.openxmlformats.org/drawingml/2006/main" xmlns:r="http://schemas.openxmlformats.org/officeDocument/2006/relationships" xmlns:p="http://schemas.openxmlformats.org/presentationml/2006/main">
+  <p:cSld>
+    <p:spTree>
+      <p:nvGrpSpPr>
+        <p:cNvPr id="1" name=""/>
+        <p:cNvGrpSpPr/>
+        <p:nvPr/>
+      </p:nvGrpSpPr>
+      <p:grpSpPr>
+        <a:xfrm>
+          <a:off x="0" y="0"/>
+          <a:ext cx="0" cy="0"/>
+          <a:chOff x="0" y="0"/>
+          <a:chExt cx="0" cy="0"/>
+        </a:xfrm>
+      </p:grpSpPr>
+      <p:sp>
+        <p:nvSpPr>
+          <p:cNvPr id="2" name="Título 1">
+            <a:extLst>
+              <a:ext uri="{FF2B5EF4-FFF2-40B4-BE49-F238E27FC236}">
+                <a16:creationId xmlns:a16="http://schemas.microsoft.com/office/drawing/2014/main" id="{6A296D4F-4178-624A-7E69-642A5423316D}"/>
+              </a:ext>
+            </a:extLst>
+          </p:cNvPr>
+          <p:cNvSpPr>
+            <a:spLocks noGrp="1"/>
+          </p:cNvSpPr>
+          <p:nvPr>
+            <p:ph type="title"/>
+          </p:nvPr>
+        </p:nvSpPr>
+        <p:spPr/>
+        <p:txBody>
+          <a:bodyPr/>
+          <a:lstStyle/>
+          <a:p>
+            <a:r>
+              <a:rPr lang="pt-BR" dirty="0" err="1"/>
+              <a:t>Executive</a:t>
+            </a:r>
+            <a:r>
+              <a:rPr lang="pt-BR" dirty="0"/>
+              <a:t> </a:t>
+            </a:r>
+            <a:r>
+              <a:rPr lang="pt-BR" dirty="0" err="1"/>
+              <a:t>Summary</a:t>
+            </a:r>
+            <a:endParaRPr lang="en-US" dirty="0"/>
+          </a:p>
+        </p:txBody>
+      </p:sp>
+      <p:sp>
+        <p:nvSpPr>
+          <p:cNvPr id="3" name="Espaço Reservado para Conteúdo 2">
+            <a:extLst>
+              <a:ext uri="{FF2B5EF4-FFF2-40B4-BE49-F238E27FC236}">
+                <a16:creationId xmlns:a16="http://schemas.microsoft.com/office/drawing/2014/main" id="{0EFF451B-3BAA-3C59-D4CA-4B76EA3EA1F4}"/>
+              </a:ext>
+            </a:extLst>
+          </p:cNvPr>
+          <p:cNvSpPr>
+            <a:spLocks noGrp="1"/>
+          </p:cNvSpPr>
+          <p:nvPr>
+            <p:ph idx="1"/>
+          </p:nvPr>
+        </p:nvSpPr>
+        <p:spPr/>
+        <p:txBody>
+          <a:bodyPr/>
+          <a:lstStyle/>
+          <a:p>
+            <a:r>
+              <a:rPr lang="en-US" b="1" dirty="0"/>
+              <a:t>Por </a:t>
+            </a:r>
+            <a:r>
+              <a:rPr lang="en-US" b="1" dirty="0" err="1"/>
+              <a:t>que</a:t>
+            </a:r>
+            <a:r>
+              <a:rPr lang="en-US" b="1" dirty="0"/>
+              <a:t> </a:t>
+            </a:r>
+            <a:r>
+              <a:rPr lang="en-US" b="1" dirty="0" err="1"/>
+              <a:t>isso</a:t>
+            </a:r>
+            <a:r>
+              <a:rPr lang="en-US" b="1" dirty="0"/>
+              <a:t> </a:t>
+            </a:r>
+            <a:r>
+              <a:rPr lang="en-US" b="1" dirty="0" err="1"/>
+              <a:t>importa</a:t>
+            </a:r>
+            <a:r>
+              <a:rPr lang="en-US" b="1" dirty="0"/>
+              <a:t> agora / o </a:t>
+            </a:r>
+            <a:r>
+              <a:rPr lang="en-US" b="1" dirty="0" err="1"/>
+              <a:t>que</a:t>
+            </a:r>
+            <a:r>
+              <a:rPr lang="en-US" b="1" dirty="0"/>
+              <a:t> </a:t>
+            </a:r>
+            <a:r>
+              <a:rPr lang="en-US" b="1" dirty="0" err="1"/>
+              <a:t>está</a:t>
+            </a:r>
+            <a:r>
+              <a:rPr lang="en-US" b="1" dirty="0"/>
+              <a:t> </a:t>
+            </a:r>
+            <a:r>
+              <a:rPr lang="en-US" b="1" dirty="0" err="1"/>
+              <a:t>em</a:t>
+            </a:r>
+            <a:r>
+              <a:rPr lang="en-US" b="1" dirty="0"/>
+              <a:t> </a:t>
+            </a:r>
+            <a:r>
+              <a:rPr lang="en-US" b="1" dirty="0" err="1"/>
+              <a:t>jogo</a:t>
+            </a:r>
+            <a:br>
+              <a:rPr lang="en-US" dirty="0"/>
+            </a:br>
+            <a:r>
+              <a:rPr lang="en-US" dirty="0" err="1"/>
+              <a:t>Fecha</a:t>
+            </a:r>
+            <a:r>
+              <a:rPr lang="en-US" dirty="0"/>
+              <a:t> a </a:t>
+            </a:r>
+            <a:r>
+              <a:rPr lang="en-US" dirty="0" err="1"/>
+              <a:t>seção</a:t>
+            </a:r>
+            <a:r>
+              <a:rPr lang="en-US" dirty="0"/>
+              <a:t> </a:t>
+            </a:r>
+            <a:r>
+              <a:rPr lang="en-US" dirty="0" err="1"/>
+              <a:t>conectando</a:t>
+            </a:r>
+            <a:r>
+              <a:rPr lang="en-US" dirty="0"/>
+              <a:t> com </a:t>
+            </a:r>
+            <a:r>
+              <a:rPr lang="en-US" dirty="0" err="1"/>
+              <a:t>decisões</a:t>
+            </a:r>
+            <a:r>
+              <a:rPr lang="en-US" dirty="0"/>
+              <a:t> de </a:t>
+            </a:r>
+            <a:r>
+              <a:rPr lang="en-US" dirty="0" err="1"/>
+              <a:t>negócio</a:t>
+            </a:r>
+            <a:r>
+              <a:rPr lang="en-US" dirty="0"/>
+              <a:t> </a:t>
+            </a:r>
+            <a:r>
+              <a:rPr lang="en-US" dirty="0" err="1"/>
+              <a:t>já</a:t>
+            </a:r>
+            <a:r>
+              <a:rPr lang="en-US" dirty="0"/>
+              <a:t> </a:t>
+            </a:r>
+            <a:r>
+              <a:rPr lang="en-US" dirty="0" err="1"/>
+              <a:t>tomadas</a:t>
+            </a:r>
+            <a:r>
+              <a:rPr lang="en-US" dirty="0"/>
+              <a:t> com base no </a:t>
+            </a:r>
+            <a:r>
+              <a:rPr lang="en-US" dirty="0" err="1"/>
+              <a:t>modelo</a:t>
+            </a:r>
+            <a:r>
+              <a:rPr lang="en-US" dirty="0"/>
+              <a:t> </a:t>
+            </a:r>
+            <a:r>
+              <a:rPr lang="en-US" dirty="0" err="1"/>
+              <a:t>quebrado</a:t>
+            </a:r>
+            <a:r>
+              <a:rPr lang="en-US" dirty="0"/>
+              <a:t> — </a:t>
+            </a:r>
+            <a:r>
+              <a:rPr lang="en-US" dirty="0" err="1"/>
+              <a:t>os</a:t>
+            </a:r>
+            <a:r>
+              <a:rPr lang="en-US" dirty="0"/>
+              <a:t> </a:t>
+            </a:r>
+            <a:r>
+              <a:rPr lang="en-US" dirty="0" err="1"/>
+              <a:t>dois</a:t>
+            </a:r>
+            <a:r>
+              <a:rPr lang="en-US" dirty="0"/>
+              <a:t> </a:t>
+            </a:r>
+            <a:r>
+              <a:rPr lang="en-US" dirty="0" err="1"/>
+              <a:t>exemplos</a:t>
+            </a:r>
+            <a:r>
+              <a:rPr lang="en-US" dirty="0"/>
+              <a:t> </a:t>
+            </a:r>
+            <a:r>
+              <a:rPr lang="en-US" dirty="0" err="1"/>
+              <a:t>que</a:t>
+            </a:r>
+            <a:r>
+              <a:rPr lang="en-US" dirty="0"/>
+              <a:t> o case </a:t>
+            </a:r>
+            <a:r>
+              <a:rPr lang="en-US" dirty="0" err="1"/>
+              <a:t>já</a:t>
+            </a:r>
+            <a:r>
+              <a:rPr lang="en-US" dirty="0"/>
+              <a:t> </a:t>
+            </a:r>
+            <a:r>
+              <a:rPr lang="en-US" dirty="0" err="1"/>
+              <a:t>dá</a:t>
+            </a:r>
+            <a:r>
+              <a:rPr lang="en-US" dirty="0"/>
+              <a:t> </a:t>
+            </a:r>
+            <a:r>
+              <a:rPr lang="en-US" dirty="0" err="1"/>
+              <a:t>são</a:t>
+            </a:r>
+            <a:r>
+              <a:rPr lang="en-US" dirty="0"/>
+              <a:t> </a:t>
+            </a:r>
+            <a:r>
+              <a:rPr lang="en-US" dirty="0" err="1"/>
+              <a:t>ótimos</a:t>
+            </a:r>
+            <a:r>
+              <a:rPr lang="en-US" dirty="0"/>
+              <a:t> </a:t>
+            </a:r>
+            <a:r>
+              <a:rPr lang="en-US" dirty="0" err="1"/>
+              <a:t>aqui</a:t>
+            </a:r>
+            <a:r>
+              <a:rPr lang="en-US" dirty="0"/>
+              <a:t>: o </a:t>
+            </a:r>
+            <a:r>
+              <a:rPr lang="en-US" dirty="0" err="1"/>
+              <a:t>aumento</a:t>
+            </a:r>
+            <a:r>
+              <a:rPr lang="en-US" dirty="0"/>
+              <a:t> de 35% </a:t>
+            </a:r>
+            <a:r>
+              <a:rPr lang="en-US" dirty="0" err="1"/>
+              <a:t>em</a:t>
+            </a:r>
+            <a:r>
+              <a:rPr lang="en-US" dirty="0"/>
+              <a:t> </a:t>
+            </a:r>
+            <a:r>
+              <a:rPr lang="en-US" dirty="0" err="1"/>
+              <a:t>investimento</a:t>
+            </a:r>
+            <a:r>
+              <a:rPr lang="en-US" dirty="0"/>
+              <a:t> de </a:t>
+            </a:r>
+            <a:r>
+              <a:rPr lang="en-US" dirty="0" err="1"/>
+              <a:t>Publicidade</a:t>
+            </a:r>
+            <a:r>
+              <a:rPr lang="en-US" dirty="0"/>
+              <a:t>/</a:t>
+            </a:r>
+            <a:r>
+              <a:rPr lang="en-US" dirty="0" err="1"/>
+              <a:t>Promoção</a:t>
+            </a:r>
+            <a:r>
+              <a:rPr lang="en-US" dirty="0"/>
+              <a:t> </a:t>
+            </a:r>
+            <a:r>
+              <a:rPr lang="en-US" dirty="0" err="1"/>
+              <a:t>em</a:t>
+            </a:r>
+            <a:r>
+              <a:rPr lang="en-US" dirty="0"/>
+              <a:t> E-commerce </a:t>
+            </a:r>
+            <a:r>
+              <a:rPr lang="en-US" dirty="0" err="1"/>
+              <a:t>sem</a:t>
+            </a:r>
+            <a:r>
+              <a:rPr lang="en-US" dirty="0"/>
+              <a:t> </a:t>
+            </a:r>
+            <a:r>
+              <a:rPr lang="en-US" dirty="0" err="1"/>
+              <a:t>retorno</a:t>
+            </a:r>
+            <a:r>
+              <a:rPr lang="en-US" dirty="0"/>
+              <a:t> incremental, e a </a:t>
+            </a:r>
+            <a:r>
+              <a:rPr lang="en-US" dirty="0" err="1"/>
+              <a:t>redução</a:t>
+            </a:r>
+            <a:r>
+              <a:rPr lang="en-US" dirty="0"/>
+              <a:t> de </a:t>
+            </a:r>
+            <a:r>
+              <a:rPr lang="en-US" dirty="0" err="1"/>
+              <a:t>preço</a:t>
+            </a:r>
+            <a:r>
+              <a:rPr lang="en-US" dirty="0"/>
+              <a:t> do Natural Juice </a:t>
+            </a:r>
+            <a:r>
+              <a:rPr lang="en-US" dirty="0" err="1"/>
+              <a:t>que</a:t>
+            </a:r>
+            <a:r>
+              <a:rPr lang="en-US" dirty="0"/>
+              <a:t> "</a:t>
+            </a:r>
+            <a:r>
+              <a:rPr lang="en-US" dirty="0" err="1"/>
+              <a:t>não</a:t>
+            </a:r>
+            <a:r>
+              <a:rPr lang="en-US" dirty="0"/>
+              <a:t> fez nada". </a:t>
+            </a:r>
+            <a:r>
+              <a:rPr lang="en-US" dirty="0" err="1"/>
+              <a:t>Isso</a:t>
+            </a:r>
+            <a:r>
+              <a:rPr lang="en-US" dirty="0"/>
+              <a:t> é forte </a:t>
+            </a:r>
+            <a:r>
+              <a:rPr lang="en-US" dirty="0" err="1"/>
+              <a:t>porque</a:t>
+            </a:r>
+            <a:r>
+              <a:rPr lang="en-US" dirty="0"/>
+              <a:t> </a:t>
+            </a:r>
+            <a:r>
+              <a:rPr lang="en-US" dirty="0" err="1"/>
+              <a:t>mostra</a:t>
+            </a:r>
+            <a:r>
+              <a:rPr lang="en-US" dirty="0"/>
+              <a:t> </a:t>
+            </a:r>
+            <a:r>
+              <a:rPr lang="en-US" dirty="0" err="1"/>
+              <a:t>dinheiro</a:t>
+            </a:r>
+            <a:r>
+              <a:rPr lang="en-US" dirty="0"/>
+              <a:t> real </a:t>
+            </a:r>
+            <a:r>
+              <a:rPr lang="en-US" dirty="0" err="1"/>
+              <a:t>sendo</a:t>
+            </a:r>
+            <a:r>
+              <a:rPr lang="en-US" dirty="0"/>
+              <a:t> mal </a:t>
+            </a:r>
+            <a:r>
+              <a:rPr lang="en-US" dirty="0" err="1"/>
+              <a:t>alocado</a:t>
+            </a:r>
+            <a:r>
+              <a:rPr lang="en-US" dirty="0"/>
+              <a:t> </a:t>
+            </a:r>
+            <a:r>
+              <a:rPr lang="en-US" dirty="0" err="1"/>
+              <a:t>por</a:t>
+            </a:r>
+            <a:r>
+              <a:rPr lang="en-US" dirty="0"/>
+              <a:t> causa do </a:t>
+            </a:r>
+            <a:r>
+              <a:rPr lang="en-US" dirty="0" err="1"/>
+              <a:t>modelo</a:t>
+            </a:r>
+            <a:r>
+              <a:rPr lang="en-US" dirty="0"/>
+              <a:t> — </a:t>
+            </a:r>
+            <a:r>
+              <a:rPr lang="en-US" dirty="0" err="1"/>
+              <a:t>não</a:t>
+            </a:r>
+            <a:r>
+              <a:rPr lang="en-US" dirty="0"/>
+              <a:t> é </a:t>
+            </a:r>
+            <a:r>
+              <a:rPr lang="en-US" dirty="0" err="1"/>
+              <a:t>só</a:t>
+            </a:r>
+            <a:r>
+              <a:rPr lang="en-US" dirty="0"/>
+              <a:t> um </a:t>
+            </a:r>
+            <a:r>
+              <a:rPr lang="en-US" dirty="0" err="1"/>
+              <a:t>problema</a:t>
+            </a:r>
+            <a:r>
+              <a:rPr lang="en-US" dirty="0"/>
+              <a:t> </a:t>
+            </a:r>
+            <a:r>
+              <a:rPr lang="en-US" dirty="0" err="1"/>
+              <a:t>técnico</a:t>
+            </a:r>
+            <a:r>
+              <a:rPr lang="en-US" dirty="0"/>
+              <a:t> </a:t>
+            </a:r>
+            <a:r>
+              <a:rPr lang="en-US" dirty="0" err="1"/>
+              <a:t>abstrato</a:t>
+            </a:r>
+            <a:r>
+              <a:rPr lang="en-US" dirty="0"/>
+              <a:t>, é um </a:t>
+            </a:r>
+            <a:r>
+              <a:rPr lang="en-US" dirty="0" err="1"/>
+              <a:t>problema</a:t>
+            </a:r>
+            <a:r>
+              <a:rPr lang="en-US" dirty="0"/>
+              <a:t> com </a:t>
+            </a:r>
+            <a:r>
+              <a:rPr lang="en-US" dirty="0" err="1"/>
+              <a:t>custo</a:t>
+            </a:r>
+            <a:r>
+              <a:rPr lang="en-US" dirty="0"/>
+              <a:t> de </a:t>
+            </a:r>
+            <a:r>
+              <a:rPr lang="en-US" dirty="0" err="1"/>
+              <a:t>decisão</a:t>
+            </a:r>
+            <a:r>
+              <a:rPr lang="en-US" dirty="0"/>
+              <a:t>. </a:t>
+            </a:r>
+            <a:r>
+              <a:rPr lang="en-US" dirty="0" err="1"/>
+              <a:t>Encerre</a:t>
+            </a:r>
+            <a:r>
+              <a:rPr lang="en-US" dirty="0"/>
+              <a:t> com </a:t>
+            </a:r>
+            <a:r>
+              <a:rPr lang="en-US" dirty="0" err="1"/>
+              <a:t>uma</a:t>
+            </a:r>
+            <a:r>
+              <a:rPr lang="en-US" dirty="0"/>
+              <a:t> </a:t>
+            </a:r>
+            <a:r>
+              <a:rPr lang="en-US" dirty="0" err="1"/>
+              <a:t>frase-ponte</a:t>
+            </a:r>
+            <a:r>
+              <a:rPr lang="en-US" dirty="0"/>
+              <a:t> </a:t>
+            </a:r>
+            <a:r>
+              <a:rPr lang="en-US" dirty="0" err="1"/>
+              <a:t>tipo</a:t>
+            </a:r>
+            <a:r>
+              <a:rPr lang="en-US" dirty="0"/>
+              <a:t> "</a:t>
+            </a:r>
+            <a:r>
+              <a:rPr lang="en-US" dirty="0" err="1"/>
+              <a:t>então</a:t>
+            </a:r>
+            <a:r>
+              <a:rPr lang="en-US" dirty="0"/>
+              <a:t> a </a:t>
+            </a:r>
+            <a:r>
+              <a:rPr lang="en-US" dirty="0" err="1"/>
+              <a:t>pergunta</a:t>
+            </a:r>
+            <a:r>
+              <a:rPr lang="en-US" dirty="0"/>
+              <a:t> </a:t>
+            </a:r>
+            <a:r>
+              <a:rPr lang="en-US" dirty="0" err="1"/>
+              <a:t>não</a:t>
+            </a:r>
+            <a:r>
+              <a:rPr lang="en-US" dirty="0"/>
+              <a:t> é </a:t>
+            </a:r>
+            <a:r>
+              <a:rPr lang="en-US" dirty="0" err="1"/>
+              <a:t>só</a:t>
+            </a:r>
+            <a:r>
+              <a:rPr lang="en-US" dirty="0"/>
+              <a:t> 'o </a:t>
+            </a:r>
+            <a:r>
+              <a:rPr lang="en-US" dirty="0" err="1"/>
+              <a:t>modelo</a:t>
+            </a:r>
+            <a:r>
+              <a:rPr lang="en-US" dirty="0"/>
+              <a:t> </a:t>
+            </a:r>
+            <a:r>
+              <a:rPr lang="en-US" dirty="0" err="1"/>
+              <a:t>está</a:t>
+            </a:r>
+            <a:r>
+              <a:rPr lang="en-US" dirty="0"/>
+              <a:t> </a:t>
+            </a:r>
+            <a:r>
+              <a:rPr lang="en-US" dirty="0" err="1"/>
+              <a:t>certo</a:t>
+            </a:r>
+            <a:r>
+              <a:rPr lang="en-US" dirty="0"/>
+              <a:t>', é '</a:t>
+            </a:r>
+            <a:r>
+              <a:rPr lang="en-US" dirty="0" err="1"/>
+              <a:t>quanto</a:t>
+            </a:r>
+            <a:r>
+              <a:rPr lang="en-US" dirty="0"/>
+              <a:t> </a:t>
+            </a:r>
+            <a:r>
+              <a:rPr lang="en-US" dirty="0" err="1"/>
+              <a:t>dinheiro</a:t>
+            </a:r>
+            <a:r>
+              <a:rPr lang="en-US" dirty="0"/>
+              <a:t> </a:t>
+            </a:r>
+            <a:r>
+              <a:rPr lang="en-US" dirty="0" err="1"/>
+              <a:t>estamos</a:t>
+            </a:r>
+            <a:r>
+              <a:rPr lang="en-US" dirty="0"/>
+              <a:t> </a:t>
+            </a:r>
+            <a:r>
+              <a:rPr lang="en-US" dirty="0" err="1"/>
+              <a:t>perdendo</a:t>
+            </a:r>
+            <a:r>
+              <a:rPr lang="en-US" dirty="0"/>
+              <a:t> </a:t>
+            </a:r>
+            <a:r>
+              <a:rPr lang="en-US" dirty="0" err="1"/>
+              <a:t>por</a:t>
+            </a:r>
+            <a:r>
+              <a:rPr lang="en-US" dirty="0"/>
+              <a:t> </a:t>
+            </a:r>
+            <a:r>
+              <a:rPr lang="en-US" dirty="0" err="1"/>
+              <a:t>confiar</a:t>
+            </a:r>
+            <a:r>
+              <a:rPr lang="en-US" dirty="0"/>
+              <a:t> </a:t>
+            </a:r>
+            <a:r>
+              <a:rPr lang="en-US" dirty="0" err="1"/>
+              <a:t>nele</a:t>
+            </a:r>
+            <a:r>
+              <a:rPr lang="en-US" dirty="0"/>
+              <a:t>' — e é </a:t>
+            </a:r>
+            <a:r>
+              <a:rPr lang="en-US" dirty="0" err="1"/>
+              <a:t>isso</a:t>
+            </a:r>
+            <a:r>
+              <a:rPr lang="en-US" dirty="0"/>
+              <a:t> </a:t>
+            </a:r>
+            <a:r>
+              <a:rPr lang="en-US" dirty="0" err="1"/>
+              <a:t>que</a:t>
+            </a:r>
+            <a:r>
+              <a:rPr lang="en-US" dirty="0"/>
+              <a:t> </a:t>
+            </a:r>
+            <a:r>
+              <a:rPr lang="en-US" dirty="0" err="1"/>
+              <a:t>vamos</a:t>
+            </a:r>
+            <a:r>
+              <a:rPr lang="en-US" dirty="0"/>
+              <a:t> </a:t>
+            </a:r>
+            <a:r>
+              <a:rPr lang="en-US" dirty="0" err="1"/>
+              <a:t>diagnosticar</a:t>
+            </a:r>
+            <a:r>
+              <a:rPr lang="en-US" dirty="0"/>
+              <a:t> agora."</a:t>
+            </a:r>
+          </a:p>
+        </p:txBody>
+      </p:sp>
+    </p:spTree>
+    <p:extLst>
+      <p:ext uri="{BB962C8B-B14F-4D97-AF65-F5344CB8AC3E}">
+        <p14:creationId xmlns:p14="http://schemas.microsoft.com/office/powerpoint/2010/main" val="696547332"/>
+      </p:ext>
+    </p:extLst>
+  </p:cSld>
+  <p:clrMapOvr>
+    <a:masterClrMapping/>
+  </p:clrMapOvr>
+</p:sld>
+</file>
+
+<file path=ppt/slides/slide6.xml><?xml version="1.0" encoding="utf-8"?>
+<p:sld xmlns:a="http://schemas.openxmlformats.org/drawingml/2006/main" xmlns:r="http://schemas.openxmlformats.org/officeDocument/2006/relationships" xmlns:p="http://schemas.openxmlformats.org/presentationml/2006/main">
+  <p:cSld>
+    <p:spTree>
+      <p:nvGrpSpPr>
+        <p:cNvPr id="1" name=""/>
+        <p:cNvGrpSpPr/>
+        <p:nvPr/>
+      </p:nvGrpSpPr>
+      <p:grpSpPr>
+        <a:xfrm>
+          <a:off x="0" y="0"/>
+          <a:ext cx="0" cy="0"/>
+          <a:chOff x="0" y="0"/>
+          <a:chExt cx="0" cy="0"/>
+        </a:xfrm>
+      </p:grpSpPr>
+      <p:sp>
+        <p:nvSpPr>
+          <p:cNvPr id="2" name="Título 1">
+            <a:extLst>
+              <a:ext uri="{FF2B5EF4-FFF2-40B4-BE49-F238E27FC236}">
+                <a16:creationId xmlns:a16="http://schemas.microsoft.com/office/drawing/2014/main" id="{3F8AF1E1-9EC3-71EA-D4EB-070C087E1465}"/>
+              </a:ext>
+            </a:extLst>
+          </p:cNvPr>
+          <p:cNvSpPr>
+            <a:spLocks noGrp="1"/>
+          </p:cNvSpPr>
+          <p:nvPr>
+            <p:ph type="title"/>
+          </p:nvPr>
+        </p:nvSpPr>
+        <p:spPr/>
+        <p:txBody>
+          <a:bodyPr/>
+          <a:lstStyle/>
+          <a:p>
+            <a:r>
+              <a:rPr lang="pt-BR" dirty="0" err="1"/>
+              <a:t>Question</a:t>
+            </a:r>
+            <a:r>
+              <a:rPr lang="pt-BR" dirty="0"/>
+              <a:t> 1 - </a:t>
+            </a:r>
+            <a:r>
+              <a:rPr lang="en-US" dirty="0"/>
+              <a:t>What is the current status of the forecasting and decomposition system? </a:t>
+            </a:r>
+          </a:p>
+        </p:txBody>
+      </p:sp>
+      <p:sp>
+        <p:nvSpPr>
+          <p:cNvPr id="3" name="Espaço Reservado para Conteúdo 2">
+            <a:extLst>
+              <a:ext uri="{FF2B5EF4-FFF2-40B4-BE49-F238E27FC236}">
+                <a16:creationId xmlns:a16="http://schemas.microsoft.com/office/drawing/2014/main" id="{B0B3F3DE-1664-6447-99BC-B9716C6420A9}"/>
+              </a:ext>
+            </a:extLst>
+          </p:cNvPr>
+          <p:cNvSpPr>
+            <a:spLocks noGrp="1"/>
+          </p:cNvSpPr>
+          <p:nvPr>
+            <p:ph idx="1"/>
+          </p:nvPr>
+        </p:nvSpPr>
+        <p:spPr/>
+        <p:txBody>
+          <a:bodyPr/>
+          <a:lstStyle/>
+          <a:p>
+            <a:r>
+              <a:rPr lang="en-US" b="1" dirty="0"/>
+              <a:t>O </a:t>
+            </a:r>
+            <a:r>
+              <a:rPr lang="en-US" b="1" dirty="0" err="1"/>
+              <a:t>problema</a:t>
+            </a:r>
+            <a:r>
+              <a:rPr lang="en-US" b="1" dirty="0"/>
+              <a:t> </a:t>
+            </a:r>
+            <a:r>
+              <a:rPr lang="en-US" b="1" dirty="0" err="1"/>
+              <a:t>em</a:t>
+            </a:r>
+            <a:r>
+              <a:rPr lang="en-US" b="1" dirty="0"/>
+              <a:t> </a:t>
+            </a:r>
+            <a:r>
+              <a:rPr lang="en-US" b="1" dirty="0" err="1"/>
+              <a:t>números</a:t>
+            </a:r>
+            <a:br>
+              <a:rPr lang="en-US" dirty="0"/>
+            </a:br>
+            <a:r>
+              <a:rPr lang="en-US" dirty="0" err="1"/>
+              <a:t>Recontextualiza</a:t>
+            </a:r>
+            <a:r>
+              <a:rPr lang="en-US" dirty="0"/>
+              <a:t> </a:t>
+            </a:r>
+            <a:r>
+              <a:rPr lang="en-US" dirty="0" err="1"/>
+              <a:t>os</a:t>
+            </a:r>
+            <a:r>
+              <a:rPr lang="en-US" dirty="0"/>
+              <a:t> </a:t>
+            </a:r>
+            <a:r>
+              <a:rPr lang="en-US" dirty="0" err="1"/>
+              <a:t>dois</a:t>
+            </a:r>
+            <a:r>
+              <a:rPr lang="en-US" dirty="0"/>
+              <a:t> </a:t>
+            </a:r>
+            <a:r>
+              <a:rPr lang="en-US" dirty="0" err="1"/>
+              <a:t>problemas</a:t>
+            </a:r>
+            <a:r>
+              <a:rPr lang="en-US" dirty="0"/>
+              <a:t> do case (write-off 8,2%, $1.2M </a:t>
+            </a:r>
+            <a:r>
+              <a:rPr lang="en-US" dirty="0" err="1"/>
+              <a:t>perdidos</a:t>
+            </a:r>
+            <a:r>
+              <a:rPr lang="en-US" dirty="0"/>
+              <a:t>, stock-outs; </a:t>
+            </a:r>
+            <a:r>
+              <a:rPr lang="en-US" dirty="0" err="1"/>
+              <a:t>decomposição</a:t>
+            </a:r>
+            <a:r>
+              <a:rPr lang="en-US" dirty="0"/>
+              <a:t> com </a:t>
+            </a:r>
+            <a:r>
+              <a:rPr lang="en-US" dirty="0" err="1"/>
+              <a:t>sinais</a:t>
+            </a:r>
+            <a:r>
+              <a:rPr lang="en-US" dirty="0"/>
+              <a:t> </a:t>
+            </a:r>
+            <a:r>
+              <a:rPr lang="en-US" dirty="0" err="1"/>
+              <a:t>econômicos</a:t>
+            </a:r>
+            <a:r>
+              <a:rPr lang="en-US" dirty="0"/>
+              <a:t> </a:t>
+            </a:r>
+            <a:r>
+              <a:rPr lang="en-US" dirty="0" err="1"/>
+              <a:t>errados</a:t>
+            </a:r>
+            <a:r>
+              <a:rPr lang="en-US" dirty="0"/>
+              <a:t>) — </a:t>
+            </a:r>
+            <a:r>
+              <a:rPr lang="en-US" dirty="0" err="1"/>
+              <a:t>isso</a:t>
+            </a:r>
+            <a:r>
+              <a:rPr lang="en-US" dirty="0"/>
+              <a:t> </a:t>
+            </a:r>
+            <a:r>
+              <a:rPr lang="en-US" dirty="0" err="1"/>
+              <a:t>substitui</a:t>
+            </a:r>
+            <a:r>
+              <a:rPr lang="en-US" dirty="0"/>
+              <a:t> o "executive summary" </a:t>
+            </a:r>
+            <a:r>
+              <a:rPr lang="en-US" dirty="0" err="1"/>
+              <a:t>que</a:t>
+            </a:r>
+            <a:r>
+              <a:rPr lang="en-US" dirty="0"/>
+              <a:t> </a:t>
+            </a:r>
+            <a:r>
+              <a:rPr lang="en-US" dirty="0" err="1"/>
+              <a:t>estamos</a:t>
+            </a:r>
+            <a:r>
+              <a:rPr lang="en-US" dirty="0"/>
+              <a:t> </a:t>
+            </a:r>
+            <a:r>
+              <a:rPr lang="en-US" dirty="0" err="1"/>
+              <a:t>pulando</a:t>
+            </a:r>
+            <a:r>
+              <a:rPr lang="en-US" dirty="0"/>
+              <a:t>, </a:t>
+            </a:r>
+            <a:r>
+              <a:rPr lang="en-US" dirty="0" err="1"/>
+              <a:t>dando</a:t>
+            </a:r>
+            <a:r>
+              <a:rPr lang="en-US" dirty="0"/>
+              <a:t> o </a:t>
+            </a:r>
+            <a:r>
+              <a:rPr lang="en-US" dirty="0" err="1"/>
+              <a:t>pano</a:t>
+            </a:r>
+            <a:r>
+              <a:rPr lang="en-US" dirty="0"/>
+              <a:t> de </a:t>
+            </a:r>
+            <a:r>
+              <a:rPr lang="en-US" dirty="0" err="1"/>
+              <a:t>fundo</a:t>
+            </a:r>
+            <a:r>
+              <a:rPr lang="en-US" dirty="0"/>
+              <a:t> </a:t>
+            </a:r>
+            <a:r>
+              <a:rPr lang="en-US" dirty="0" err="1"/>
+              <a:t>sem</a:t>
+            </a:r>
+            <a:r>
+              <a:rPr lang="en-US" dirty="0"/>
+              <a:t> </a:t>
+            </a:r>
+            <a:r>
+              <a:rPr lang="en-US" dirty="0" err="1"/>
+              <a:t>virar</a:t>
+            </a:r>
+            <a:r>
+              <a:rPr lang="en-US" dirty="0"/>
+              <a:t> </a:t>
+            </a:r>
+            <a:r>
+              <a:rPr lang="en-US" dirty="0" err="1"/>
+              <a:t>uma</a:t>
+            </a:r>
+            <a:r>
+              <a:rPr lang="en-US" dirty="0"/>
+              <a:t> </a:t>
+            </a:r>
+            <a:r>
+              <a:rPr lang="en-US" dirty="0" err="1"/>
+              <a:t>seção</a:t>
+            </a:r>
+            <a:r>
+              <a:rPr lang="en-US" dirty="0"/>
+              <a:t> formal.</a:t>
+            </a:r>
+          </a:p>
+        </p:txBody>
+      </p:sp>
+    </p:spTree>
+    <p:extLst>
+      <p:ext uri="{BB962C8B-B14F-4D97-AF65-F5344CB8AC3E}">
+        <p14:creationId xmlns:p14="http://schemas.microsoft.com/office/powerpoint/2010/main" val="431090248"/>
+      </p:ext>
+    </p:extLst>
+  </p:cSld>
+  <p:clrMapOvr>
+    <a:masterClrMapping/>
+  </p:clrMapOvr>
+</p:sld>
+</file>
+
+<file path=ppt/slides/slide7.xml><?xml version="1.0" encoding="utf-8"?>
+<p:sld xmlns:a="http://schemas.openxmlformats.org/drawingml/2006/main" xmlns:r="http://schemas.openxmlformats.org/officeDocument/2006/relationships" xmlns:p="http://schemas.openxmlformats.org/presentationml/2006/main">
+  <p:cSld>
+    <p:spTree>
+      <p:nvGrpSpPr>
+        <p:cNvPr id="1" name="">
+          <a:extLst>
+            <a:ext uri="{FF2B5EF4-FFF2-40B4-BE49-F238E27FC236}">
+              <a16:creationId xmlns:a16="http://schemas.microsoft.com/office/drawing/2014/main" id="{B0A81C8D-550A-D874-4153-5E6CEE912677}"/>
+            </a:ext>
+          </a:extLst>
+        </p:cNvPr>
+        <p:cNvGrpSpPr/>
+        <p:nvPr/>
+      </p:nvGrpSpPr>
+      <p:grpSpPr>
+        <a:xfrm>
+          <a:off x="0" y="0"/>
+          <a:ext cx="0" cy="0"/>
+          <a:chOff x="0" y="0"/>
+          <a:chExt cx="0" cy="0"/>
+        </a:xfrm>
+      </p:grpSpPr>
+      <p:sp>
+        <p:nvSpPr>
+          <p:cNvPr id="2" name="Título 1">
+            <a:extLst>
+              <a:ext uri="{FF2B5EF4-FFF2-40B4-BE49-F238E27FC236}">
+                <a16:creationId xmlns:a16="http://schemas.microsoft.com/office/drawing/2014/main" id="{C53B81D6-D706-E4FE-8559-D61FA3BC343E}"/>
+              </a:ext>
+            </a:extLst>
+          </p:cNvPr>
+          <p:cNvSpPr>
+            <a:spLocks noGrp="1"/>
+          </p:cNvSpPr>
+          <p:nvPr>
+            <p:ph type="title"/>
+          </p:nvPr>
+        </p:nvSpPr>
+        <p:spPr/>
+        <p:txBody>
+          <a:bodyPr/>
+          <a:lstStyle/>
+          <a:p>
+            <a:r>
+              <a:rPr lang="pt-BR" dirty="0" err="1"/>
+              <a:t>Question</a:t>
+            </a:r>
+            <a:r>
+              <a:rPr lang="pt-BR" dirty="0"/>
+              <a:t> 1 - </a:t>
+            </a:r>
+            <a:r>
+              <a:rPr lang="en-US" dirty="0"/>
+              <a:t>What is the current status of the forecasting and decomposition system? </a:t>
+            </a:r>
+          </a:p>
+        </p:txBody>
+      </p:sp>
+      <p:sp>
+        <p:nvSpPr>
+          <p:cNvPr id="3" name="Espaço Reservado para Conteúdo 2">
+            <a:extLst>
+              <a:ext uri="{FF2B5EF4-FFF2-40B4-BE49-F238E27FC236}">
+                <a16:creationId xmlns:a16="http://schemas.microsoft.com/office/drawing/2014/main" id="{F4E510FB-56C9-F5CD-E0FE-43EC33AA0CAB}"/>
+              </a:ext>
+            </a:extLst>
+          </p:cNvPr>
+          <p:cNvSpPr>
+            <a:spLocks noGrp="1"/>
+          </p:cNvSpPr>
+          <p:nvPr>
+            <p:ph idx="1"/>
+          </p:nvPr>
+        </p:nvSpPr>
+        <p:spPr/>
+        <p:txBody>
+          <a:bodyPr/>
+          <a:lstStyle/>
+          <a:p>
+            <a:r>
+              <a:rPr lang="en-US" b="1" dirty="0" err="1"/>
+              <a:t>Diagnóstico</a:t>
+            </a:r>
+            <a:r>
+              <a:rPr lang="en-US" b="1" dirty="0"/>
+              <a:t> do </a:t>
+            </a:r>
+            <a:r>
+              <a:rPr lang="en-US" b="1" dirty="0" err="1"/>
+              <a:t>Problema</a:t>
+            </a:r>
+            <a:r>
+              <a:rPr lang="en-US" b="1" dirty="0"/>
+              <a:t> 1 (</a:t>
+            </a:r>
+            <a:r>
+              <a:rPr lang="en-US" b="1" dirty="0" err="1"/>
+              <a:t>acurácia</a:t>
+            </a:r>
+            <a:r>
+              <a:rPr lang="en-US" b="1" dirty="0"/>
+              <a:t>)</a:t>
+            </a:r>
+            <a:br>
+              <a:rPr lang="en-US" dirty="0"/>
+            </a:br>
+            <a:r>
+              <a:rPr lang="en-US" dirty="0"/>
+              <a:t>Por </a:t>
+            </a:r>
+            <a:r>
+              <a:rPr lang="en-US" dirty="0" err="1"/>
+              <a:t>que</a:t>
+            </a:r>
+            <a:r>
+              <a:rPr lang="en-US" dirty="0"/>
+              <a:t> a </a:t>
+            </a:r>
+            <a:r>
+              <a:rPr lang="en-US" dirty="0" err="1"/>
+              <a:t>acurácia</a:t>
+            </a:r>
+            <a:r>
+              <a:rPr lang="en-US" dirty="0"/>
+              <a:t> é </a:t>
+            </a:r>
+            <a:r>
+              <a:rPr lang="en-US" dirty="0" err="1"/>
+              <a:t>baixa</a:t>
+            </a:r>
+            <a:r>
+              <a:rPr lang="en-US" dirty="0"/>
+              <a:t>: </a:t>
+            </a:r>
+            <a:r>
+              <a:rPr lang="en-US" dirty="0" err="1"/>
+              <a:t>modelo</a:t>
+            </a:r>
+            <a:r>
+              <a:rPr lang="en-US" dirty="0"/>
+              <a:t> </a:t>
+            </a:r>
+            <a:r>
+              <a:rPr lang="en-US" dirty="0" err="1"/>
+              <a:t>único</a:t>
+            </a:r>
+            <a:r>
+              <a:rPr lang="en-US" dirty="0"/>
+              <a:t> </a:t>
+            </a:r>
+            <a:r>
+              <a:rPr lang="en-US" dirty="0" err="1"/>
+              <a:t>por</a:t>
+            </a:r>
+            <a:r>
+              <a:rPr lang="en-US" dirty="0"/>
+              <a:t> canal "</a:t>
+            </a:r>
+            <a:r>
+              <a:rPr lang="en-US" dirty="0" err="1"/>
+              <a:t>misturando</a:t>
+            </a:r>
+            <a:r>
+              <a:rPr lang="en-US" dirty="0"/>
+              <a:t>" 5 </a:t>
+            </a:r>
+            <a:r>
+              <a:rPr lang="en-US" dirty="0" err="1"/>
+              <a:t>produtos</a:t>
+            </a:r>
+            <a:r>
+              <a:rPr lang="en-US" dirty="0"/>
+              <a:t> com </a:t>
+            </a:r>
+            <a:r>
+              <a:rPr lang="en-US" dirty="0" err="1"/>
+              <a:t>preços</a:t>
+            </a:r>
+            <a:r>
+              <a:rPr lang="en-US" dirty="0"/>
+              <a:t>/</a:t>
+            </a:r>
+            <a:r>
+              <a:rPr lang="en-US" dirty="0" err="1"/>
+              <a:t>comportamentos</a:t>
+            </a:r>
+            <a:r>
+              <a:rPr lang="en-US" dirty="0"/>
+              <a:t> </a:t>
+            </a:r>
+            <a:r>
+              <a:rPr lang="en-US" dirty="0" err="1"/>
+              <a:t>muito</a:t>
+            </a:r>
+            <a:r>
+              <a:rPr lang="en-US" dirty="0"/>
+              <a:t> </a:t>
+            </a:r>
+            <a:r>
+              <a:rPr lang="en-US" dirty="0" err="1"/>
+              <a:t>diferentes</a:t>
+            </a:r>
+            <a:r>
+              <a:rPr lang="en-US" dirty="0"/>
+              <a:t> (pooling). MAPE </a:t>
+            </a:r>
+            <a:r>
+              <a:rPr lang="en-US" dirty="0" err="1"/>
+              <a:t>penalizando</a:t>
+            </a:r>
+            <a:r>
+              <a:rPr lang="en-US" dirty="0"/>
+              <a:t> </a:t>
+            </a:r>
+            <a:r>
+              <a:rPr lang="en-US" dirty="0" err="1"/>
+              <a:t>desproporcionalmente</a:t>
+            </a:r>
+            <a:r>
+              <a:rPr lang="en-US" dirty="0"/>
+              <a:t> SKUs de </a:t>
+            </a:r>
+            <a:r>
+              <a:rPr lang="en-US" dirty="0" err="1"/>
+              <a:t>baixo</a:t>
+            </a:r>
+            <a:r>
+              <a:rPr lang="en-US" dirty="0"/>
+              <a:t> volume (</a:t>
+            </a:r>
+            <a:r>
+              <a:rPr lang="en-US" dirty="0" err="1"/>
+              <a:t>os</a:t>
+            </a:r>
+            <a:r>
+              <a:rPr lang="en-US" dirty="0"/>
+              <a:t> </a:t>
+            </a:r>
+            <a:r>
+              <a:rPr lang="en-US" dirty="0" err="1"/>
+              <a:t>dois</a:t>
+            </a:r>
+            <a:r>
+              <a:rPr lang="en-US" dirty="0"/>
+              <a:t> </a:t>
+            </a:r>
+            <a:r>
+              <a:rPr lang="en-US" dirty="0" err="1"/>
+              <a:t>casos</a:t>
+            </a:r>
+            <a:r>
+              <a:rPr lang="en-US" dirty="0"/>
+              <a:t> "</a:t>
+            </a:r>
+            <a:r>
+              <a:rPr lang="en-US" dirty="0" err="1"/>
+              <a:t>quebrados</a:t>
+            </a:r>
+            <a:r>
+              <a:rPr lang="en-US" dirty="0"/>
+              <a:t>" de E-commerce).</a:t>
+            </a:r>
+          </a:p>
+        </p:txBody>
+      </p:sp>
+    </p:spTree>
+    <p:extLst>
+      <p:ext uri="{BB962C8B-B14F-4D97-AF65-F5344CB8AC3E}">
+        <p14:creationId xmlns:p14="http://schemas.microsoft.com/office/powerpoint/2010/main" val="1859581858"/>
+      </p:ext>
+    </p:extLst>
+  </p:cSld>
+  <p:clrMapOvr>
+    <a:masterClrMapping/>
+  </p:clrMapOvr>
+</p:sld>
+</file>
+
+<file path=ppt/slides/slide8.xml><?xml version="1.0" encoding="utf-8"?>
+<p:sld xmlns:a="http://schemas.openxmlformats.org/drawingml/2006/main" xmlns:r="http://schemas.openxmlformats.org/officeDocument/2006/relationships" xmlns:p="http://schemas.openxmlformats.org/presentationml/2006/main">
+  <p:cSld>
+    <p:spTree>
+      <p:nvGrpSpPr>
+        <p:cNvPr id="1" name="">
+          <a:extLst>
+            <a:ext uri="{FF2B5EF4-FFF2-40B4-BE49-F238E27FC236}">
+              <a16:creationId xmlns:a16="http://schemas.microsoft.com/office/drawing/2014/main" id="{6721969C-C715-BBC9-D3A4-AB7A1797E049}"/>
+            </a:ext>
+          </a:extLst>
+        </p:cNvPr>
+        <p:cNvGrpSpPr/>
+        <p:nvPr/>
+      </p:nvGrpSpPr>
+      <p:grpSpPr>
+        <a:xfrm>
+          <a:off x="0" y="0"/>
+          <a:ext cx="0" cy="0"/>
+          <a:chOff x="0" y="0"/>
+          <a:chExt cx="0" cy="0"/>
+        </a:xfrm>
+      </p:grpSpPr>
+      <p:sp>
+        <p:nvSpPr>
+          <p:cNvPr id="2" name="Título 1">
+            <a:extLst>
+              <a:ext uri="{FF2B5EF4-FFF2-40B4-BE49-F238E27FC236}">
+                <a16:creationId xmlns:a16="http://schemas.microsoft.com/office/drawing/2014/main" id="{AD799EF6-D79B-D819-6146-EE9E447B2216}"/>
+              </a:ext>
+            </a:extLst>
+          </p:cNvPr>
+          <p:cNvSpPr>
+            <a:spLocks noGrp="1"/>
+          </p:cNvSpPr>
+          <p:nvPr>
+            <p:ph type="title"/>
+          </p:nvPr>
+        </p:nvSpPr>
+        <p:spPr/>
+        <p:txBody>
+          <a:bodyPr/>
+          <a:lstStyle/>
+          <a:p>
+            <a:r>
+              <a:rPr lang="pt-BR" dirty="0" err="1"/>
+              <a:t>Question</a:t>
+            </a:r>
+            <a:r>
+              <a:rPr lang="pt-BR" dirty="0"/>
+              <a:t> 1 - </a:t>
+            </a:r>
+            <a:r>
+              <a:rPr lang="en-US" dirty="0"/>
+              <a:t>What is the current status of the forecasting and decomposition system? </a:t>
+            </a:r>
+          </a:p>
+        </p:txBody>
+      </p:sp>
+      <p:sp>
+        <p:nvSpPr>
+          <p:cNvPr id="3" name="Espaço Reservado para Conteúdo 2">
+            <a:extLst>
+              <a:ext uri="{FF2B5EF4-FFF2-40B4-BE49-F238E27FC236}">
+                <a16:creationId xmlns:a16="http://schemas.microsoft.com/office/drawing/2014/main" id="{9DC0308E-9DDD-35B8-0A48-1F0C812A5C53}"/>
+              </a:ext>
+            </a:extLst>
+          </p:cNvPr>
+          <p:cNvSpPr>
+            <a:spLocks noGrp="1"/>
+          </p:cNvSpPr>
+          <p:nvPr>
+            <p:ph idx="1"/>
+          </p:nvPr>
+        </p:nvSpPr>
+        <p:spPr/>
+        <p:txBody>
+          <a:bodyPr/>
+          <a:lstStyle/>
+          <a:p>
+            <a:r>
+              <a:rPr lang="en-US" b="1" dirty="0" err="1"/>
+              <a:t>Diagnóstico</a:t>
+            </a:r>
+            <a:r>
+              <a:rPr lang="en-US" b="1" dirty="0"/>
+              <a:t> do </a:t>
+            </a:r>
+            <a:r>
+              <a:rPr lang="en-US" b="1" dirty="0" err="1"/>
+              <a:t>Problema</a:t>
+            </a:r>
+            <a:r>
+              <a:rPr lang="en-US" b="1" dirty="0"/>
+              <a:t> 2 (</a:t>
+            </a:r>
+            <a:r>
+              <a:rPr lang="en-US" b="1" dirty="0" err="1"/>
+              <a:t>decomposição</a:t>
+            </a:r>
+            <a:r>
+              <a:rPr lang="en-US" b="1" dirty="0"/>
+              <a:t>)</a:t>
+            </a:r>
+            <a:br>
+              <a:rPr lang="en-US" dirty="0"/>
+            </a:br>
+            <a:r>
+              <a:rPr lang="en-US" dirty="0"/>
+              <a:t>Por </a:t>
+            </a:r>
+            <a:r>
+              <a:rPr lang="en-US" dirty="0" err="1"/>
+              <a:t>que</a:t>
+            </a:r>
+            <a:r>
+              <a:rPr lang="en-US" dirty="0"/>
+              <a:t> o SHAP </a:t>
+            </a:r>
+            <a:r>
+              <a:rPr lang="en-US" dirty="0" err="1"/>
+              <a:t>não</a:t>
+            </a:r>
+            <a:r>
+              <a:rPr lang="en-US" dirty="0"/>
+              <a:t> </a:t>
+            </a:r>
+            <a:r>
+              <a:rPr lang="en-US" dirty="0" err="1"/>
+              <a:t>faz</a:t>
+            </a:r>
+            <a:r>
+              <a:rPr lang="en-US" dirty="0"/>
+              <a:t> </a:t>
+            </a:r>
+            <a:r>
+              <a:rPr lang="en-US" dirty="0" err="1"/>
+              <a:t>sentido</a:t>
+            </a:r>
+            <a:r>
+              <a:rPr lang="en-US" dirty="0"/>
+              <a:t>: causa </a:t>
+            </a:r>
+            <a:r>
+              <a:rPr lang="en-US" dirty="0" err="1"/>
+              <a:t>raiz</a:t>
+            </a:r>
+            <a:r>
+              <a:rPr lang="en-US" dirty="0"/>
+              <a:t> é a </a:t>
+            </a:r>
+            <a:r>
+              <a:rPr lang="en-US" dirty="0" err="1"/>
+              <a:t>mesma</a:t>
+            </a:r>
+            <a:r>
+              <a:rPr lang="en-US" dirty="0"/>
+              <a:t> do pooling — </a:t>
+            </a:r>
+            <a:r>
+              <a:rPr lang="en-US" dirty="0" err="1"/>
+              <a:t>misturar</a:t>
+            </a:r>
+            <a:r>
+              <a:rPr lang="en-US" dirty="0"/>
+              <a:t> </a:t>
+            </a:r>
+            <a:r>
+              <a:rPr lang="en-US" dirty="0" err="1"/>
+              <a:t>produtos</a:t>
+            </a:r>
+            <a:r>
+              <a:rPr lang="en-US" dirty="0"/>
+              <a:t> de </a:t>
+            </a:r>
+            <a:r>
+              <a:rPr lang="en-US" dirty="0" err="1"/>
+              <a:t>preços</a:t>
+            </a:r>
+            <a:r>
+              <a:rPr lang="en-US" dirty="0"/>
+              <a:t> </a:t>
+            </a:r>
+            <a:r>
+              <a:rPr lang="en-US" dirty="0" err="1"/>
+              <a:t>muito</a:t>
+            </a:r>
+            <a:r>
+              <a:rPr lang="en-US" dirty="0"/>
+              <a:t> </a:t>
+            </a:r>
+            <a:r>
+              <a:rPr lang="en-US" dirty="0" err="1"/>
+              <a:t>diferentes</a:t>
+            </a:r>
+            <a:r>
+              <a:rPr lang="en-US" dirty="0"/>
+              <a:t> </a:t>
+            </a:r>
+            <a:r>
+              <a:rPr lang="en-US" dirty="0" err="1"/>
+              <a:t>confunde</a:t>
+            </a:r>
+            <a:r>
+              <a:rPr lang="en-US" dirty="0"/>
+              <a:t> a </a:t>
+            </a:r>
+            <a:r>
+              <a:rPr lang="en-US" dirty="0" err="1"/>
+              <a:t>leitura</a:t>
+            </a:r>
+            <a:r>
+              <a:rPr lang="en-US" dirty="0"/>
+              <a:t> de </a:t>
+            </a:r>
+            <a:r>
+              <a:rPr lang="en-US" dirty="0" err="1"/>
+              <a:t>elasticidade</a:t>
+            </a:r>
+            <a:r>
+              <a:rPr lang="en-US" dirty="0"/>
+              <a:t>. </a:t>
+            </a:r>
+            <a:r>
+              <a:rPr lang="en-US" dirty="0" err="1"/>
+              <a:t>Promoção</a:t>
+            </a:r>
+            <a:r>
+              <a:rPr lang="en-US" dirty="0"/>
+              <a:t> "</a:t>
+            </a:r>
+            <a:r>
+              <a:rPr lang="en-US" dirty="0" err="1"/>
+              <a:t>rouba</a:t>
+            </a:r>
+            <a:r>
+              <a:rPr lang="en-US" dirty="0"/>
+              <a:t>" </a:t>
+            </a:r>
+            <a:r>
+              <a:rPr lang="en-US" dirty="0" err="1"/>
+              <a:t>crédito</a:t>
+            </a:r>
+            <a:r>
+              <a:rPr lang="en-US" dirty="0"/>
+              <a:t> de </a:t>
+            </a:r>
+            <a:r>
+              <a:rPr lang="en-US" dirty="0" err="1"/>
+              <a:t>Publicidade</a:t>
+            </a:r>
+            <a:r>
+              <a:rPr lang="en-US" dirty="0"/>
+              <a:t> </a:t>
+            </a:r>
+            <a:r>
+              <a:rPr lang="en-US" dirty="0" err="1"/>
+              <a:t>por</a:t>
+            </a:r>
+            <a:r>
+              <a:rPr lang="en-US" dirty="0"/>
+              <a:t> </a:t>
+            </a:r>
+            <a:r>
+              <a:rPr lang="en-US" dirty="0" err="1"/>
+              <a:t>colinearidade</a:t>
+            </a:r>
+            <a:r>
+              <a:rPr lang="en-US" dirty="0"/>
+              <a:t>/</a:t>
+            </a:r>
+            <a:r>
+              <a:rPr lang="en-US" dirty="0" err="1"/>
+              <a:t>falta</a:t>
+            </a:r>
+            <a:r>
+              <a:rPr lang="en-US" dirty="0"/>
+              <a:t> de </a:t>
+            </a:r>
+            <a:r>
+              <a:rPr lang="en-US" dirty="0" err="1"/>
+              <a:t>restrição</a:t>
+            </a:r>
+            <a:r>
+              <a:rPr lang="en-US" dirty="0"/>
+              <a:t>.</a:t>
+            </a:r>
+          </a:p>
+        </p:txBody>
+      </p:sp>
+    </p:spTree>
+    <p:extLst>
+      <p:ext uri="{BB962C8B-B14F-4D97-AF65-F5344CB8AC3E}">
+        <p14:creationId xmlns:p14="http://schemas.microsoft.com/office/powerpoint/2010/main" val="2284113"/>
+      </p:ext>
+    </p:extLst>
+  </p:cSld>
+  <p:clrMapOvr>
+    <a:masterClrMapping/>
+  </p:clrMapOvr>
+</p:sld>
+</file>
+
+<file path=ppt/slides/slide9.xml><?xml version="1.0" encoding="utf-8"?>
+<p:sld xmlns:a="http://schemas.openxmlformats.org/drawingml/2006/main" xmlns:r="http://schemas.openxmlformats.org/officeDocument/2006/relationships" xmlns:p="http://schemas.openxmlformats.org/presentationml/2006/main">
+  <p:cSld>
+    <p:spTree>
+      <p:nvGrpSpPr>
+        <p:cNvPr id="1" name="">
+          <a:extLst>
+            <a:ext uri="{FF2B5EF4-FFF2-40B4-BE49-F238E27FC236}">
+              <a16:creationId xmlns:a16="http://schemas.microsoft.com/office/drawing/2014/main" id="{9E328084-AADF-67B6-C6EF-700C58956116}"/>
+            </a:ext>
+          </a:extLst>
+        </p:cNvPr>
+        <p:cNvGrpSpPr/>
+        <p:nvPr/>
+      </p:nvGrpSpPr>
+      <p:grpSpPr>
+        <a:xfrm>
+          <a:off x="0" y="0"/>
+          <a:ext cx="0" cy="0"/>
+          <a:chOff x="0" y="0"/>
+          <a:chExt cx="0" cy="0"/>
+        </a:xfrm>
+      </p:grpSpPr>
+      <p:sp>
+        <p:nvSpPr>
+          <p:cNvPr id="2" name="Título 1">
+            <a:extLst>
+              <a:ext uri="{FF2B5EF4-FFF2-40B4-BE49-F238E27FC236}">
+                <a16:creationId xmlns:a16="http://schemas.microsoft.com/office/drawing/2014/main" id="{5CB75230-3F07-A3A9-24C1-56531172B1A3}"/>
+              </a:ext>
+            </a:extLst>
+          </p:cNvPr>
+          <p:cNvSpPr>
+            <a:spLocks noGrp="1"/>
+          </p:cNvSpPr>
+          <p:nvPr>
+            <p:ph type="title"/>
+          </p:nvPr>
+        </p:nvSpPr>
+        <p:spPr/>
+        <p:txBody>
+          <a:bodyPr/>
+          <a:lstStyle/>
+          <a:p>
+            <a:r>
+              <a:rPr lang="pt-BR" dirty="0" err="1"/>
+              <a:t>Question</a:t>
+            </a:r>
+            <a:r>
+              <a:rPr lang="pt-BR" dirty="0"/>
+              <a:t> 2 - </a:t>
+            </a:r>
+            <a:r>
+              <a:rPr lang="en-US" dirty="0"/>
+              <a:t>What can be done to improve the accuracy of the systems? </a:t>
+            </a:r>
+          </a:p>
+        </p:txBody>
+      </p:sp>
+      <p:sp>
+        <p:nvSpPr>
+          <p:cNvPr id="3" name="Espaço Reservado para Conteúdo 2">
+            <a:extLst>
+              <a:ext uri="{FF2B5EF4-FFF2-40B4-BE49-F238E27FC236}">
+                <a16:creationId xmlns:a16="http://schemas.microsoft.com/office/drawing/2014/main" id="{193216AA-9991-E2F8-5212-E93B13897B8B}"/>
+              </a:ext>
+            </a:extLst>
+          </p:cNvPr>
+          <p:cNvSpPr>
+            <a:spLocks noGrp="1"/>
+          </p:cNvSpPr>
+          <p:nvPr>
+            <p:ph idx="1"/>
+          </p:nvPr>
+        </p:nvSpPr>
+        <p:spPr/>
+        <p:txBody>
+          <a:bodyPr/>
+          <a:lstStyle/>
+          <a:p>
+            <a:r>
+              <a:rPr lang="en-US" b="1" dirty="0" err="1"/>
+              <a:t>Visão</a:t>
+            </a:r>
+            <a:r>
+              <a:rPr lang="en-US" b="1" dirty="0"/>
+              <a:t> </a:t>
+            </a:r>
+            <a:r>
+              <a:rPr lang="en-US" b="1" dirty="0" err="1"/>
+              <a:t>geral</a:t>
+            </a:r>
+            <a:r>
+              <a:rPr lang="en-US" b="1" dirty="0"/>
+              <a:t> da </a:t>
+            </a:r>
+            <a:r>
+              <a:rPr lang="en-US" b="1" dirty="0" err="1"/>
+              <a:t>solução</a:t>
+            </a:r>
+            <a:br>
+              <a:rPr lang="en-US" dirty="0"/>
+            </a:br>
+            <a:r>
+              <a:rPr lang="en-US" dirty="0"/>
+              <a:t>As 3 </a:t>
+            </a:r>
+            <a:r>
+              <a:rPr lang="en-US" dirty="0" err="1"/>
+              <a:t>mudanças</a:t>
+            </a:r>
+            <a:r>
+              <a:rPr lang="en-US" dirty="0"/>
+              <a:t> </a:t>
+            </a:r>
+            <a:r>
+              <a:rPr lang="en-US" dirty="0" err="1"/>
+              <a:t>estruturais</a:t>
+            </a:r>
+            <a:r>
+              <a:rPr lang="en-US" dirty="0"/>
+              <a:t>: (1) </a:t>
+            </a:r>
+            <a:r>
+              <a:rPr lang="en-US" dirty="0" err="1"/>
+              <a:t>modelo</a:t>
+            </a:r>
+            <a:r>
+              <a:rPr lang="en-US" dirty="0"/>
+              <a:t> </a:t>
+            </a:r>
+            <a:r>
+              <a:rPr lang="en-US" dirty="0" err="1"/>
+              <a:t>por</a:t>
+            </a:r>
+            <a:r>
+              <a:rPr lang="en-US" dirty="0"/>
+              <a:t> SKU-canal </a:t>
+            </a:r>
+            <a:r>
+              <a:rPr lang="en-US" dirty="0" err="1"/>
+              <a:t>em</a:t>
+            </a:r>
+            <a:r>
+              <a:rPr lang="en-US" dirty="0"/>
+              <a:t> </a:t>
+            </a:r>
+            <a:r>
+              <a:rPr lang="en-US" dirty="0" err="1"/>
+              <a:t>vez</a:t>
+            </a:r>
+            <a:r>
+              <a:rPr lang="en-US" dirty="0"/>
+              <a:t> de canal </a:t>
+            </a:r>
+            <a:r>
+              <a:rPr lang="en-US" dirty="0" err="1"/>
+              <a:t>agregado</a:t>
+            </a:r>
+            <a:r>
+              <a:rPr lang="en-US" dirty="0"/>
+              <a:t>, (2) </a:t>
+            </a:r>
+            <a:r>
+              <a:rPr lang="en-US" dirty="0" err="1"/>
+              <a:t>restrição</a:t>
+            </a:r>
+            <a:r>
+              <a:rPr lang="en-US" dirty="0"/>
+              <a:t> </a:t>
+            </a:r>
+            <a:r>
+              <a:rPr lang="en-US" dirty="0" err="1"/>
+              <a:t>monotônica</a:t>
+            </a:r>
+            <a:r>
+              <a:rPr lang="en-US" dirty="0"/>
+              <a:t> de </a:t>
+            </a:r>
+            <a:r>
+              <a:rPr lang="en-US" dirty="0" err="1"/>
+              <a:t>preço</a:t>
+            </a:r>
+            <a:r>
+              <a:rPr lang="en-US" dirty="0"/>
+              <a:t>, (3) </a:t>
+            </a:r>
+            <a:r>
+              <a:rPr lang="en-US" dirty="0" err="1"/>
+              <a:t>sistema</a:t>
+            </a:r>
+            <a:r>
+              <a:rPr lang="en-US" dirty="0"/>
+              <a:t> de bake-off (</a:t>
+            </a:r>
+            <a:r>
+              <a:rPr lang="en-US" dirty="0" err="1"/>
+              <a:t>LightGBM</a:t>
+            </a:r>
+            <a:r>
+              <a:rPr lang="en-US" dirty="0"/>
+              <a:t> / GAM / </a:t>
+            </a:r>
+            <a:r>
+              <a:rPr lang="en-US" dirty="0" err="1"/>
+              <a:t>LightGBM</a:t>
+            </a:r>
+            <a:r>
+              <a:rPr lang="en-US" dirty="0"/>
+              <a:t> Pooled) </a:t>
+            </a:r>
+            <a:r>
+              <a:rPr lang="en-US" dirty="0" err="1"/>
+              <a:t>escolhendo</a:t>
+            </a:r>
+            <a:r>
+              <a:rPr lang="en-US" dirty="0"/>
+              <a:t> o </a:t>
+            </a:r>
+            <a:r>
+              <a:rPr lang="en-US" dirty="0" err="1"/>
+              <a:t>melhor</a:t>
+            </a:r>
+            <a:r>
+              <a:rPr lang="en-US" dirty="0"/>
+              <a:t> </a:t>
+            </a:r>
+            <a:r>
+              <a:rPr lang="en-US" dirty="0" err="1"/>
+              <a:t>modelo</a:t>
+            </a:r>
+            <a:r>
+              <a:rPr lang="en-US" dirty="0"/>
+              <a:t> </a:t>
+            </a:r>
+            <a:r>
+              <a:rPr lang="en-US" dirty="0" err="1"/>
+              <a:t>por</a:t>
+            </a:r>
+            <a:r>
+              <a:rPr lang="en-US" dirty="0"/>
+              <a:t> SKU-canal, </a:t>
+            </a:r>
+            <a:r>
+              <a:rPr lang="en-US" dirty="0" err="1"/>
+              <a:t>validado</a:t>
+            </a:r>
+            <a:r>
+              <a:rPr lang="en-US" dirty="0"/>
+              <a:t> com </a:t>
+            </a:r>
+            <a:r>
+              <a:rPr lang="en-US" dirty="0" err="1"/>
+              <a:t>backtest</a:t>
+            </a:r>
+            <a:r>
+              <a:rPr lang="en-US" dirty="0"/>
+              <a:t> </a:t>
+            </a:r>
+            <a:r>
+              <a:rPr lang="en-US" dirty="0" err="1"/>
+              <a:t>recursivo</a:t>
+            </a:r>
+            <a:r>
+              <a:rPr lang="en-US" dirty="0"/>
+              <a:t>.</a:t>
+            </a:r>
+          </a:p>
+        </p:txBody>
+      </p:sp>
+    </p:spTree>
+    <p:extLst>
+      <p:ext uri="{BB962C8B-B14F-4D97-AF65-F5344CB8AC3E}">
+        <p14:creationId xmlns:p14="http://schemas.microsoft.com/office/powerpoint/2010/main" val="1425692909"/>
       </p:ext>
     </p:extLst>
   </p:cSld>
